--- a/assets/girassol/Centro-de-Servicos-Girassol-Cocalzinho.pptx
+++ b/assets/girassol/Centro-de-Servicos-Girassol-Cocalzinho.pptx
@@ -3745,7 +3745,7 @@
       </p:grpSpPr>
       <p:pic>
         <p:nvPicPr>
-          <p:cNvPr id="2" name="Image 0" descr="visuals/reveal-placeholder.png">    </p:cNvPr>
+          <p:cNvPr id="2" name="Image 0" descr="visuals-real/reveal.jpg">    </p:cNvPr>
           <p:cNvPicPr>
             <a:picLocks noChangeAspect="1"/>
           </p:cNvPicPr>
@@ -4874,7 +4874,7 @@
       </p:grpSpPr>
       <p:pic>
         <p:nvPicPr>
-          <p:cNvPr id="2" name="Image 0" descr="visuals/render-placeholder-01.png">    </p:cNvPr>
+          <p:cNvPr id="2" name="Image 0" descr="visuals-real/render-01.jpg">    </p:cNvPr>
           <p:cNvPicPr>
             <a:picLocks noChangeAspect="1"/>
           </p:cNvPicPr>
@@ -5029,7 +5029,7 @@
       </p:grpSpPr>
       <p:pic>
         <p:nvPicPr>
-          <p:cNvPr id="2" name="Image 0" descr="visuals/render-placeholder-02.png">    </p:cNvPr>
+          <p:cNvPr id="2" name="Image 0" descr="visuals-real/render-02.jpg">    </p:cNvPr>
           <p:cNvPicPr>
             <a:picLocks noChangeAspect="1"/>
           </p:cNvPicPr>
@@ -5184,7 +5184,7 @@
       </p:grpSpPr>
       <p:pic>
         <p:nvPicPr>
-          <p:cNvPr id="2" name="Image 0" descr="visuals/render-placeholder-03.png">    </p:cNvPr>
+          <p:cNvPr id="2" name="Image 0" descr="visuals-real/render-03.jpg">    </p:cNvPr>
           <p:cNvPicPr>
             <a:picLocks noChangeAspect="1"/>
           </p:cNvPicPr>
@@ -5339,7 +5339,7 @@
       </p:grpSpPr>
       <p:pic>
         <p:nvPicPr>
-          <p:cNvPr id="2" name="Image 0" descr="visuals/render-placeholder-04.png">    </p:cNvPr>
+          <p:cNvPr id="2" name="Image 0" descr="visuals-real/render-04.jpg">    </p:cNvPr>
           <p:cNvPicPr>
             <a:picLocks noChangeAspect="1"/>
           </p:cNvPicPr>

--- a/assets/girassol/Centro-de-Servicos-Girassol-Cocalzinho.pptx
+++ b/assets/girassol/Centro-de-Servicos-Girassol-Cocalzinho.pptx
@@ -1132,7 +1132,7 @@
           <a:p>
             <a:r>
               <a:rPr lang="en-US" dirty="0"/>
-              <a:t>Alguns sinais já são públicos: novo aeroporto em estudo para Águas Lindas, expansão industrial no Entorno, investimentos internacionais mirando a logística regional, e a BR-070 como eixo entre Brasília e o Centro-Oeste. Juntos, esses pontos desenham um corredor — e corredores sempre passam por cidades específicas, nunca por todas. A pergunta é: quem estará preparado?</a:t>
+              <a:t>Alguns sinais já são públicos: o novo aeroporto em estudo para Águas Lindas de Goiás já tem, no local previsto, acesso direto à BR-070 — sem precisar cortar o perímetro urbano da cidade. Some a isso a expansão industrial no Entorno, investimentos internacionais mirando a logística regional, e a própria BR-070 como eixo entre Brasília e o Centro-Oeste. Juntos, esses pontos desenham um corredor — e corredores sempre passam por cidades específicas, nunca por todas. A pergunta é: quem estará preparado?</a:t>
             </a:r>
             <a:endParaRPr lang="en-US" dirty="0"/>
           </a:p>
@@ -4525,7 +4525,7 @@
                 <a:ea typeface="Calibri" pitchFamily="34" charset="-122"/>
                 <a:cs typeface="Calibri" pitchFamily="34" charset="-120"/>
               </a:rPr>
-              <a:t>Novo aeroporto em estudo para Águas Lindas de Goiás</a:t>
+              <a:t>Novo aeroporto em estudo para Águas Lindas de Goiás — local já com acesso direto à BR-070</a:t>
             </a:r>
             <a:endParaRPr lang="en-US" sz="1400" dirty="0"/>
           </a:p>

--- a/assets/girassol/Centro-de-Servicos-Girassol-Cocalzinho.pptx
+++ b/assets/girassol/Centro-de-Servicos-Girassol-Cocalzinho.pptx
@@ -19,10 +19,9 @@
     <p:sldId id="267" r:id="rId13"/>
     <p:sldId id="268" r:id="rId14"/>
     <p:sldId id="269" r:id="rId15"/>
-    <p:sldId id="270" r:id="rId16"/>
   </p:sldIdLst>
   <p:notesMasterIdLst>
-    <p:notesMasterId r:id="rId17"/>
+    <p:notesMasterId r:id="rId16"/>
   </p:notesMasterIdLst>
   <p:sldSz cx="12192000" cy="6858000"/>
   <p:notesSz cx="6858000" cy="12192000"/>
@@ -516,7 +515,7 @@
           <a:p>
             <a:r>
               <a:rPr lang="en-US" dirty="0"/>
-              <a:t>Obrigado pelo tempo. Nos próximos minutos eu quero apresentar não um pedido, mas uma leitura de território — e mostrar por que Cocalzinho está numa posição estratégica dentro de um movimento que já está em curso na região.</a:t>
+              <a:t>Obrigado pelo tempo. Vou direto ao ponto: isso aqui é um negócio, e eu quero mostrar por que ele faz sentido pra Cocalzinho tanto quanto faz sentido pra gente.</a:t>
             </a:r>
             <a:endParaRPr lang="en-US" dirty="0"/>
           </a:p>
@@ -604,7 +603,7 @@
           <a:p>
             <a:r>
               <a:rPr lang="en-US" dirty="0"/>
-              <a:t>Uma estrutura horizontal e discreta, que dialoga com a paisagem rural em vez de competir com ela.</a:t>
+              <a:t>Em nenhum desses pontos o benefício central é da iniciativa privada — o benefício central é da cidade. A estrutura é o meio. Cocalzinho é o fim.</a:t>
             </a:r>
             <a:endParaRPr lang="en-US" dirty="0"/>
           </a:p>
@@ -692,7 +691,7 @@
           <a:p>
             <a:r>
               <a:rPr lang="en-US" dirty="0"/>
-              <a:t>Em nenhum desses pontos o benefício central é da iniciativa privada — o benefício central é da cidade. A estrutura é o meio. Cocalzinho é o fim.</a:t>
+              <a:t>O município contribui com apoio pontual e institucional — nada além disso. Todo o investimento, a execução e a operação ficam a cargo da iniciativa privada. Uma parceria enxuta, mas estrategicamente decisiva.</a:t>
             </a:r>
             <a:endParaRPr lang="en-US" dirty="0"/>
           </a:p>
@@ -780,7 +779,7 @@
           <a:p>
             <a:r>
               <a:rPr lang="en-US" dirty="0"/>
-              <a:t>O município contribui com apoio pontual e institucional — nada além disso. Todo o investimento, a execução e a operação ficam a cargo da iniciativa privada. Uma parceria enxuta, mas estrategicamente decisiva.</a:t>
+              <a:t>Um caminho curto e objetivo. Estamos prontos para avançar assim que houver o alinhamento institucional necessário.</a:t>
             </a:r>
             <a:endParaRPr lang="en-US" dirty="0"/>
           </a:p>
@@ -868,7 +867,7 @@
           <a:p>
             <a:r>
               <a:rPr lang="en-US" dirty="0"/>
-              <a:t>Um caminho curto e objetivo. Estamos prontos para avançar assim que houver o alinhamento institucional necessário.</a:t>
+              <a:t>As grandes cidades não crescem por acaso. Elas crescem porque alguém decidiu acreditar antes dos outros. Essa é a oportunidade: não autorizar um investimento privado, mas posicionar Cocalzinho de Goiás no próximo ciclo de desenvolvimento do Entorno.</a:t>
             </a:r>
             <a:endParaRPr lang="en-US" dirty="0"/>
           </a:p>
@@ -956,7 +955,7 @@
           <a:p>
             <a:r>
               <a:rPr lang="en-US" dirty="0"/>
-              <a:t>As grandes cidades não crescem por acaso. Elas crescem porque alguém decidiu acreditar antes dos outros. Essa é a oportunidade: não autorizar um investimento privado, mas posicionar Cocalzinho de Goiás no próximo ciclo de desenvolvimento do Entorno.</a:t>
+              <a:t>Cocalzinho de Goiás. Pronta para o que vem a seguir. Obrigado — e vamos, juntos, desenhar essa próxima etapa.</a:t>
             </a:r>
             <a:endParaRPr lang="en-US" dirty="0"/>
           </a:p>
@@ -980,94 +979,6 @@
             <a:fld id="{F7021451-1387-4CA6-816F-3879F97B5CBC}" type="slidenum">
               <a:rPr lang="en-US"/>
               <a:t>14</a:t>
-            </a:fld>
-            <a:endParaRPr lang="en-US"/>
-          </a:p>
-        </p:txBody>
-      </p:sp>
-    </p:spTree>
-    <p:extLst>
-      <p:ext uri="{BB962C8B-B14F-4D97-AF65-F5344CB8AC3E}">
-        <p14:creationId xmlns:p14="http://schemas.microsoft.com/office/powerpoint/2010/main" val="1024086991"/>
-      </p:ext>
-    </p:extLst>
-  </p:cSld>
-  <p:clrMapOvr>
-    <a:masterClrMapping/>
-  </p:clrMapOvr>
-</p:notes>
-</file>
-
-<file path=ppt/notesSlides/notesSlide15.xml><?xml version="1.0" encoding="utf-8"?>
-<p:notes xmlns:a="http://schemas.openxmlformats.org/drawingml/2006/main" xmlns:r="http://schemas.openxmlformats.org/officeDocument/2006/relationships" xmlns:p="http://schemas.openxmlformats.org/presentationml/2006/main">
-  <p:cSld>
-    <p:spTree>
-      <p:nvGrpSpPr>
-        <p:cNvPr id="1" name=""/>
-        <p:cNvGrpSpPr/>
-        <p:nvPr/>
-      </p:nvGrpSpPr>
-      <p:grpSpPr>
-        <a:xfrm>
-          <a:off x="0" y="0"/>
-          <a:ext cx="0" cy="0"/>
-          <a:chOff x="0" y="0"/>
-          <a:chExt cx="0" cy="0"/>
-        </a:xfrm>
-      </p:grpSpPr>
-      <p:sp>
-        <p:nvSpPr>
-          <p:cNvPr id="2" name="Slide Image Placeholder 1"/>
-          <p:cNvSpPr>
-            <a:spLocks noGrp="1" noRot="1" noChangeAspect="1"/>
-          </p:cNvSpPr>
-          <p:nvPr>
-            <p:ph type="sldImg"/>
-          </p:nvPr>
-        </p:nvSpPr>
-        <p:spPr/>
-      </p:sp>
-      <p:sp>
-        <p:nvSpPr>
-          <p:cNvPr id="3" name="Notes Placeholder 2"/>
-          <p:cNvSpPr>
-            <a:spLocks noGrp="1"/>
-          </p:cNvSpPr>
-          <p:nvPr>
-            <p:ph type="body" idx="1"/>
-          </p:nvPr>
-        </p:nvSpPr>
-        <p:spPr/>
-        <p:txBody>
-          <a:bodyPr/>
-          <a:lstStyle/>
-          <a:p>
-            <a:r>
-              <a:rPr lang="en-US" dirty="0"/>
-              <a:t>Cocalzinho de Goiás. Pronta para o que vem a seguir. Obrigado — e vamos, juntos, desenhar essa próxima etapa.</a:t>
-            </a:r>
-            <a:endParaRPr lang="en-US" dirty="0"/>
-          </a:p>
-        </p:txBody>
-      </p:sp>
-      <p:sp>
-        <p:nvSpPr>
-          <p:cNvPr id="4" name="Slide Number Placeholder 3"/>
-          <p:cNvSpPr>
-            <a:spLocks noGrp="1"/>
-          </p:cNvSpPr>
-          <p:nvPr>
-            <p:ph type="sldNum" sz="quarter" idx="10"/>
-          </p:nvPr>
-        </p:nvSpPr>
-        <p:spPr/>
-        <p:txBody>
-          <a:bodyPr/>
-          <a:lstStyle/>
-          <a:p>
-            <a:fld id="{F7021451-1387-4CA6-816F-3879F97B5CBC}" type="slidenum">
-              <a:rPr lang="en-US"/>
-              <a:t>15</a:t>
             </a:fld>
             <a:endParaRPr lang="en-US"/>
           </a:p>
@@ -1132,7 +1043,7 @@
           <a:p>
             <a:r>
               <a:rPr lang="en-US" dirty="0"/>
-              <a:t>Alguns sinais já são públicos: o novo aeroporto em estudo para Águas Lindas de Goiás já tem, no local previsto, acesso direto à BR-070 — sem precisar cortar o perímetro urbano da cidade. Some a isso a expansão industrial no Entorno, investimentos internacionais mirando a logística regional, e a própria BR-070 como eixo entre Brasília e o Centro-Oeste. Juntos, esses pontos desenham um corredor — e corredores sempre passam por cidades específicas, nunca por todas. A pergunta é: quem estará preparado?</a:t>
+              <a:t>A estrada está pronta — a BR-070 foi recuperada e está em boas condições. O problema é outro: hoje, sem uma estrutura adequada, motoristas evitam esse trecho. E a poucos minutos daqui, o acesso à BR-153 leva direto até Tocantins — isso é um fluxo gigantesco de caminhões que hoje passa longe de Cocalzinho. Com a estrutura certa, esse movimento passa a parar aqui: mais gente na cidade, mais movimento, todos os dias.</a:t>
             </a:r>
             <a:endParaRPr lang="en-US" dirty="0"/>
           </a:p>
@@ -1220,7 +1131,7 @@
           <a:p>
             <a:r>
               <a:rPr lang="en-US" dirty="0"/>
-              <a:t>Cocalzinho está posicionada exatamente sobre esse corredor — na BR-070, entre Ceilândia e o interior de Goiás, no caminho diário de famílias, produtores rurais e transportadoras entre Brasília e o Centro-Oeste produtivo. É a posição que historicamente decide quais cidades crescem junto com a infraestrutura.</a:t>
+              <a:t>Cocalzinho fica na BR-070, entre Ceilândia e o interior de Goiás, perto o suficiente do acesso à BR-153 para captar esse fluxo que sobe até Tocantins. É uma posição prática — não é sorte, é geografia.</a:t>
             </a:r>
             <a:endParaRPr lang="en-US" dirty="0"/>
           </a:p>
@@ -1308,7 +1219,7 @@
           <a:p>
             <a:r>
               <a:rPr lang="en-US" dirty="0"/>
-              <a:t>É uma lacuna visível para quem observa o dia a dia da rodovia — e uma lacuna que tende a crescer junto com o corredor que acabamos de descrever. A cidade que resolve isso primeiro, sai na frente.</a:t>
+              <a:t>Isso é o Centro de Serviços Girassol. Um nome simples para uma peça de infraestrutura — vamos entender exatamente o que ela é, e o que ela não é.</a:t>
             </a:r>
             <a:endParaRPr lang="en-US" dirty="0"/>
           </a:p>
@@ -1396,7 +1307,7 @@
           <a:p>
             <a:r>
               <a:rPr lang="en-US" dirty="0"/>
-              <a:t>Isso é o Centro de Serviços Girassol. Um nome simples para uma peça de infraestrutura — vamos entender exatamente o que ela é, e o que ela não é.</a:t>
+              <a:t>Oito frentes, uma mesma estrutura: transportadores com apoio real para operar com segurança, agronegócio com um ponto de escoamento mais eficiente, famílias com um lugar preparado para parar — e tudo isso movimentando a economia local e integrando a região.</a:t>
             </a:r>
             <a:endParaRPr lang="en-US" dirty="0"/>
           </a:p>
@@ -1484,7 +1395,7 @@
           <a:p>
             <a:r>
               <a:rPr lang="en-US" dirty="0"/>
-              <a:t>Oito frentes, uma mesma estrutura: transportadores com apoio real para operar com segurança, agronegócio com um ponto de escoamento mais eficiente, famílias com um lugar preparado para parar — e tudo isso movimentando a economia local e integrando a região.</a:t>
+              <a:t>A escala da cobertura e a separação entre fluxo pesado e leve não são acidentais — é desenho de circulação.</a:t>
             </a:r>
             <a:endParaRPr lang="en-US" dirty="0"/>
           </a:p>
@@ -1572,7 +1483,7 @@
           <a:p>
             <a:r>
               <a:rPr lang="en-US" dirty="0"/>
-              <a:t>A escala da cobertura e a separação entre fluxo pesado e leve não são acidentais — é desenho de circulação.</a:t>
+              <a:t>O paisagismo qualifica o espaço público que a estrutura devolve à cidade.</a:t>
             </a:r>
             <a:endParaRPr lang="en-US" dirty="0"/>
           </a:p>
@@ -1660,7 +1571,7 @@
           <a:p>
             <a:r>
               <a:rPr lang="en-US" dirty="0"/>
-              <a:t>O paisagismo qualifica o espaço público que a estrutura devolve à cidade.</a:t>
+              <a:t>Cada acesso separa quem abastece, quem descansa e quem só passa.</a:t>
             </a:r>
             <a:endParaRPr lang="en-US" dirty="0"/>
           </a:p>
@@ -1748,7 +1659,7 @@
           <a:p>
             <a:r>
               <a:rPr lang="en-US" dirty="0"/>
-              <a:t>Cada acesso separa quem abastece, quem descansa e quem só passa.</a:t>
+              <a:t>Uma estrutura horizontal e discreta, que dialoga com a paisagem rural em vez de competir com ela.</a:t>
             </a:r>
             <a:endParaRPr lang="en-US" dirty="0"/>
           </a:p>
@@ -2193,7 +2104,7 @@
                 <a:ea typeface="Cambria" pitchFamily="34" charset="-122"/>
                 <a:cs typeface="Cambria" pitchFamily="34" charset="-120"/>
               </a:rPr>
-              <a:t>Uma nova peça de infraestrutura</a:t>
+              <a:t>Uma estrutura de apoio para quem</a:t>
             </a:r>
             <a:endParaRPr lang="en-US" sz="3400" dirty="0"/>
           </a:p>
@@ -2210,7 +2121,7 @@
                 <a:ea typeface="Cambria" pitchFamily="34" charset="-122"/>
                 <a:cs typeface="Cambria" pitchFamily="34" charset="-120"/>
               </a:rPr>
-              <a:t>para o corredor econômico de Brasília</a:t>
+              <a:t>já passa pela BR-070 todos os dias.</a:t>
             </a:r>
             <a:endParaRPr lang="en-US" sz="3400" dirty="0"/>
           </a:p>
@@ -2269,7 +2180,7 @@
     <p:bg>
       <p:bgPr>
         <a:solidFill>
-          <a:srgbClr val="0C0C0B"/>
+          <a:srgbClr val="F4F1EA"/>
         </a:solidFill>
       </p:bgPr>
     </p:bg>
@@ -2287,9 +2198,48 @@
           <a:chExt cx="0" cy="0"/>
         </a:xfrm>
       </p:grpSpPr>
+      <p:sp>
+        <p:nvSpPr>
+          <p:cNvPr id="2" name="Text 0"/>
+          <p:cNvSpPr/>
+          <p:nvPr/>
+        </p:nvSpPr>
+        <p:spPr>
+          <a:xfrm>
+            <a:off x="914400" y="548640"/>
+            <a:ext cx="10362895" cy="822960"/>
+          </a:xfrm>
+          <a:prstGeom prst="rect">
+            <a:avLst/>
+          </a:prstGeom>
+          <a:noFill/>
+          <a:ln/>
+        </p:spPr>
+        <p:txBody>
+          <a:bodyPr wrap="square" rtlCol="0" anchor="ctr"/>
+          <a:lstStyle/>
+          <a:p>
+            <a:pPr algn="ctr" indent="0" marL="0">
+              <a:buNone/>
+            </a:pPr>
+            <a:r>
+              <a:rPr lang="en-US" sz="2800" dirty="0">
+                <a:solidFill>
+                  <a:srgbClr val="1A1A1A"/>
+                </a:solidFill>
+                <a:latin typeface="Cambria" pitchFamily="34" charset="0"/>
+                <a:ea typeface="Cambria" pitchFamily="34" charset="-122"/>
+                <a:cs typeface="Cambria" pitchFamily="34" charset="-120"/>
+              </a:rPr>
+              <a:t>O que isso significa para Cocalzinho</a:t>
+            </a:r>
+            <a:endParaRPr lang="en-US" sz="2800" dirty="0"/>
+          </a:p>
+        </p:txBody>
+      </p:sp>
       <p:pic>
         <p:nvPicPr>
-          <p:cNvPr id="2" name="Image 0" descr="visuals-real/render-04.jpg">    </p:cNvPr>
+          <p:cNvPr id="3" name="Image 0" descr="icons/briefcase-C81E1E.png">    </p:cNvPr>
           <p:cNvPicPr>
             <a:picLocks noChangeAspect="1"/>
           </p:cNvPicPr>
@@ -2297,13 +2247,14 @@
         </p:nvPicPr>
         <p:blipFill>
           <a:blip r:embed="rId1"/>
-          <a:srcRect l="0" r="0" t="0" b="0"/>
-          <a:stretch/>
+          <a:stretch>
+            <a:fillRect/>
+          </a:stretch>
         </p:blipFill>
         <p:spPr>
           <a:xfrm>
-            <a:off x="0" y="0"/>
-            <a:ext cx="12191695" cy="6858000"/>
+            <a:off x="640080" y="1737360"/>
+            <a:ext cx="411480" cy="411480"/>
           </a:xfrm>
           <a:prstGeom prst="rect">
             <a:avLst/>
@@ -2312,75 +2263,386 @@
       </p:pic>
       <p:sp>
         <p:nvSpPr>
-          <p:cNvPr id="3" name="Shape 0"/>
-          <p:cNvSpPr/>
-          <p:nvPr/>
-        </p:nvSpPr>
-        <p:spPr>
-          <a:xfrm>
-            <a:off x="0" y="5897880"/>
-            <a:ext cx="12191695" cy="960120"/>
-          </a:xfrm>
-          <a:prstGeom prst="rect">
-            <a:avLst/>
-          </a:prstGeom>
-          <a:solidFill>
-            <a:srgbClr val="0C0C0B">
-              <a:alpha val="75000"/>
-            </a:srgbClr>
-          </a:solidFill>
-          <a:ln/>
-        </p:spPr>
-      </p:sp>
-      <p:sp>
-        <p:nvSpPr>
           <p:cNvPr id="4" name="Text 1"/>
           <p:cNvSpPr/>
           <p:nvPr/>
         </p:nvSpPr>
         <p:spPr>
           <a:xfrm>
-            <a:off x="548640" y="5989320"/>
-            <a:ext cx="5486400" cy="320040"/>
-          </a:xfrm>
-          <a:prstGeom prst="rect">
-            <a:avLst/>
-          </a:prstGeom>
-          <a:noFill/>
-          <a:ln/>
-        </p:spPr>
-        <p:txBody>
-          <a:bodyPr wrap="square" rtlCol="0" anchor="ctr"/>
+            <a:off x="640080" y="2267712"/>
+            <a:ext cx="3271418" cy="914400"/>
+          </a:xfrm>
+          <a:prstGeom prst="rect">
+            <a:avLst/>
+          </a:prstGeom>
+          <a:noFill/>
+          <a:ln/>
+        </p:spPr>
+        <p:txBody>
+          <a:bodyPr wrap="square" rtlCol="0" anchor="t"/>
           <a:lstStyle/>
           <a:p>
             <a:pPr indent="0" marL="0">
-              <a:buNone/>
-            </a:pPr>
-            <a:r>
-              <a:rPr lang="en-US" sz="1100" spc="400" kern="0" dirty="0">
-                <a:solidFill>
-                  <a:srgbClr val="C81E1E"/>
+              <a:lnSpc>
+                <a:spcPct val="110000"/>
+              </a:lnSpc>
+              <a:buNone/>
+            </a:pPr>
+            <a:r>
+              <a:rPr lang="en-US" sz="1400" dirty="0">
+                <a:solidFill>
+                  <a:srgbClr val="1A1A1A"/>
                 </a:solidFill>
                 <a:latin typeface="Calibri" pitchFamily="34" charset="0"/>
                 <a:ea typeface="Calibri" pitchFamily="34" charset="-122"/>
                 <a:cs typeface="Calibri" pitchFamily="34" charset="-120"/>
               </a:rPr>
-              <a:t>RENDER 04</a:t>
-            </a:r>
-            <a:endParaRPr lang="en-US" sz="1100" dirty="0"/>
-          </a:p>
-        </p:txBody>
-      </p:sp>
-      <p:sp>
-        <p:nvSpPr>
-          <p:cNvPr id="5" name="Text 2"/>
-          <p:cNvSpPr/>
-          <p:nvPr/>
-        </p:nvSpPr>
-        <p:spPr>
-          <a:xfrm>
-            <a:off x="548640" y="6291072"/>
-            <a:ext cx="11094415" cy="411480"/>
+              <a:t>Geração de empregos diretos e indiretos</a:t>
+            </a:r>
+            <a:endParaRPr lang="en-US" sz="1400" dirty="0"/>
+          </a:p>
+        </p:txBody>
+      </p:sp>
+      <p:pic>
+        <p:nvPicPr>
+          <p:cNvPr id="5" name="Image 1" descr="icons/trend-C81E1E.png">    </p:cNvPr>
+          <p:cNvPicPr>
+            <a:picLocks noChangeAspect="1"/>
+          </p:cNvPicPr>
+          <p:nvPr/>
+        </p:nvPicPr>
+        <p:blipFill>
+          <a:blip r:embed="rId2"/>
+          <a:stretch>
+            <a:fillRect/>
+          </a:stretch>
+        </p:blipFill>
+        <p:spPr>
+          <a:xfrm>
+            <a:off x="4277258" y="1737360"/>
+            <a:ext cx="411480" cy="411480"/>
+          </a:xfrm>
+          <a:prstGeom prst="rect">
+            <a:avLst/>
+          </a:prstGeom>
+        </p:spPr>
+      </p:pic>
+      <p:sp>
+        <p:nvSpPr>
+          <p:cNvPr id="6" name="Text 2"/>
+          <p:cNvSpPr/>
+          <p:nvPr/>
+        </p:nvSpPr>
+        <p:spPr>
+          <a:xfrm>
+            <a:off x="4277258" y="2267712"/>
+            <a:ext cx="3271418" cy="914400"/>
+          </a:xfrm>
+          <a:prstGeom prst="rect">
+            <a:avLst/>
+          </a:prstGeom>
+          <a:noFill/>
+          <a:ln/>
+        </p:spPr>
+        <p:txBody>
+          <a:bodyPr wrap="square" rtlCol="0" anchor="t"/>
+          <a:lstStyle/>
+          <a:p>
+            <a:pPr indent="0" marL="0">
+              <a:lnSpc>
+                <a:spcPct val="110000"/>
+              </a:lnSpc>
+              <a:buNone/>
+            </a:pPr>
+            <a:r>
+              <a:rPr lang="en-US" sz="1400" dirty="0">
+                <a:solidFill>
+                  <a:srgbClr val="1A1A1A"/>
+                </a:solidFill>
+                <a:latin typeface="Calibri" pitchFamily="34" charset="0"/>
+                <a:ea typeface="Calibri" pitchFamily="34" charset="-122"/>
+                <a:cs typeface="Calibri" pitchFamily="34" charset="-120"/>
+              </a:rPr>
+              <a:t>Novo fluxo de arrecadação municipal</a:t>
+            </a:r>
+            <a:endParaRPr lang="en-US" sz="1400" dirty="0"/>
+          </a:p>
+        </p:txBody>
+      </p:sp>
+      <p:pic>
+        <p:nvPicPr>
+          <p:cNvPr id="7" name="Image 2" descr="icons/activity-C81E1E.png">    </p:cNvPr>
+          <p:cNvPicPr>
+            <a:picLocks noChangeAspect="1"/>
+          </p:cNvPicPr>
+          <p:nvPr/>
+        </p:nvPicPr>
+        <p:blipFill>
+          <a:blip r:embed="rId3"/>
+          <a:stretch>
+            <a:fillRect/>
+          </a:stretch>
+        </p:blipFill>
+        <p:spPr>
+          <a:xfrm>
+            <a:off x="7914437" y="1737360"/>
+            <a:ext cx="411480" cy="411480"/>
+          </a:xfrm>
+          <a:prstGeom prst="rect">
+            <a:avLst/>
+          </a:prstGeom>
+        </p:spPr>
+      </p:pic>
+      <p:sp>
+        <p:nvSpPr>
+          <p:cNvPr id="8" name="Text 3"/>
+          <p:cNvSpPr/>
+          <p:nvPr/>
+        </p:nvSpPr>
+        <p:spPr>
+          <a:xfrm>
+            <a:off x="7914437" y="2267712"/>
+            <a:ext cx="3271418" cy="914400"/>
+          </a:xfrm>
+          <a:prstGeom prst="rect">
+            <a:avLst/>
+          </a:prstGeom>
+          <a:noFill/>
+          <a:ln/>
+        </p:spPr>
+        <p:txBody>
+          <a:bodyPr wrap="square" rtlCol="0" anchor="t"/>
+          <a:lstStyle/>
+          <a:p>
+            <a:pPr indent="0" marL="0">
+              <a:lnSpc>
+                <a:spcPct val="110000"/>
+              </a:lnSpc>
+              <a:buNone/>
+            </a:pPr>
+            <a:r>
+              <a:rPr lang="en-US" sz="1400" dirty="0">
+                <a:solidFill>
+                  <a:srgbClr val="1A1A1A"/>
+                </a:solidFill>
+                <a:latin typeface="Calibri" pitchFamily="34" charset="0"/>
+                <a:ea typeface="Calibri" pitchFamily="34" charset="-122"/>
+                <a:cs typeface="Calibri" pitchFamily="34" charset="-120"/>
+              </a:rPr>
+              <a:t>Movimento econômico local</a:t>
+            </a:r>
+            <a:endParaRPr lang="en-US" sz="1400" dirty="0"/>
+          </a:p>
+        </p:txBody>
+      </p:sp>
+      <p:pic>
+        <p:nvPicPr>
+          <p:cNvPr id="9" name="Image 3" descr="icons/pin-C81E1E.png">    </p:cNvPr>
+          <p:cNvPicPr>
+            <a:picLocks noChangeAspect="1"/>
+          </p:cNvPicPr>
+          <p:nvPr/>
+        </p:nvPicPr>
+        <p:blipFill>
+          <a:blip r:embed="rId4"/>
+          <a:stretch>
+            <a:fillRect/>
+          </a:stretch>
+        </p:blipFill>
+        <p:spPr>
+          <a:xfrm>
+            <a:off x="640080" y="3840480"/>
+            <a:ext cx="411480" cy="411480"/>
+          </a:xfrm>
+          <a:prstGeom prst="rect">
+            <a:avLst/>
+          </a:prstGeom>
+        </p:spPr>
+      </p:pic>
+      <p:sp>
+        <p:nvSpPr>
+          <p:cNvPr id="10" name="Text 4"/>
+          <p:cNvSpPr/>
+          <p:nvPr/>
+        </p:nvSpPr>
+        <p:spPr>
+          <a:xfrm>
+            <a:off x="640080" y="4370832"/>
+            <a:ext cx="3271418" cy="914400"/>
+          </a:xfrm>
+          <a:prstGeom prst="rect">
+            <a:avLst/>
+          </a:prstGeom>
+          <a:noFill/>
+          <a:ln/>
+        </p:spPr>
+        <p:txBody>
+          <a:bodyPr wrap="square" rtlCol="0" anchor="t"/>
+          <a:lstStyle/>
+          <a:p>
+            <a:pPr indent="0" marL="0">
+              <a:lnSpc>
+                <a:spcPct val="110000"/>
+              </a:lnSpc>
+              <a:buNone/>
+            </a:pPr>
+            <a:r>
+              <a:rPr lang="en-US" sz="1400" dirty="0">
+                <a:solidFill>
+                  <a:srgbClr val="1A1A1A"/>
+                </a:solidFill>
+                <a:latin typeface="Calibri" pitchFamily="34" charset="0"/>
+                <a:ea typeface="Calibri" pitchFamily="34" charset="-122"/>
+                <a:cs typeface="Calibri" pitchFamily="34" charset="-120"/>
+              </a:rPr>
+              <a:t>Valorização da região ao longo da BR-070</a:t>
+            </a:r>
+            <a:endParaRPr lang="en-US" sz="1400" dirty="0"/>
+          </a:p>
+        </p:txBody>
+      </p:sp>
+      <p:pic>
+        <p:nvPicPr>
+          <p:cNvPr id="11" name="Image 4" descr="icons/wheat-C81E1E.png">    </p:cNvPr>
+          <p:cNvPicPr>
+            <a:picLocks noChangeAspect="1"/>
+          </p:cNvPicPr>
+          <p:nvPr/>
+        </p:nvPicPr>
+        <p:blipFill>
+          <a:blip r:embed="rId5"/>
+          <a:stretch>
+            <a:fillRect/>
+          </a:stretch>
+        </p:blipFill>
+        <p:spPr>
+          <a:xfrm>
+            <a:off x="4277258" y="3840480"/>
+            <a:ext cx="411480" cy="411480"/>
+          </a:xfrm>
+          <a:prstGeom prst="rect">
+            <a:avLst/>
+          </a:prstGeom>
+        </p:spPr>
+      </p:pic>
+      <p:sp>
+        <p:nvSpPr>
+          <p:cNvPr id="12" name="Text 5"/>
+          <p:cNvSpPr/>
+          <p:nvPr/>
+        </p:nvSpPr>
+        <p:spPr>
+          <a:xfrm>
+            <a:off x="4277258" y="4370832"/>
+            <a:ext cx="3271418" cy="914400"/>
+          </a:xfrm>
+          <a:prstGeom prst="rect">
+            <a:avLst/>
+          </a:prstGeom>
+          <a:noFill/>
+          <a:ln/>
+        </p:spPr>
+        <p:txBody>
+          <a:bodyPr wrap="square" rtlCol="0" anchor="t"/>
+          <a:lstStyle/>
+          <a:p>
+            <a:pPr indent="0" marL="0">
+              <a:lnSpc>
+                <a:spcPct val="110000"/>
+              </a:lnSpc>
+              <a:buNone/>
+            </a:pPr>
+            <a:r>
+              <a:rPr lang="en-US" sz="1400" dirty="0">
+                <a:solidFill>
+                  <a:srgbClr val="1A1A1A"/>
+                </a:solidFill>
+                <a:latin typeface="Calibri" pitchFamily="34" charset="0"/>
+                <a:ea typeface="Calibri" pitchFamily="34" charset="-122"/>
+                <a:cs typeface="Calibri" pitchFamily="34" charset="-120"/>
+              </a:rPr>
+              <a:t>Apoio direto ao escoamento do agronegócio</a:t>
+            </a:r>
+            <a:endParaRPr lang="en-US" sz="1400" dirty="0"/>
+          </a:p>
+        </p:txBody>
+      </p:sp>
+      <p:pic>
+        <p:nvPicPr>
+          <p:cNvPr id="13" name="Image 5" descr="icons/layers-C81E1E.png">    </p:cNvPr>
+          <p:cNvPicPr>
+            <a:picLocks noChangeAspect="1"/>
+          </p:cNvPicPr>
+          <p:nvPr/>
+        </p:nvPicPr>
+        <p:blipFill>
+          <a:blip r:embed="rId6"/>
+          <a:stretch>
+            <a:fillRect/>
+          </a:stretch>
+        </p:blipFill>
+        <p:spPr>
+          <a:xfrm>
+            <a:off x="7914437" y="3840480"/>
+            <a:ext cx="411480" cy="411480"/>
+          </a:xfrm>
+          <a:prstGeom prst="rect">
+            <a:avLst/>
+          </a:prstGeom>
+        </p:spPr>
+      </p:pic>
+      <p:sp>
+        <p:nvSpPr>
+          <p:cNvPr id="14" name="Text 6"/>
+          <p:cNvSpPr/>
+          <p:nvPr/>
+        </p:nvSpPr>
+        <p:spPr>
+          <a:xfrm>
+            <a:off x="7914437" y="4370832"/>
+            <a:ext cx="3271418" cy="914400"/>
+          </a:xfrm>
+          <a:prstGeom prst="rect">
+            <a:avLst/>
+          </a:prstGeom>
+          <a:noFill/>
+          <a:ln/>
+        </p:spPr>
+        <p:txBody>
+          <a:bodyPr wrap="square" rtlCol="0" anchor="t"/>
+          <a:lstStyle/>
+          <a:p>
+            <a:pPr indent="0" marL="0">
+              <a:lnSpc>
+                <a:spcPct val="110000"/>
+              </a:lnSpc>
+              <a:buNone/>
+            </a:pPr>
+            <a:r>
+              <a:rPr lang="en-US" sz="1400" dirty="0">
+                <a:solidFill>
+                  <a:srgbClr val="1A1A1A"/>
+                </a:solidFill>
+                <a:latin typeface="Calibri" pitchFamily="34" charset="0"/>
+                <a:ea typeface="Calibri" pitchFamily="34" charset="-122"/>
+                <a:cs typeface="Calibri" pitchFamily="34" charset="-120"/>
+              </a:rPr>
+              <a:t>Integração logística regional</a:t>
+            </a:r>
+            <a:endParaRPr lang="en-US" sz="1400" dirty="0"/>
+          </a:p>
+        </p:txBody>
+      </p:sp>
+      <p:sp>
+        <p:nvSpPr>
+          <p:cNvPr id="16" name="Text 7"/>
+          <p:cNvSpPr/>
+          <p:nvPr/>
+        </p:nvSpPr>
+        <p:spPr>
+          <a:xfrm>
+            <a:off x="11185855" y="6355080"/>
+            <a:ext cx="640080" cy="320040"/>
           </a:xfrm>
           <a:prstGeom prst="rect">
             <a:avLst/>
@@ -2392,21 +2654,21 @@
           <a:bodyPr wrap="square" rtlCol="0" anchor="ctr"/>
           <a:lstStyle/>
           <a:p>
-            <a:pPr indent="0" marL="0">
-              <a:buNone/>
-            </a:pPr>
-            <a:r>
-              <a:rPr lang="en-US" sz="1700" dirty="0">
-                <a:solidFill>
-                  <a:srgbClr val="FFFFFF"/>
-                </a:solidFill>
-                <a:latin typeface="Cambria" pitchFamily="34" charset="0"/>
-                <a:ea typeface="Cambria" pitchFamily="34" charset="-122"/>
-                <a:cs typeface="Cambria" pitchFamily="34" charset="-120"/>
-              </a:rPr>
-              <a:t>Vista geral — integração com a paisagem</a:t>
-            </a:r>
-            <a:endParaRPr lang="en-US" sz="1700" dirty="0"/>
+            <a:pPr algn="r" indent="0" marL="0">
+              <a:buNone/>
+            </a:pPr>
+            <a:r>
+              <a:rPr lang="en-US" sz="1000" dirty="0">
+                <a:solidFill>
+                  <a:srgbClr val="8A8A82"/>
+                </a:solidFill>
+                <a:latin typeface="Calibri" pitchFamily="34" charset="0"/>
+                <a:ea typeface="Calibri" pitchFamily="34" charset="-122"/>
+                <a:cs typeface="Calibri" pitchFamily="34" charset="-120"/>
+              </a:rPr>
+              <a:t>04</a:t>
+            </a:r>
+            <a:endParaRPr lang="en-US" sz="1000" dirty="0"/>
           </a:p>
         </p:txBody>
       </p:sp>
@@ -2450,8 +2712,8 @@
         </p:nvSpPr>
         <p:spPr>
           <a:xfrm>
-            <a:off x="914400" y="548640"/>
-            <a:ext cx="10362895" cy="822960"/>
+            <a:off x="640080" y="457200"/>
+            <a:ext cx="7315200" cy="365760"/>
           </a:xfrm>
           <a:prstGeom prst="rect">
             <a:avLst/>
@@ -2463,11 +2725,50 @@
           <a:bodyPr wrap="square" rtlCol="0" anchor="ctr"/>
           <a:lstStyle/>
           <a:p>
-            <a:pPr algn="ctr" indent="0" marL="0">
-              <a:buNone/>
-            </a:pPr>
-            <a:r>
-              <a:rPr lang="en-US" sz="2800" dirty="0">
+            <a:pPr indent="0" marL="0">
+              <a:buNone/>
+            </a:pPr>
+            <a:r>
+              <a:rPr lang="en-US" sz="1100" spc="500" kern="0" dirty="0">
+                <a:solidFill>
+                  <a:srgbClr val="8A8A82"/>
+                </a:solidFill>
+                <a:latin typeface="Calibri" pitchFamily="34" charset="0"/>
+                <a:ea typeface="Calibri" pitchFamily="34" charset="-122"/>
+                <a:cs typeface="Calibri" pitchFamily="34" charset="-120"/>
+              </a:rPr>
+              <a:t>PARCERIA INSTITUCIONAL</a:t>
+            </a:r>
+            <a:endParaRPr lang="en-US" sz="1100" dirty="0"/>
+          </a:p>
+        </p:txBody>
+      </p:sp>
+      <p:sp>
+        <p:nvSpPr>
+          <p:cNvPr id="3" name="Text 1"/>
+          <p:cNvSpPr/>
+          <p:nvPr/>
+        </p:nvSpPr>
+        <p:spPr>
+          <a:xfrm>
+            <a:off x="640080" y="868680"/>
+            <a:ext cx="10911535" cy="548640"/>
+          </a:xfrm>
+          <a:prstGeom prst="rect">
+            <a:avLst/>
+          </a:prstGeom>
+          <a:noFill/>
+          <a:ln/>
+        </p:spPr>
+        <p:txBody>
+          <a:bodyPr wrap="square" rtlCol="0" anchor="ctr"/>
+          <a:lstStyle/>
+          <a:p>
+            <a:pPr indent="0" marL="0">
+              <a:buNone/>
+            </a:pPr>
+            <a:r>
+              <a:rPr lang="en-US" sz="2200" dirty="0">
                 <a:solidFill>
                   <a:srgbClr val="1A1A1A"/>
                 </a:solidFill>
@@ -2475,112 +2776,86 @@
                 <a:ea typeface="Cambria" pitchFamily="34" charset="-122"/>
                 <a:cs typeface="Cambria" pitchFamily="34" charset="-120"/>
               </a:rPr>
-              <a:t>O que isso significa para Cocalzinho</a:t>
-            </a:r>
-            <a:endParaRPr lang="en-US" sz="2800" dirty="0"/>
-          </a:p>
-        </p:txBody>
-      </p:sp>
-      <p:pic>
-        <p:nvPicPr>
-          <p:cNvPr id="3" name="Image 0" descr="icons/briefcase-C81E1E.png">    </p:cNvPr>
-          <p:cNvPicPr>
-            <a:picLocks noChangeAspect="1"/>
-          </p:cNvPicPr>
-          <p:nvPr/>
-        </p:nvPicPr>
-        <p:blipFill>
-          <a:blip r:embed="rId1"/>
-          <a:stretch>
-            <a:fillRect/>
-          </a:stretch>
-        </p:blipFill>
-        <p:spPr>
-          <a:xfrm>
-            <a:off x="640080" y="1737360"/>
-            <a:ext cx="411480" cy="411480"/>
-          </a:xfrm>
-          <a:prstGeom prst="rect">
-            <a:avLst/>
-          </a:prstGeom>
-        </p:spPr>
-      </p:pic>
-      <p:sp>
-        <p:nvSpPr>
-          <p:cNvPr id="4" name="Text 1"/>
-          <p:cNvSpPr/>
-          <p:nvPr/>
-        </p:nvSpPr>
-        <p:spPr>
-          <a:xfrm>
-            <a:off x="640080" y="2267712"/>
-            <a:ext cx="3271418" cy="914400"/>
-          </a:xfrm>
-          <a:prstGeom prst="rect">
-            <a:avLst/>
-          </a:prstGeom>
-          <a:noFill/>
-          <a:ln/>
-        </p:spPr>
-        <p:txBody>
-          <a:bodyPr wrap="square" rtlCol="0" anchor="t"/>
-          <a:lstStyle/>
-          <a:p>
-            <a:pPr indent="0" marL="0">
-              <a:lnSpc>
-                <a:spcPct val="110000"/>
-              </a:lnSpc>
-              <a:buNone/>
-            </a:pPr>
-            <a:r>
-              <a:rPr lang="en-US" sz="1400" dirty="0">
-                <a:solidFill>
-                  <a:srgbClr val="1A1A1A"/>
+              <a:t>Como a parceria se organiza</a:t>
+            </a:r>
+            <a:endParaRPr lang="en-US" sz="2200" dirty="0"/>
+          </a:p>
+        </p:txBody>
+      </p:sp>
+      <p:sp>
+        <p:nvSpPr>
+          <p:cNvPr id="4" name="Shape 2"/>
+          <p:cNvSpPr/>
+          <p:nvPr/>
+        </p:nvSpPr>
+        <p:spPr>
+          <a:xfrm>
+            <a:off x="640080" y="1691640"/>
+            <a:ext cx="5135728" cy="3840480"/>
+          </a:xfrm>
+          <a:prstGeom prst="rect">
+            <a:avLst/>
+          </a:prstGeom>
+          <a:solidFill>
+            <a:srgbClr val="FFFFFF"/>
+          </a:solidFill>
+          <a:ln w="12700">
+            <a:solidFill>
+              <a:srgbClr val="E7E3DA"/>
+            </a:solidFill>
+            <a:prstDash val="solid"/>
+          </a:ln>
+        </p:spPr>
+      </p:sp>
+      <p:sp>
+        <p:nvSpPr>
+          <p:cNvPr id="5" name="Text 3"/>
+          <p:cNvSpPr/>
+          <p:nvPr/>
+        </p:nvSpPr>
+        <p:spPr>
+          <a:xfrm>
+            <a:off x="640080" y="1920240"/>
+            <a:ext cx="5135728" cy="365760"/>
+          </a:xfrm>
+          <a:prstGeom prst="rect">
+            <a:avLst/>
+          </a:prstGeom>
+          <a:noFill/>
+          <a:ln/>
+        </p:spPr>
+        <p:txBody>
+          <a:bodyPr wrap="square" rtlCol="0" anchor="ctr"/>
+          <a:lstStyle/>
+          <a:p>
+            <a:pPr algn="ctr" indent="0" marL="0">
+              <a:buNone/>
+            </a:pPr>
+            <a:r>
+              <a:rPr lang="en-US" sz="1300" spc="400" kern="0" dirty="0">
+                <a:solidFill>
+                  <a:srgbClr val="C81E1E"/>
                 </a:solidFill>
                 <a:latin typeface="Calibri" pitchFamily="34" charset="0"/>
                 <a:ea typeface="Calibri" pitchFamily="34" charset="-122"/>
                 <a:cs typeface="Calibri" pitchFamily="34" charset="-120"/>
               </a:rPr>
-              <a:t>Geração de empregos diretos e indiretos</a:t>
-            </a:r>
-            <a:endParaRPr lang="en-US" sz="1400" dirty="0"/>
-          </a:p>
-        </p:txBody>
-      </p:sp>
-      <p:pic>
-        <p:nvPicPr>
-          <p:cNvPr id="5" name="Image 1" descr="icons/trend-C81E1E.png">    </p:cNvPr>
-          <p:cNvPicPr>
-            <a:picLocks noChangeAspect="1"/>
-          </p:cNvPicPr>
-          <p:nvPr/>
-        </p:nvPicPr>
-        <p:blipFill>
-          <a:blip r:embed="rId2"/>
-          <a:stretch>
-            <a:fillRect/>
-          </a:stretch>
-        </p:blipFill>
-        <p:spPr>
-          <a:xfrm>
-            <a:off x="4277258" y="1737360"/>
-            <a:ext cx="411480" cy="411480"/>
-          </a:xfrm>
-          <a:prstGeom prst="rect">
-            <a:avLst/>
-          </a:prstGeom>
-        </p:spPr>
-      </p:pic>
-      <p:sp>
-        <p:nvSpPr>
-          <p:cNvPr id="6" name="Text 2"/>
-          <p:cNvSpPr/>
-          <p:nvPr/>
-        </p:nvSpPr>
-        <p:spPr>
-          <a:xfrm>
-            <a:off x="4277258" y="2267712"/>
-            <a:ext cx="3271418" cy="914400"/>
+              <a:t>MUNICÍPIO</a:t>
+            </a:r>
+            <a:endParaRPr lang="en-US" sz="1300" dirty="0"/>
+          </a:p>
+        </p:txBody>
+      </p:sp>
+      <p:sp>
+        <p:nvSpPr>
+          <p:cNvPr id="6" name="Text 4"/>
+          <p:cNvSpPr/>
+          <p:nvPr/>
+        </p:nvSpPr>
+        <p:spPr>
+          <a:xfrm>
+            <a:off x="914400" y="2560320"/>
+            <a:ext cx="4587088" cy="594360"/>
           </a:xfrm>
           <a:prstGeom prst="rect">
             <a:avLst/>
@@ -2593,13 +2868,10 @@
           <a:lstStyle/>
           <a:p>
             <a:pPr indent="0" marL="0">
-              <a:lnSpc>
-                <a:spcPct val="110000"/>
-              </a:lnSpc>
-              <a:buNone/>
-            </a:pPr>
-            <a:r>
-              <a:rPr lang="en-US" sz="1400" dirty="0">
+              <a:buNone/>
+            </a:pPr>
+            <a:r>
+              <a:rPr lang="en-US" sz="1500" dirty="0">
                 <a:solidFill>
                   <a:srgbClr val="1A1A1A"/>
                 </a:solidFill>
@@ -2607,46 +2879,22 @@
                 <a:ea typeface="Calibri" pitchFamily="34" charset="-122"/>
                 <a:cs typeface="Calibri" pitchFamily="34" charset="-120"/>
               </a:rPr>
-              <a:t>Novo fluxo de arrecadação municipal</a:t>
-            </a:r>
-            <a:endParaRPr lang="en-US" sz="1400" dirty="0"/>
-          </a:p>
-        </p:txBody>
-      </p:sp>
-      <p:pic>
-        <p:nvPicPr>
-          <p:cNvPr id="7" name="Image 2" descr="icons/activity-C81E1E.png">    </p:cNvPr>
-          <p:cNvPicPr>
-            <a:picLocks noChangeAspect="1"/>
-          </p:cNvPicPr>
-          <p:nvPr/>
-        </p:nvPicPr>
-        <p:blipFill>
-          <a:blip r:embed="rId3"/>
-          <a:stretch>
-            <a:fillRect/>
-          </a:stretch>
-        </p:blipFill>
-        <p:spPr>
-          <a:xfrm>
-            <a:off x="7914437" y="1737360"/>
-            <a:ext cx="411480" cy="411480"/>
-          </a:xfrm>
-          <a:prstGeom prst="rect">
-            <a:avLst/>
-          </a:prstGeom>
-        </p:spPr>
-      </p:pic>
-      <p:sp>
-        <p:nvSpPr>
-          <p:cNvPr id="8" name="Text 3"/>
-          <p:cNvSpPr/>
-          <p:nvPr/>
-        </p:nvSpPr>
-        <p:spPr>
-          <a:xfrm>
-            <a:off x="7914437" y="2267712"/>
-            <a:ext cx="3271418" cy="914400"/>
+              <a:t>—  Apoio institucional ao projeto</a:t>
+            </a:r>
+            <a:endParaRPr lang="en-US" sz="1500" dirty="0"/>
+          </a:p>
+        </p:txBody>
+      </p:sp>
+      <p:sp>
+        <p:nvSpPr>
+          <p:cNvPr id="7" name="Text 5"/>
+          <p:cNvSpPr/>
+          <p:nvPr/>
+        </p:nvSpPr>
+        <p:spPr>
+          <a:xfrm>
+            <a:off x="914400" y="3246120"/>
+            <a:ext cx="4587088" cy="594360"/>
           </a:xfrm>
           <a:prstGeom prst="rect">
             <a:avLst/>
@@ -2659,13 +2907,10 @@
           <a:lstStyle/>
           <a:p>
             <a:pPr indent="0" marL="0">
-              <a:lnSpc>
-                <a:spcPct val="110000"/>
-              </a:lnSpc>
-              <a:buNone/>
-            </a:pPr>
-            <a:r>
-              <a:rPr lang="en-US" sz="1400" dirty="0">
+              <a:buNone/>
+            </a:pPr>
+            <a:r>
+              <a:rPr lang="en-US" sz="1500" dirty="0">
                 <a:solidFill>
                   <a:srgbClr val="1A1A1A"/>
                 </a:solidFill>
@@ -2673,46 +2918,22 @@
                 <a:ea typeface="Calibri" pitchFamily="34" charset="-122"/>
                 <a:cs typeface="Calibri" pitchFamily="34" charset="-120"/>
               </a:rPr>
-              <a:t>Movimento econômico local</a:t>
-            </a:r>
-            <a:endParaRPr lang="en-US" sz="1400" dirty="0"/>
-          </a:p>
-        </p:txBody>
-      </p:sp>
-      <p:pic>
-        <p:nvPicPr>
-          <p:cNvPr id="9" name="Image 3" descr="icons/pin-C81E1E.png">    </p:cNvPr>
-          <p:cNvPicPr>
-            <a:picLocks noChangeAspect="1"/>
-          </p:cNvPicPr>
-          <p:nvPr/>
-        </p:nvPicPr>
-        <p:blipFill>
-          <a:blip r:embed="rId4"/>
-          <a:stretch>
-            <a:fillRect/>
-          </a:stretch>
-        </p:blipFill>
-        <p:spPr>
-          <a:xfrm>
-            <a:off x="640080" y="3840480"/>
-            <a:ext cx="411480" cy="411480"/>
-          </a:xfrm>
-          <a:prstGeom prst="rect">
-            <a:avLst/>
-          </a:prstGeom>
-        </p:spPr>
-      </p:pic>
-      <p:sp>
-        <p:nvSpPr>
-          <p:cNvPr id="10" name="Text 4"/>
-          <p:cNvSpPr/>
-          <p:nvPr/>
-        </p:nvSpPr>
-        <p:spPr>
-          <a:xfrm>
-            <a:off x="640080" y="4370832"/>
-            <a:ext cx="3271418" cy="914400"/>
+              <a:t>—  Movimentação de solo</a:t>
+            </a:r>
+            <a:endParaRPr lang="en-US" sz="1500" dirty="0"/>
+          </a:p>
+        </p:txBody>
+      </p:sp>
+      <p:sp>
+        <p:nvSpPr>
+          <p:cNvPr id="8" name="Text 6"/>
+          <p:cNvSpPr/>
+          <p:nvPr/>
+        </p:nvSpPr>
+        <p:spPr>
+          <a:xfrm>
+            <a:off x="914400" y="3931920"/>
+            <a:ext cx="4587088" cy="594360"/>
           </a:xfrm>
           <a:prstGeom prst="rect">
             <a:avLst/>
@@ -2725,13 +2946,10 @@
           <a:lstStyle/>
           <a:p>
             <a:pPr indent="0" marL="0">
-              <a:lnSpc>
-                <a:spcPct val="110000"/>
-              </a:lnSpc>
-              <a:buNone/>
-            </a:pPr>
-            <a:r>
-              <a:rPr lang="en-US" sz="1400" dirty="0">
+              <a:buNone/>
+            </a:pPr>
+            <a:r>
+              <a:rPr lang="en-US" sz="1500" dirty="0">
                 <a:solidFill>
                   <a:srgbClr val="1A1A1A"/>
                 </a:solidFill>
@@ -2739,112 +2957,81 @@
                 <a:ea typeface="Calibri" pitchFamily="34" charset="-122"/>
                 <a:cs typeface="Calibri" pitchFamily="34" charset="-120"/>
               </a:rPr>
-              <a:t>Valorização da região ao longo da BR-070</a:t>
-            </a:r>
-            <a:endParaRPr lang="en-US" sz="1400" dirty="0"/>
-          </a:p>
-        </p:txBody>
-      </p:sp>
-      <p:pic>
-        <p:nvPicPr>
-          <p:cNvPr id="11" name="Image 4" descr="icons/wheat-C81E1E.png">    </p:cNvPr>
-          <p:cNvPicPr>
-            <a:picLocks noChangeAspect="1"/>
-          </p:cNvPicPr>
-          <p:nvPr/>
-        </p:nvPicPr>
-        <p:blipFill>
-          <a:blip r:embed="rId5"/>
-          <a:stretch>
-            <a:fillRect/>
-          </a:stretch>
-        </p:blipFill>
-        <p:spPr>
-          <a:xfrm>
-            <a:off x="4277258" y="3840480"/>
-            <a:ext cx="411480" cy="411480"/>
-          </a:xfrm>
-          <a:prstGeom prst="rect">
-            <a:avLst/>
-          </a:prstGeom>
-        </p:spPr>
-      </p:pic>
-      <p:sp>
-        <p:nvSpPr>
-          <p:cNvPr id="12" name="Text 5"/>
-          <p:cNvSpPr/>
-          <p:nvPr/>
-        </p:nvSpPr>
-        <p:spPr>
-          <a:xfrm>
-            <a:off x="4277258" y="4370832"/>
-            <a:ext cx="3271418" cy="914400"/>
-          </a:xfrm>
-          <a:prstGeom prst="rect">
-            <a:avLst/>
-          </a:prstGeom>
-          <a:noFill/>
-          <a:ln/>
-        </p:spPr>
-        <p:txBody>
-          <a:bodyPr wrap="square" rtlCol="0" anchor="t"/>
-          <a:lstStyle/>
-          <a:p>
-            <a:pPr indent="0" marL="0">
-              <a:lnSpc>
-                <a:spcPct val="110000"/>
-              </a:lnSpc>
-              <a:buNone/>
-            </a:pPr>
-            <a:r>
-              <a:rPr lang="en-US" sz="1400" dirty="0">
-                <a:solidFill>
-                  <a:srgbClr val="1A1A1A"/>
+              <a:t>—  Relocação de dois postes</a:t>
+            </a:r>
+            <a:endParaRPr lang="en-US" sz="1500" dirty="0"/>
+          </a:p>
+        </p:txBody>
+      </p:sp>
+      <p:sp>
+        <p:nvSpPr>
+          <p:cNvPr id="9" name="Shape 7"/>
+          <p:cNvSpPr/>
+          <p:nvPr/>
+        </p:nvSpPr>
+        <p:spPr>
+          <a:xfrm>
+            <a:off x="6415888" y="1691640"/>
+            <a:ext cx="5135728" cy="3840480"/>
+          </a:xfrm>
+          <a:prstGeom prst="rect">
+            <a:avLst/>
+          </a:prstGeom>
+          <a:solidFill>
+            <a:srgbClr val="1A1A1A"/>
+          </a:solidFill>
+          <a:ln/>
+        </p:spPr>
+      </p:sp>
+      <p:sp>
+        <p:nvSpPr>
+          <p:cNvPr id="10" name="Text 8"/>
+          <p:cNvSpPr/>
+          <p:nvPr/>
+        </p:nvSpPr>
+        <p:spPr>
+          <a:xfrm>
+            <a:off x="6415888" y="1920240"/>
+            <a:ext cx="5135728" cy="365760"/>
+          </a:xfrm>
+          <a:prstGeom prst="rect">
+            <a:avLst/>
+          </a:prstGeom>
+          <a:noFill/>
+          <a:ln/>
+        </p:spPr>
+        <p:txBody>
+          <a:bodyPr wrap="square" rtlCol="0" anchor="ctr"/>
+          <a:lstStyle/>
+          <a:p>
+            <a:pPr algn="ctr" indent="0" marL="0">
+              <a:buNone/>
+            </a:pPr>
+            <a:r>
+              <a:rPr lang="en-US" sz="1300" spc="400" kern="0" dirty="0">
+                <a:solidFill>
+                  <a:srgbClr val="C81E1E"/>
                 </a:solidFill>
                 <a:latin typeface="Calibri" pitchFamily="34" charset="0"/>
                 <a:ea typeface="Calibri" pitchFamily="34" charset="-122"/>
                 <a:cs typeface="Calibri" pitchFamily="34" charset="-120"/>
               </a:rPr>
-              <a:t>Apoio direto ao escoamento do agronegócio</a:t>
-            </a:r>
-            <a:endParaRPr lang="en-US" sz="1400" dirty="0"/>
-          </a:p>
-        </p:txBody>
-      </p:sp>
-      <p:pic>
-        <p:nvPicPr>
-          <p:cNvPr id="13" name="Image 5" descr="icons/layers-C81E1E.png">    </p:cNvPr>
-          <p:cNvPicPr>
-            <a:picLocks noChangeAspect="1"/>
-          </p:cNvPicPr>
-          <p:nvPr/>
-        </p:nvPicPr>
-        <p:blipFill>
-          <a:blip r:embed="rId6"/>
-          <a:stretch>
-            <a:fillRect/>
-          </a:stretch>
-        </p:blipFill>
-        <p:spPr>
-          <a:xfrm>
-            <a:off x="7914437" y="3840480"/>
-            <a:ext cx="411480" cy="411480"/>
-          </a:xfrm>
-          <a:prstGeom prst="rect">
-            <a:avLst/>
-          </a:prstGeom>
-        </p:spPr>
-      </p:pic>
-      <p:sp>
-        <p:nvSpPr>
-          <p:cNvPr id="14" name="Text 6"/>
-          <p:cNvSpPr/>
-          <p:nvPr/>
-        </p:nvSpPr>
-        <p:spPr>
-          <a:xfrm>
-            <a:off x="7914437" y="4370832"/>
-            <a:ext cx="3271418" cy="914400"/>
+              <a:t>INICIATIVA PRIVADA</a:t>
+            </a:r>
+            <a:endParaRPr lang="en-US" sz="1300" dirty="0"/>
+          </a:p>
+        </p:txBody>
+      </p:sp>
+      <p:sp>
+        <p:nvSpPr>
+          <p:cNvPr id="11" name="Text 9"/>
+          <p:cNvSpPr/>
+          <p:nvPr/>
+        </p:nvSpPr>
+        <p:spPr>
+          <a:xfrm>
+            <a:off x="6690208" y="2560320"/>
+            <a:ext cx="4587088" cy="594360"/>
           </a:xfrm>
           <a:prstGeom prst="rect">
             <a:avLst/>
@@ -2857,29 +3044,143 @@
           <a:lstStyle/>
           <a:p>
             <a:pPr indent="0" marL="0">
-              <a:lnSpc>
-                <a:spcPct val="110000"/>
-              </a:lnSpc>
-              <a:buNone/>
-            </a:pPr>
-            <a:r>
-              <a:rPr lang="en-US" sz="1400" dirty="0">
-                <a:solidFill>
-                  <a:srgbClr val="1A1A1A"/>
+              <a:buNone/>
+            </a:pPr>
+            <a:r>
+              <a:rPr lang="en-US" sz="1500" dirty="0">
+                <a:solidFill>
+                  <a:srgbClr val="FFFFFF"/>
                 </a:solidFill>
                 <a:latin typeface="Calibri" pitchFamily="34" charset="0"/>
                 <a:ea typeface="Calibri" pitchFamily="34" charset="-122"/>
                 <a:cs typeface="Calibri" pitchFamily="34" charset="-120"/>
               </a:rPr>
-              <a:t>Integração logística regional</a:t>
-            </a:r>
-            <a:endParaRPr lang="en-US" sz="1400" dirty="0"/>
-          </a:p>
-        </p:txBody>
-      </p:sp>
-      <p:sp>
-        <p:nvSpPr>
-          <p:cNvPr id="16" name="Text 7"/>
+              <a:t>—  Projeto técnico completo</a:t>
+            </a:r>
+            <a:endParaRPr lang="en-US" sz="1500" dirty="0"/>
+          </a:p>
+        </p:txBody>
+      </p:sp>
+      <p:sp>
+        <p:nvSpPr>
+          <p:cNvPr id="12" name="Text 10"/>
+          <p:cNvSpPr/>
+          <p:nvPr/>
+        </p:nvSpPr>
+        <p:spPr>
+          <a:xfrm>
+            <a:off x="6690208" y="3218688"/>
+            <a:ext cx="4587088" cy="594360"/>
+          </a:xfrm>
+          <a:prstGeom prst="rect">
+            <a:avLst/>
+          </a:prstGeom>
+          <a:noFill/>
+          <a:ln/>
+        </p:spPr>
+        <p:txBody>
+          <a:bodyPr wrap="square" rtlCol="0" anchor="t"/>
+          <a:lstStyle/>
+          <a:p>
+            <a:pPr indent="0" marL="0">
+              <a:buNone/>
+            </a:pPr>
+            <a:r>
+              <a:rPr lang="en-US" sz="1500" dirty="0">
+                <a:solidFill>
+                  <a:srgbClr val="FFFFFF"/>
+                </a:solidFill>
+                <a:latin typeface="Calibri" pitchFamily="34" charset="0"/>
+                <a:ea typeface="Calibri" pitchFamily="34" charset="-122"/>
+                <a:cs typeface="Calibri" pitchFamily="34" charset="-120"/>
+              </a:rPr>
+              <a:t>—  Execução integral da obra</a:t>
+            </a:r>
+            <a:endParaRPr lang="en-US" sz="1500" dirty="0"/>
+          </a:p>
+        </p:txBody>
+      </p:sp>
+      <p:sp>
+        <p:nvSpPr>
+          <p:cNvPr id="13" name="Text 11"/>
+          <p:cNvSpPr/>
+          <p:nvPr/>
+        </p:nvSpPr>
+        <p:spPr>
+          <a:xfrm>
+            <a:off x="6690208" y="3877056"/>
+            <a:ext cx="4587088" cy="594360"/>
+          </a:xfrm>
+          <a:prstGeom prst="rect">
+            <a:avLst/>
+          </a:prstGeom>
+          <a:noFill/>
+          <a:ln/>
+        </p:spPr>
+        <p:txBody>
+          <a:bodyPr wrap="square" rtlCol="0" anchor="t"/>
+          <a:lstStyle/>
+          <a:p>
+            <a:pPr indent="0" marL="0">
+              <a:buNone/>
+            </a:pPr>
+            <a:r>
+              <a:rPr lang="en-US" sz="1500" dirty="0">
+                <a:solidFill>
+                  <a:srgbClr val="FFFFFF"/>
+                </a:solidFill>
+                <a:latin typeface="Calibri" pitchFamily="34" charset="0"/>
+                <a:ea typeface="Calibri" pitchFamily="34" charset="-122"/>
+                <a:cs typeface="Calibri" pitchFamily="34" charset="-120"/>
+              </a:rPr>
+              <a:t>—  Operação da estrutura</a:t>
+            </a:r>
+            <a:endParaRPr lang="en-US" sz="1500" dirty="0"/>
+          </a:p>
+        </p:txBody>
+      </p:sp>
+      <p:sp>
+        <p:nvSpPr>
+          <p:cNvPr id="14" name="Text 12"/>
+          <p:cNvSpPr/>
+          <p:nvPr/>
+        </p:nvSpPr>
+        <p:spPr>
+          <a:xfrm>
+            <a:off x="6690208" y="4535424"/>
+            <a:ext cx="4587088" cy="594360"/>
+          </a:xfrm>
+          <a:prstGeom prst="rect">
+            <a:avLst/>
+          </a:prstGeom>
+          <a:noFill/>
+          <a:ln/>
+        </p:spPr>
+        <p:txBody>
+          <a:bodyPr wrap="square" rtlCol="0" anchor="t"/>
+          <a:lstStyle/>
+          <a:p>
+            <a:pPr indent="0" marL="0">
+              <a:buNone/>
+            </a:pPr>
+            <a:r>
+              <a:rPr lang="en-US" sz="1500" dirty="0">
+                <a:solidFill>
+                  <a:srgbClr val="FFFFFF"/>
+                </a:solidFill>
+                <a:latin typeface="Calibri" pitchFamily="34" charset="0"/>
+                <a:ea typeface="Calibri" pitchFamily="34" charset="-122"/>
+                <a:cs typeface="Calibri" pitchFamily="34" charset="-120"/>
+              </a:rPr>
+              <a:t>—  Investimento total do empreendimento</a:t>
+            </a:r>
+            <a:endParaRPr lang="en-US" sz="1500" dirty="0"/>
+          </a:p>
+        </p:txBody>
+      </p:sp>
+      <p:sp>
+        <p:nvSpPr>
+          <p:cNvPr id="16" name="Text 13"/>
           <p:cNvSpPr/>
           <p:nvPr/>
         </p:nvSpPr>
@@ -2930,7 +3231,7 @@
     <p:bg>
       <p:bgPr>
         <a:solidFill>
-          <a:srgbClr val="F4F1EA"/>
+          <a:srgbClr val="0C0C0B"/>
         </a:solidFill>
       </p:bgPr>
     </p:bg>
@@ -2956,8 +3257,8 @@
         </p:nvSpPr>
         <p:spPr>
           <a:xfrm>
-            <a:off x="640080" y="457200"/>
-            <a:ext cx="7315200" cy="365760"/>
+            <a:off x="914400" y="822960"/>
+            <a:ext cx="10362895" cy="731520"/>
           </a:xfrm>
           <a:prstGeom prst="rect">
             <a:avLst/>
@@ -2969,34 +3270,185 @@
           <a:bodyPr wrap="square" rtlCol="0" anchor="ctr"/>
           <a:lstStyle/>
           <a:p>
-            <a:pPr indent="0" marL="0">
-              <a:buNone/>
-            </a:pPr>
-            <a:r>
-              <a:rPr lang="en-US" sz="1100" spc="500" kern="0" dirty="0">
-                <a:solidFill>
-                  <a:srgbClr val="8A8A82"/>
+            <a:pPr algn="ctr" indent="0" marL="0">
+              <a:buNone/>
+            </a:pPr>
+            <a:r>
+              <a:rPr lang="en-US" sz="2800" dirty="0">
+                <a:solidFill>
+                  <a:srgbClr val="FFFFFF"/>
+                </a:solidFill>
+                <a:latin typeface="Cambria" pitchFamily="34" charset="0"/>
+                <a:ea typeface="Cambria" pitchFamily="34" charset="-122"/>
+                <a:cs typeface="Cambria" pitchFamily="34" charset="-120"/>
+              </a:rPr>
+              <a:t>Próximos Passos</a:t>
+            </a:r>
+            <a:endParaRPr lang="en-US" sz="2800" dirty="0"/>
+          </a:p>
+        </p:txBody>
+      </p:sp>
+      <p:sp>
+        <p:nvSpPr>
+          <p:cNvPr id="3" name="Shape 1"/>
+          <p:cNvSpPr/>
+          <p:nvPr/>
+        </p:nvSpPr>
+        <p:spPr>
+          <a:xfrm>
+            <a:off x="1752562" y="2103120"/>
+            <a:ext cx="640080" cy="640080"/>
+          </a:xfrm>
+          <a:prstGeom prst="ellipse">
+            <a:avLst/>
+          </a:prstGeom>
+          <a:solidFill>
+            <a:srgbClr val="1A1A1A"/>
+          </a:solidFill>
+          <a:ln w="19050">
+            <a:solidFill>
+              <a:srgbClr val="C81E1E"/>
+            </a:solidFill>
+            <a:prstDash val="solid"/>
+          </a:ln>
+        </p:spPr>
+      </p:sp>
+      <p:sp>
+        <p:nvSpPr>
+          <p:cNvPr id="4" name="Text 2"/>
+          <p:cNvSpPr/>
+          <p:nvPr/>
+        </p:nvSpPr>
+        <p:spPr>
+          <a:xfrm>
+            <a:off x="1752562" y="2103120"/>
+            <a:ext cx="640080" cy="640080"/>
+          </a:xfrm>
+          <a:prstGeom prst="rect">
+            <a:avLst/>
+          </a:prstGeom>
+          <a:noFill/>
+          <a:ln/>
+        </p:spPr>
+        <p:txBody>
+          <a:bodyPr wrap="square" rtlCol="0" anchor="ctr"/>
+          <a:lstStyle/>
+          <a:p>
+            <a:pPr algn="ctr" indent="0" marL="0">
+              <a:buNone/>
+            </a:pPr>
+            <a:r>
+              <a:rPr lang="en-US" sz="2000" dirty="0">
+                <a:solidFill>
+                  <a:srgbClr val="C81E1E"/>
+                </a:solidFill>
+                <a:latin typeface="Cambria" pitchFamily="34" charset="0"/>
+                <a:ea typeface="Cambria" pitchFamily="34" charset="-122"/>
+                <a:cs typeface="Cambria" pitchFamily="34" charset="-120"/>
+              </a:rPr>
+              <a:t>1</a:t>
+            </a:r>
+            <a:endParaRPr lang="en-US" sz="2000" dirty="0"/>
+          </a:p>
+        </p:txBody>
+      </p:sp>
+      <p:sp>
+        <p:nvSpPr>
+          <p:cNvPr id="5" name="Text 3"/>
+          <p:cNvSpPr/>
+          <p:nvPr/>
+        </p:nvSpPr>
+        <p:spPr>
+          <a:xfrm>
+            <a:off x="868680" y="2971800"/>
+            <a:ext cx="2407844" cy="1005840"/>
+          </a:xfrm>
+          <a:prstGeom prst="rect">
+            <a:avLst/>
+          </a:prstGeom>
+          <a:noFill/>
+          <a:ln/>
+        </p:spPr>
+        <p:txBody>
+          <a:bodyPr wrap="square" rtlCol="0" anchor="t"/>
+          <a:lstStyle/>
+          <a:p>
+            <a:pPr algn="ctr" indent="0" marL="0">
+              <a:buNone/>
+            </a:pPr>
+            <a:r>
+              <a:rPr lang="en-US" sz="1350" dirty="0">
+                <a:solidFill>
+                  <a:srgbClr val="B9B7B2"/>
                 </a:solidFill>
                 <a:latin typeface="Calibri" pitchFamily="34" charset="0"/>
                 <a:ea typeface="Calibri" pitchFamily="34" charset="-122"/>
                 <a:cs typeface="Calibri" pitchFamily="34" charset="-120"/>
               </a:rPr>
-              <a:t>PARCERIA INSTITUCIONAL</a:t>
-            </a:r>
-            <a:endParaRPr lang="en-US" sz="1100" dirty="0"/>
-          </a:p>
-        </p:txBody>
-      </p:sp>
-      <p:sp>
-        <p:nvSpPr>
-          <p:cNvPr id="3" name="Text 1"/>
-          <p:cNvSpPr/>
-          <p:nvPr/>
-        </p:nvSpPr>
-        <p:spPr>
-          <a:xfrm>
-            <a:off x="640080" y="868680"/>
-            <a:ext cx="10911535" cy="548640"/>
+              <a:t>Alinhamento técnico entre as equipes</a:t>
+            </a:r>
+            <a:endParaRPr lang="en-US" sz="1350" dirty="0"/>
+          </a:p>
+        </p:txBody>
+      </p:sp>
+      <p:sp>
+        <p:nvSpPr>
+          <p:cNvPr id="6" name="Shape 4"/>
+          <p:cNvSpPr/>
+          <p:nvPr/>
+        </p:nvSpPr>
+        <p:spPr>
+          <a:xfrm>
+            <a:off x="2438362" y="2423160"/>
+            <a:ext cx="1950644" cy="0"/>
+          </a:xfrm>
+          <a:prstGeom prst="line">
+            <a:avLst/>
+          </a:prstGeom>
+          <a:noFill/>
+          <a:ln w="12700">
+            <a:solidFill>
+              <a:srgbClr val="8F8D87"/>
+            </a:solidFill>
+            <a:prstDash val="dash"/>
+          </a:ln>
+        </p:spPr>
+      </p:sp>
+      <p:sp>
+        <p:nvSpPr>
+          <p:cNvPr id="7" name="Shape 5"/>
+          <p:cNvSpPr/>
+          <p:nvPr/>
+        </p:nvSpPr>
+        <p:spPr>
+          <a:xfrm>
+            <a:off x="4434726" y="2103120"/>
+            <a:ext cx="640080" cy="640080"/>
+          </a:xfrm>
+          <a:prstGeom prst="ellipse">
+            <a:avLst/>
+          </a:prstGeom>
+          <a:solidFill>
+            <a:srgbClr val="1A1A1A"/>
+          </a:solidFill>
+          <a:ln w="19050">
+            <a:solidFill>
+              <a:srgbClr val="C81E1E"/>
+            </a:solidFill>
+            <a:prstDash val="solid"/>
+          </a:ln>
+        </p:spPr>
+      </p:sp>
+      <p:sp>
+        <p:nvSpPr>
+          <p:cNvPr id="8" name="Text 6"/>
+          <p:cNvSpPr/>
+          <p:nvPr/>
+        </p:nvSpPr>
+        <p:spPr>
+          <a:xfrm>
+            <a:off x="4434726" y="2103120"/>
+            <a:ext cx="640080" cy="640080"/>
           </a:xfrm>
           <a:prstGeom prst="rect">
             <a:avLst/>
@@ -3008,44 +3460,106 @@
           <a:bodyPr wrap="square" rtlCol="0" anchor="ctr"/>
           <a:lstStyle/>
           <a:p>
-            <a:pPr indent="0" marL="0">
-              <a:buNone/>
-            </a:pPr>
-            <a:r>
-              <a:rPr lang="en-US" sz="2200" dirty="0">
-                <a:solidFill>
-                  <a:srgbClr val="1A1A1A"/>
+            <a:pPr algn="ctr" indent="0" marL="0">
+              <a:buNone/>
+            </a:pPr>
+            <a:r>
+              <a:rPr lang="en-US" sz="2000" dirty="0">
+                <a:solidFill>
+                  <a:srgbClr val="C81E1E"/>
                 </a:solidFill>
                 <a:latin typeface="Cambria" pitchFamily="34" charset="0"/>
                 <a:ea typeface="Cambria" pitchFamily="34" charset="-122"/>
                 <a:cs typeface="Cambria" pitchFamily="34" charset="-120"/>
               </a:rPr>
-              <a:t>Como a parceria se organiza</a:t>
-            </a:r>
-            <a:endParaRPr lang="en-US" sz="2200" dirty="0"/>
-          </a:p>
-        </p:txBody>
-      </p:sp>
-      <p:sp>
-        <p:nvSpPr>
-          <p:cNvPr id="4" name="Shape 2"/>
-          <p:cNvSpPr/>
-          <p:nvPr/>
-        </p:nvSpPr>
-        <p:spPr>
-          <a:xfrm>
-            <a:off x="640080" y="1691640"/>
-            <a:ext cx="5135728" cy="3840480"/>
-          </a:xfrm>
-          <a:prstGeom prst="rect">
-            <a:avLst/>
-          </a:prstGeom>
-          <a:solidFill>
-            <a:srgbClr val="FFFFFF"/>
-          </a:solidFill>
+              <a:t>2</a:t>
+            </a:r>
+            <a:endParaRPr lang="en-US" sz="2000" dirty="0"/>
+          </a:p>
+        </p:txBody>
+      </p:sp>
+      <p:sp>
+        <p:nvSpPr>
+          <p:cNvPr id="9" name="Text 7"/>
+          <p:cNvSpPr/>
+          <p:nvPr/>
+        </p:nvSpPr>
+        <p:spPr>
+          <a:xfrm>
+            <a:off x="3550844" y="2971800"/>
+            <a:ext cx="2407844" cy="1005840"/>
+          </a:xfrm>
+          <a:prstGeom prst="rect">
+            <a:avLst/>
+          </a:prstGeom>
+          <a:noFill/>
+          <a:ln/>
+        </p:spPr>
+        <p:txBody>
+          <a:bodyPr wrap="square" rtlCol="0" anchor="t"/>
+          <a:lstStyle/>
+          <a:p>
+            <a:pPr algn="ctr" indent="0" marL="0">
+              <a:buNone/>
+            </a:pPr>
+            <a:r>
+              <a:rPr lang="en-US" sz="1350" dirty="0">
+                <a:solidFill>
+                  <a:srgbClr val="B9B7B2"/>
+                </a:solidFill>
+                <a:latin typeface="Calibri" pitchFamily="34" charset="0"/>
+                <a:ea typeface="Calibri" pitchFamily="34" charset="-122"/>
+                <a:cs typeface="Calibri" pitchFamily="34" charset="-120"/>
+              </a:rPr>
+              <a:t>Visita conjunta ao terreno</a:t>
+            </a:r>
+            <a:endParaRPr lang="en-US" sz="1350" dirty="0"/>
+          </a:p>
+        </p:txBody>
+      </p:sp>
+      <p:sp>
+        <p:nvSpPr>
+          <p:cNvPr id="10" name="Shape 8"/>
+          <p:cNvSpPr/>
+          <p:nvPr/>
+        </p:nvSpPr>
+        <p:spPr>
+          <a:xfrm>
+            <a:off x="5120526" y="2423160"/>
+            <a:ext cx="1950644" cy="0"/>
+          </a:xfrm>
+          <a:prstGeom prst="line">
+            <a:avLst/>
+          </a:prstGeom>
+          <a:noFill/>
           <a:ln w="12700">
             <a:solidFill>
-              <a:srgbClr val="E7E3DA"/>
+              <a:srgbClr val="8F8D87"/>
+            </a:solidFill>
+            <a:prstDash val="dash"/>
+          </a:ln>
+        </p:spPr>
+      </p:sp>
+      <p:sp>
+        <p:nvSpPr>
+          <p:cNvPr id="11" name="Shape 9"/>
+          <p:cNvSpPr/>
+          <p:nvPr/>
+        </p:nvSpPr>
+        <p:spPr>
+          <a:xfrm>
+            <a:off x="7116890" y="2103120"/>
+            <a:ext cx="640080" cy="640080"/>
+          </a:xfrm>
+          <a:prstGeom prst="ellipse">
+            <a:avLst/>
+          </a:prstGeom>
+          <a:solidFill>
+            <a:srgbClr val="1A1A1A"/>
+          </a:solidFill>
+          <a:ln w="19050">
+            <a:solidFill>
+              <a:srgbClr val="C81E1E"/>
             </a:solidFill>
             <a:prstDash val="solid"/>
           </a:ln>
@@ -3053,14 +3567,14 @@
       </p:sp>
       <p:sp>
         <p:nvSpPr>
-          <p:cNvPr id="5" name="Text 3"/>
-          <p:cNvSpPr/>
-          <p:nvPr/>
-        </p:nvSpPr>
-        <p:spPr>
-          <a:xfrm>
-            <a:off x="640080" y="1920240"/>
-            <a:ext cx="5135728" cy="365760"/>
+          <p:cNvPr id="12" name="Text 10"/>
+          <p:cNvSpPr/>
+          <p:nvPr/>
+        </p:nvSpPr>
+        <p:spPr>
+          <a:xfrm>
+            <a:off x="7116890" y="2103120"/>
+            <a:ext cx="640080" cy="640080"/>
           </a:xfrm>
           <a:prstGeom prst="rect">
             <a:avLst/>
@@ -3076,30 +3590,156 @@
               <a:buNone/>
             </a:pPr>
             <a:r>
-              <a:rPr lang="en-US" sz="1300" spc="400" kern="0" dirty="0">
+              <a:rPr lang="en-US" sz="2000" dirty="0">
                 <a:solidFill>
                   <a:srgbClr val="C81E1E"/>
+                </a:solidFill>
+                <a:latin typeface="Cambria" pitchFamily="34" charset="0"/>
+                <a:ea typeface="Cambria" pitchFamily="34" charset="-122"/>
+                <a:cs typeface="Cambria" pitchFamily="34" charset="-120"/>
+              </a:rPr>
+              <a:t>3</a:t>
+            </a:r>
+            <a:endParaRPr lang="en-US" sz="2000" dirty="0"/>
+          </a:p>
+        </p:txBody>
+      </p:sp>
+      <p:sp>
+        <p:nvSpPr>
+          <p:cNvPr id="13" name="Text 11"/>
+          <p:cNvSpPr/>
+          <p:nvPr/>
+        </p:nvSpPr>
+        <p:spPr>
+          <a:xfrm>
+            <a:off x="6233008" y="2971800"/>
+            <a:ext cx="2407844" cy="1005840"/>
+          </a:xfrm>
+          <a:prstGeom prst="rect">
+            <a:avLst/>
+          </a:prstGeom>
+          <a:noFill/>
+          <a:ln/>
+        </p:spPr>
+        <p:txBody>
+          <a:bodyPr wrap="square" rtlCol="0" anchor="t"/>
+          <a:lstStyle/>
+          <a:p>
+            <a:pPr algn="ctr" indent="0" marL="0">
+              <a:buNone/>
+            </a:pPr>
+            <a:r>
+              <a:rPr lang="en-US" sz="1350" dirty="0">
+                <a:solidFill>
+                  <a:srgbClr val="B9B7B2"/>
                 </a:solidFill>
                 <a:latin typeface="Calibri" pitchFamily="34" charset="0"/>
                 <a:ea typeface="Calibri" pitchFamily="34" charset="-122"/>
                 <a:cs typeface="Calibri" pitchFamily="34" charset="-120"/>
               </a:rPr>
-              <a:t>MUNICÍPIO</a:t>
-            </a:r>
-            <a:endParaRPr lang="en-US" sz="1300" dirty="0"/>
-          </a:p>
-        </p:txBody>
-      </p:sp>
-      <p:sp>
-        <p:nvSpPr>
-          <p:cNvPr id="6" name="Text 4"/>
-          <p:cNvSpPr/>
-          <p:nvPr/>
-        </p:nvSpPr>
-        <p:spPr>
-          <a:xfrm>
-            <a:off x="914400" y="2560320"/>
-            <a:ext cx="4587088" cy="594360"/>
+              <a:t>Formalização da parceria institucional</a:t>
+            </a:r>
+            <a:endParaRPr lang="en-US" sz="1350" dirty="0"/>
+          </a:p>
+        </p:txBody>
+      </p:sp>
+      <p:sp>
+        <p:nvSpPr>
+          <p:cNvPr id="14" name="Shape 12"/>
+          <p:cNvSpPr/>
+          <p:nvPr/>
+        </p:nvSpPr>
+        <p:spPr>
+          <a:xfrm>
+            <a:off x="7802690" y="2423160"/>
+            <a:ext cx="1950644" cy="0"/>
+          </a:xfrm>
+          <a:prstGeom prst="line">
+            <a:avLst/>
+          </a:prstGeom>
+          <a:noFill/>
+          <a:ln w="12700">
+            <a:solidFill>
+              <a:srgbClr val="8F8D87"/>
+            </a:solidFill>
+            <a:prstDash val="dash"/>
+          </a:ln>
+        </p:spPr>
+      </p:sp>
+      <p:sp>
+        <p:nvSpPr>
+          <p:cNvPr id="15" name="Shape 13"/>
+          <p:cNvSpPr/>
+          <p:nvPr/>
+        </p:nvSpPr>
+        <p:spPr>
+          <a:xfrm>
+            <a:off x="9799053" y="2103120"/>
+            <a:ext cx="640080" cy="640080"/>
+          </a:xfrm>
+          <a:prstGeom prst="ellipse">
+            <a:avLst/>
+          </a:prstGeom>
+          <a:solidFill>
+            <a:srgbClr val="1A1A1A"/>
+          </a:solidFill>
+          <a:ln w="19050">
+            <a:solidFill>
+              <a:srgbClr val="C81E1E"/>
+            </a:solidFill>
+            <a:prstDash val="solid"/>
+          </a:ln>
+        </p:spPr>
+      </p:sp>
+      <p:sp>
+        <p:nvSpPr>
+          <p:cNvPr id="16" name="Text 14"/>
+          <p:cNvSpPr/>
+          <p:nvPr/>
+        </p:nvSpPr>
+        <p:spPr>
+          <a:xfrm>
+            <a:off x="9799053" y="2103120"/>
+            <a:ext cx="640080" cy="640080"/>
+          </a:xfrm>
+          <a:prstGeom prst="rect">
+            <a:avLst/>
+          </a:prstGeom>
+          <a:noFill/>
+          <a:ln/>
+        </p:spPr>
+        <p:txBody>
+          <a:bodyPr wrap="square" rtlCol="0" anchor="ctr"/>
+          <a:lstStyle/>
+          <a:p>
+            <a:pPr algn="ctr" indent="0" marL="0">
+              <a:buNone/>
+            </a:pPr>
+            <a:r>
+              <a:rPr lang="en-US" sz="2000" dirty="0">
+                <a:solidFill>
+                  <a:srgbClr val="C81E1E"/>
+                </a:solidFill>
+                <a:latin typeface="Cambria" pitchFamily="34" charset="0"/>
+                <a:ea typeface="Cambria" pitchFamily="34" charset="-122"/>
+                <a:cs typeface="Cambria" pitchFamily="34" charset="-120"/>
+              </a:rPr>
+              <a:t>4</a:t>
+            </a:r>
+            <a:endParaRPr lang="en-US" sz="2000" dirty="0"/>
+          </a:p>
+        </p:txBody>
+      </p:sp>
+      <p:sp>
+        <p:nvSpPr>
+          <p:cNvPr id="17" name="Text 15"/>
+          <p:cNvSpPr/>
+          <p:nvPr/>
+        </p:nvSpPr>
+        <p:spPr>
+          <a:xfrm>
+            <a:off x="8915171" y="2971800"/>
+            <a:ext cx="2407844" cy="1005840"/>
           </a:xfrm>
           <a:prstGeom prst="rect">
             <a:avLst/>
@@ -3111,320 +3751,27 @@
           <a:bodyPr wrap="square" rtlCol="0" anchor="t"/>
           <a:lstStyle/>
           <a:p>
-            <a:pPr indent="0" marL="0">
-              <a:buNone/>
-            </a:pPr>
-            <a:r>
-              <a:rPr lang="en-US" sz="1500" dirty="0">
-                <a:solidFill>
-                  <a:srgbClr val="1A1A1A"/>
+            <a:pPr algn="ctr" indent="0" marL="0">
+              <a:buNone/>
+            </a:pPr>
+            <a:r>
+              <a:rPr lang="en-US" sz="1350" dirty="0">
+                <a:solidFill>
+                  <a:srgbClr val="B9B7B2"/>
                 </a:solidFill>
                 <a:latin typeface="Calibri" pitchFamily="34" charset="0"/>
                 <a:ea typeface="Calibri" pitchFamily="34" charset="-122"/>
                 <a:cs typeface="Calibri" pitchFamily="34" charset="-120"/>
               </a:rPr>
-              <a:t>—  Apoio institucional ao projeto</a:t>
-            </a:r>
-            <a:endParaRPr lang="en-US" sz="1500" dirty="0"/>
-          </a:p>
-        </p:txBody>
-      </p:sp>
-      <p:sp>
-        <p:nvSpPr>
-          <p:cNvPr id="7" name="Text 5"/>
-          <p:cNvSpPr/>
-          <p:nvPr/>
-        </p:nvSpPr>
-        <p:spPr>
-          <a:xfrm>
-            <a:off x="914400" y="3246120"/>
-            <a:ext cx="4587088" cy="594360"/>
-          </a:xfrm>
-          <a:prstGeom prst="rect">
-            <a:avLst/>
-          </a:prstGeom>
-          <a:noFill/>
-          <a:ln/>
-        </p:spPr>
-        <p:txBody>
-          <a:bodyPr wrap="square" rtlCol="0" anchor="t"/>
-          <a:lstStyle/>
-          <a:p>
-            <a:pPr indent="0" marL="0">
-              <a:buNone/>
-            </a:pPr>
-            <a:r>
-              <a:rPr lang="en-US" sz="1500" dirty="0">
-                <a:solidFill>
-                  <a:srgbClr val="1A1A1A"/>
-                </a:solidFill>
-                <a:latin typeface="Calibri" pitchFamily="34" charset="0"/>
-                <a:ea typeface="Calibri" pitchFamily="34" charset="-122"/>
-                <a:cs typeface="Calibri" pitchFamily="34" charset="-120"/>
-              </a:rPr>
-              <a:t>—  Movimentação de solo</a:t>
-            </a:r>
-            <a:endParaRPr lang="en-US" sz="1500" dirty="0"/>
-          </a:p>
-        </p:txBody>
-      </p:sp>
-      <p:sp>
-        <p:nvSpPr>
-          <p:cNvPr id="8" name="Text 6"/>
-          <p:cNvSpPr/>
-          <p:nvPr/>
-        </p:nvSpPr>
-        <p:spPr>
-          <a:xfrm>
-            <a:off x="914400" y="3931920"/>
-            <a:ext cx="4587088" cy="594360"/>
-          </a:xfrm>
-          <a:prstGeom prst="rect">
-            <a:avLst/>
-          </a:prstGeom>
-          <a:noFill/>
-          <a:ln/>
-        </p:spPr>
-        <p:txBody>
-          <a:bodyPr wrap="square" rtlCol="0" anchor="t"/>
-          <a:lstStyle/>
-          <a:p>
-            <a:pPr indent="0" marL="0">
-              <a:buNone/>
-            </a:pPr>
-            <a:r>
-              <a:rPr lang="en-US" sz="1500" dirty="0">
-                <a:solidFill>
-                  <a:srgbClr val="1A1A1A"/>
-                </a:solidFill>
-                <a:latin typeface="Calibri" pitchFamily="34" charset="0"/>
-                <a:ea typeface="Calibri" pitchFamily="34" charset="-122"/>
-                <a:cs typeface="Calibri" pitchFamily="34" charset="-120"/>
-              </a:rPr>
-              <a:t>—  Relocação de dois postes</a:t>
-            </a:r>
-            <a:endParaRPr lang="en-US" sz="1500" dirty="0"/>
-          </a:p>
-        </p:txBody>
-      </p:sp>
-      <p:sp>
-        <p:nvSpPr>
-          <p:cNvPr id="9" name="Shape 7"/>
-          <p:cNvSpPr/>
-          <p:nvPr/>
-        </p:nvSpPr>
-        <p:spPr>
-          <a:xfrm>
-            <a:off x="6415888" y="1691640"/>
-            <a:ext cx="5135728" cy="3840480"/>
-          </a:xfrm>
-          <a:prstGeom prst="rect">
-            <a:avLst/>
-          </a:prstGeom>
-          <a:solidFill>
-            <a:srgbClr val="1A1A1A"/>
-          </a:solidFill>
-          <a:ln/>
-        </p:spPr>
-      </p:sp>
-      <p:sp>
-        <p:nvSpPr>
-          <p:cNvPr id="10" name="Text 8"/>
-          <p:cNvSpPr/>
-          <p:nvPr/>
-        </p:nvSpPr>
-        <p:spPr>
-          <a:xfrm>
-            <a:off x="6415888" y="1920240"/>
-            <a:ext cx="5135728" cy="365760"/>
-          </a:xfrm>
-          <a:prstGeom prst="rect">
-            <a:avLst/>
-          </a:prstGeom>
-          <a:noFill/>
-          <a:ln/>
-        </p:spPr>
-        <p:txBody>
-          <a:bodyPr wrap="square" rtlCol="0" anchor="ctr"/>
-          <a:lstStyle/>
-          <a:p>
-            <a:pPr algn="ctr" indent="0" marL="0">
-              <a:buNone/>
-            </a:pPr>
-            <a:r>
-              <a:rPr lang="en-US" sz="1300" spc="400" kern="0" dirty="0">
-                <a:solidFill>
-                  <a:srgbClr val="C81E1E"/>
-                </a:solidFill>
-                <a:latin typeface="Calibri" pitchFamily="34" charset="0"/>
-                <a:ea typeface="Calibri" pitchFamily="34" charset="-122"/>
-                <a:cs typeface="Calibri" pitchFamily="34" charset="-120"/>
-              </a:rPr>
-              <a:t>INICIATIVA PRIVADA</a:t>
-            </a:r>
-            <a:endParaRPr lang="en-US" sz="1300" dirty="0"/>
-          </a:p>
-        </p:txBody>
-      </p:sp>
-      <p:sp>
-        <p:nvSpPr>
-          <p:cNvPr id="11" name="Text 9"/>
-          <p:cNvSpPr/>
-          <p:nvPr/>
-        </p:nvSpPr>
-        <p:spPr>
-          <a:xfrm>
-            <a:off x="6690208" y="2560320"/>
-            <a:ext cx="4587088" cy="594360"/>
-          </a:xfrm>
-          <a:prstGeom prst="rect">
-            <a:avLst/>
-          </a:prstGeom>
-          <a:noFill/>
-          <a:ln/>
-        </p:spPr>
-        <p:txBody>
-          <a:bodyPr wrap="square" rtlCol="0" anchor="t"/>
-          <a:lstStyle/>
-          <a:p>
-            <a:pPr indent="0" marL="0">
-              <a:buNone/>
-            </a:pPr>
-            <a:r>
-              <a:rPr lang="en-US" sz="1500" dirty="0">
-                <a:solidFill>
-                  <a:srgbClr val="FFFFFF"/>
-                </a:solidFill>
-                <a:latin typeface="Calibri" pitchFamily="34" charset="0"/>
-                <a:ea typeface="Calibri" pitchFamily="34" charset="-122"/>
-                <a:cs typeface="Calibri" pitchFamily="34" charset="-120"/>
-              </a:rPr>
-              <a:t>—  Projeto técnico completo</a:t>
-            </a:r>
-            <a:endParaRPr lang="en-US" sz="1500" dirty="0"/>
-          </a:p>
-        </p:txBody>
-      </p:sp>
-      <p:sp>
-        <p:nvSpPr>
-          <p:cNvPr id="12" name="Text 10"/>
-          <p:cNvSpPr/>
-          <p:nvPr/>
-        </p:nvSpPr>
-        <p:spPr>
-          <a:xfrm>
-            <a:off x="6690208" y="3218688"/>
-            <a:ext cx="4587088" cy="594360"/>
-          </a:xfrm>
-          <a:prstGeom prst="rect">
-            <a:avLst/>
-          </a:prstGeom>
-          <a:noFill/>
-          <a:ln/>
-        </p:spPr>
-        <p:txBody>
-          <a:bodyPr wrap="square" rtlCol="0" anchor="t"/>
-          <a:lstStyle/>
-          <a:p>
-            <a:pPr indent="0" marL="0">
-              <a:buNone/>
-            </a:pPr>
-            <a:r>
-              <a:rPr lang="en-US" sz="1500" dirty="0">
-                <a:solidFill>
-                  <a:srgbClr val="FFFFFF"/>
-                </a:solidFill>
-                <a:latin typeface="Calibri" pitchFamily="34" charset="0"/>
-                <a:ea typeface="Calibri" pitchFamily="34" charset="-122"/>
-                <a:cs typeface="Calibri" pitchFamily="34" charset="-120"/>
-              </a:rPr>
-              <a:t>—  Execução integral da obra</a:t>
-            </a:r>
-            <a:endParaRPr lang="en-US" sz="1500" dirty="0"/>
-          </a:p>
-        </p:txBody>
-      </p:sp>
-      <p:sp>
-        <p:nvSpPr>
-          <p:cNvPr id="13" name="Text 11"/>
-          <p:cNvSpPr/>
-          <p:nvPr/>
-        </p:nvSpPr>
-        <p:spPr>
-          <a:xfrm>
-            <a:off x="6690208" y="3877056"/>
-            <a:ext cx="4587088" cy="594360"/>
-          </a:xfrm>
-          <a:prstGeom prst="rect">
-            <a:avLst/>
-          </a:prstGeom>
-          <a:noFill/>
-          <a:ln/>
-        </p:spPr>
-        <p:txBody>
-          <a:bodyPr wrap="square" rtlCol="0" anchor="t"/>
-          <a:lstStyle/>
-          <a:p>
-            <a:pPr indent="0" marL="0">
-              <a:buNone/>
-            </a:pPr>
-            <a:r>
-              <a:rPr lang="en-US" sz="1500" dirty="0">
-                <a:solidFill>
-                  <a:srgbClr val="FFFFFF"/>
-                </a:solidFill>
-                <a:latin typeface="Calibri" pitchFamily="34" charset="0"/>
-                <a:ea typeface="Calibri" pitchFamily="34" charset="-122"/>
-                <a:cs typeface="Calibri" pitchFamily="34" charset="-120"/>
-              </a:rPr>
-              <a:t>—  Operação da estrutura</a:t>
-            </a:r>
-            <a:endParaRPr lang="en-US" sz="1500" dirty="0"/>
-          </a:p>
-        </p:txBody>
-      </p:sp>
-      <p:sp>
-        <p:nvSpPr>
-          <p:cNvPr id="14" name="Text 12"/>
-          <p:cNvSpPr/>
-          <p:nvPr/>
-        </p:nvSpPr>
-        <p:spPr>
-          <a:xfrm>
-            <a:off x="6690208" y="4535424"/>
-            <a:ext cx="4587088" cy="594360"/>
-          </a:xfrm>
-          <a:prstGeom prst="rect">
-            <a:avLst/>
-          </a:prstGeom>
-          <a:noFill/>
-          <a:ln/>
-        </p:spPr>
-        <p:txBody>
-          <a:bodyPr wrap="square" rtlCol="0" anchor="t"/>
-          <a:lstStyle/>
-          <a:p>
-            <a:pPr indent="0" marL="0">
-              <a:buNone/>
-            </a:pPr>
-            <a:r>
-              <a:rPr lang="en-US" sz="1500" dirty="0">
-                <a:solidFill>
-                  <a:srgbClr val="FFFFFF"/>
-                </a:solidFill>
-                <a:latin typeface="Calibri" pitchFamily="34" charset="0"/>
-                <a:ea typeface="Calibri" pitchFamily="34" charset="-122"/>
-                <a:cs typeface="Calibri" pitchFamily="34" charset="-120"/>
-              </a:rPr>
-              <a:t>—  Investimento total do empreendimento</a:t>
-            </a:r>
-            <a:endParaRPr lang="en-US" sz="1500" dirty="0"/>
-          </a:p>
-        </p:txBody>
-      </p:sp>
-      <p:sp>
-        <p:nvSpPr>
-          <p:cNvPr id="16" name="Text 13"/>
+              <a:t>Início das obras</a:t>
+            </a:r>
+            <a:endParaRPr lang="en-US" sz="1350" dirty="0"/>
+          </a:p>
+        </p:txBody>
+      </p:sp>
+      <p:sp>
+        <p:nvSpPr>
+          <p:cNvPr id="19" name="Text 16"/>
           <p:cNvSpPr/>
           <p:nvPr/>
         </p:nvSpPr>
@@ -3449,7 +3796,7 @@
             <a:r>
               <a:rPr lang="en-US" sz="1000" dirty="0">
                 <a:solidFill>
-                  <a:srgbClr val="8A8A82"/>
+                  <a:srgbClr val="8F8D87"/>
                 </a:solidFill>
                 <a:latin typeface="Calibri" pitchFamily="34" charset="0"/>
                 <a:ea typeface="Calibri" pitchFamily="34" charset="-122"/>
@@ -3493,16 +3840,39 @@
           <a:chExt cx="0" cy="0"/>
         </a:xfrm>
       </p:grpSpPr>
-      <p:sp>
-        <p:nvSpPr>
-          <p:cNvPr id="2" name="Text 0"/>
-          <p:cNvSpPr/>
-          <p:nvPr/>
-        </p:nvSpPr>
-        <p:spPr>
-          <a:xfrm>
-            <a:off x="914400" y="822960"/>
-            <a:ext cx="10362895" cy="731520"/>
+      <p:pic>
+        <p:nvPicPr>
+          <p:cNvPr id="2" name="Image 0" descr="visuals/legacy-placeholder.png">    </p:cNvPr>
+          <p:cNvPicPr>
+            <a:picLocks noChangeAspect="1"/>
+          </p:cNvPicPr>
+          <p:nvPr/>
+        </p:nvPicPr>
+        <p:blipFill>
+          <a:blip r:embed="rId1"/>
+          <a:srcRect l="0" r="0" t="0" b="0"/>
+          <a:stretch/>
+        </p:blipFill>
+        <p:spPr>
+          <a:xfrm>
+            <a:off x="0" y="0"/>
+            <a:ext cx="12191695" cy="6858000"/>
+          </a:xfrm>
+          <a:prstGeom prst="rect">
+            <a:avLst/>
+          </a:prstGeom>
+        </p:spPr>
+      </p:pic>
+      <p:sp>
+        <p:nvSpPr>
+          <p:cNvPr id="3" name="Text 0"/>
+          <p:cNvSpPr/>
+          <p:nvPr/>
+        </p:nvSpPr>
+        <p:spPr>
+          <a:xfrm>
+            <a:off x="914400" y="1463040"/>
+            <a:ext cx="10362895" cy="1828800"/>
           </a:xfrm>
           <a:prstGeom prst="rect">
             <a:avLst/>
@@ -3514,11 +3884,14 @@
           <a:bodyPr wrap="square" rtlCol="0" anchor="ctr"/>
           <a:lstStyle/>
           <a:p>
-            <a:pPr algn="ctr" indent="0" marL="0">
-              <a:buNone/>
-            </a:pPr>
-            <a:r>
-              <a:rPr lang="en-US" sz="2800" dirty="0">
+            <a:pPr algn="l" indent="0" marL="0">
+              <a:lnSpc>
+                <a:spcPct val="125000"/>
+              </a:lnSpc>
+              <a:buNone/>
+            </a:pPr>
+            <a:r>
+              <a:rPr lang="en-US" sz="2400" i="1" dirty="0">
                 <a:solidFill>
                   <a:srgbClr val="FFFFFF"/>
                 </a:solidFill>
@@ -3526,529 +3899,49 @@
                 <a:ea typeface="Cambria" pitchFamily="34" charset="-122"/>
                 <a:cs typeface="Cambria" pitchFamily="34" charset="-120"/>
               </a:rPr>
-              <a:t>Próximos Passos</a:t>
-            </a:r>
-            <a:endParaRPr lang="en-US" sz="2800" dirty="0"/>
-          </a:p>
-        </p:txBody>
-      </p:sp>
-      <p:sp>
-        <p:nvSpPr>
-          <p:cNvPr id="3" name="Shape 1"/>
-          <p:cNvSpPr/>
-          <p:nvPr/>
-        </p:nvSpPr>
-        <p:spPr>
-          <a:xfrm>
-            <a:off x="1752562" y="2103120"/>
-            <a:ext cx="640080" cy="640080"/>
-          </a:xfrm>
-          <a:prstGeom prst="ellipse">
-            <a:avLst/>
-          </a:prstGeom>
-          <a:solidFill>
-            <a:srgbClr val="1A1A1A"/>
-          </a:solidFill>
-          <a:ln w="19050">
-            <a:solidFill>
-              <a:srgbClr val="C81E1E"/>
-            </a:solidFill>
-            <a:prstDash val="solid"/>
-          </a:ln>
-        </p:spPr>
-      </p:sp>
-      <p:sp>
-        <p:nvSpPr>
-          <p:cNvPr id="4" name="Text 2"/>
-          <p:cNvSpPr/>
-          <p:nvPr/>
-        </p:nvSpPr>
-        <p:spPr>
-          <a:xfrm>
-            <a:off x="1752562" y="2103120"/>
-            <a:ext cx="640080" cy="640080"/>
-          </a:xfrm>
-          <a:prstGeom prst="rect">
-            <a:avLst/>
-          </a:prstGeom>
-          <a:noFill/>
-          <a:ln/>
-        </p:spPr>
-        <p:txBody>
-          <a:bodyPr wrap="square" rtlCol="0" anchor="ctr"/>
-          <a:lstStyle/>
-          <a:p>
-            <a:pPr algn="ctr" indent="0" marL="0">
-              <a:buNone/>
-            </a:pPr>
-            <a:r>
-              <a:rPr lang="en-US" sz="2000" dirty="0">
-                <a:solidFill>
-                  <a:srgbClr val="C81E1E"/>
+              <a:t>“As grandes cidades não crescem por acaso.</a:t>
+            </a:r>
+            <a:endParaRPr lang="en-US" sz="2400" dirty="0"/>
+          </a:p>
+          <a:p>
+            <a:pPr algn="l" indent="0" marL="0">
+              <a:lnSpc>
+                <a:spcPct val="125000"/>
+              </a:lnSpc>
+              <a:buNone/>
+            </a:pPr>
+            <a:r>
+              <a:rPr lang="en-US" sz="2400" i="1" dirty="0">
+                <a:solidFill>
+                  <a:srgbClr val="FFFFFF"/>
                 </a:solidFill>
                 <a:latin typeface="Cambria" pitchFamily="34" charset="0"/>
                 <a:ea typeface="Cambria" pitchFamily="34" charset="-122"/>
                 <a:cs typeface="Cambria" pitchFamily="34" charset="-120"/>
               </a:rPr>
-              <a:t>1</a:t>
-            </a:r>
-            <a:endParaRPr lang="en-US" sz="2000" dirty="0"/>
-          </a:p>
-        </p:txBody>
-      </p:sp>
-      <p:sp>
-        <p:nvSpPr>
-          <p:cNvPr id="5" name="Text 3"/>
-          <p:cNvSpPr/>
-          <p:nvPr/>
-        </p:nvSpPr>
-        <p:spPr>
-          <a:xfrm>
-            <a:off x="868680" y="2971800"/>
-            <a:ext cx="2407844" cy="1005840"/>
-          </a:xfrm>
-          <a:prstGeom prst="rect">
-            <a:avLst/>
-          </a:prstGeom>
-          <a:noFill/>
-          <a:ln/>
-        </p:spPr>
-        <p:txBody>
-          <a:bodyPr wrap="square" rtlCol="0" anchor="t"/>
-          <a:lstStyle/>
-          <a:p>
-            <a:pPr algn="ctr" indent="0" marL="0">
-              <a:buNone/>
-            </a:pPr>
-            <a:r>
-              <a:rPr lang="en-US" sz="1350" dirty="0">
-                <a:solidFill>
-                  <a:srgbClr val="B9B7B2"/>
-                </a:solidFill>
-                <a:latin typeface="Calibri" pitchFamily="34" charset="0"/>
-                <a:ea typeface="Calibri" pitchFamily="34" charset="-122"/>
-                <a:cs typeface="Calibri" pitchFamily="34" charset="-120"/>
-              </a:rPr>
-              <a:t>Alinhamento técnico entre as equipes</a:t>
-            </a:r>
-            <a:endParaRPr lang="en-US" sz="1350" dirty="0"/>
-          </a:p>
-        </p:txBody>
-      </p:sp>
-      <p:sp>
-        <p:nvSpPr>
-          <p:cNvPr id="6" name="Shape 4"/>
-          <p:cNvSpPr/>
-          <p:nvPr/>
-        </p:nvSpPr>
-        <p:spPr>
-          <a:xfrm>
-            <a:off x="2438362" y="2423160"/>
-            <a:ext cx="1950644" cy="0"/>
-          </a:xfrm>
-          <a:prstGeom prst="line">
-            <a:avLst/>
-          </a:prstGeom>
-          <a:noFill/>
-          <a:ln w="12700">
-            <a:solidFill>
-              <a:srgbClr val="8F8D87"/>
-            </a:solidFill>
-            <a:prstDash val="dash"/>
-          </a:ln>
-        </p:spPr>
-      </p:sp>
-      <p:sp>
-        <p:nvSpPr>
-          <p:cNvPr id="7" name="Shape 5"/>
-          <p:cNvSpPr/>
-          <p:nvPr/>
-        </p:nvSpPr>
-        <p:spPr>
-          <a:xfrm>
-            <a:off x="4434726" y="2103120"/>
-            <a:ext cx="640080" cy="640080"/>
-          </a:xfrm>
-          <a:prstGeom prst="ellipse">
-            <a:avLst/>
-          </a:prstGeom>
-          <a:solidFill>
-            <a:srgbClr val="1A1A1A"/>
-          </a:solidFill>
-          <a:ln w="19050">
-            <a:solidFill>
-              <a:srgbClr val="C81E1E"/>
-            </a:solidFill>
-            <a:prstDash val="solid"/>
-          </a:ln>
-        </p:spPr>
-      </p:sp>
-      <p:sp>
-        <p:nvSpPr>
-          <p:cNvPr id="8" name="Text 6"/>
-          <p:cNvSpPr/>
-          <p:nvPr/>
-        </p:nvSpPr>
-        <p:spPr>
-          <a:xfrm>
-            <a:off x="4434726" y="2103120"/>
-            <a:ext cx="640080" cy="640080"/>
-          </a:xfrm>
-          <a:prstGeom prst="rect">
-            <a:avLst/>
-          </a:prstGeom>
-          <a:noFill/>
-          <a:ln/>
-        </p:spPr>
-        <p:txBody>
-          <a:bodyPr wrap="square" rtlCol="0" anchor="ctr"/>
-          <a:lstStyle/>
-          <a:p>
-            <a:pPr algn="ctr" indent="0" marL="0">
-              <a:buNone/>
-            </a:pPr>
-            <a:r>
-              <a:rPr lang="en-US" sz="2000" dirty="0">
-                <a:solidFill>
-                  <a:srgbClr val="C81E1E"/>
+              <a:t>Elas crescem porque alguém decidiu</a:t>
+            </a:r>
+            <a:endParaRPr lang="en-US" sz="2400" dirty="0"/>
+          </a:p>
+          <a:p>
+            <a:pPr algn="l" indent="0" marL="0">
+              <a:lnSpc>
+                <a:spcPct val="125000"/>
+              </a:lnSpc>
+              <a:buNone/>
+            </a:pPr>
+            <a:r>
+              <a:rPr lang="en-US" sz="2400" i="1" dirty="0">
+                <a:solidFill>
+                  <a:srgbClr val="FFFFFF"/>
                 </a:solidFill>
                 <a:latin typeface="Cambria" pitchFamily="34" charset="0"/>
                 <a:ea typeface="Cambria" pitchFamily="34" charset="-122"/>
                 <a:cs typeface="Cambria" pitchFamily="34" charset="-120"/>
               </a:rPr>
-              <a:t>2</a:t>
-            </a:r>
-            <a:endParaRPr lang="en-US" sz="2000" dirty="0"/>
-          </a:p>
-        </p:txBody>
-      </p:sp>
-      <p:sp>
-        <p:nvSpPr>
-          <p:cNvPr id="9" name="Text 7"/>
-          <p:cNvSpPr/>
-          <p:nvPr/>
-        </p:nvSpPr>
-        <p:spPr>
-          <a:xfrm>
-            <a:off x="3550844" y="2971800"/>
-            <a:ext cx="2407844" cy="1005840"/>
-          </a:xfrm>
-          <a:prstGeom prst="rect">
-            <a:avLst/>
-          </a:prstGeom>
-          <a:noFill/>
-          <a:ln/>
-        </p:spPr>
-        <p:txBody>
-          <a:bodyPr wrap="square" rtlCol="0" anchor="t"/>
-          <a:lstStyle/>
-          <a:p>
-            <a:pPr algn="ctr" indent="0" marL="0">
-              <a:buNone/>
-            </a:pPr>
-            <a:r>
-              <a:rPr lang="en-US" sz="1350" dirty="0">
-                <a:solidFill>
-                  <a:srgbClr val="B9B7B2"/>
-                </a:solidFill>
-                <a:latin typeface="Calibri" pitchFamily="34" charset="0"/>
-                <a:ea typeface="Calibri" pitchFamily="34" charset="-122"/>
-                <a:cs typeface="Calibri" pitchFamily="34" charset="-120"/>
-              </a:rPr>
-              <a:t>Visita conjunta ao terreno</a:t>
-            </a:r>
-            <a:endParaRPr lang="en-US" sz="1350" dirty="0"/>
-          </a:p>
-        </p:txBody>
-      </p:sp>
-      <p:sp>
-        <p:nvSpPr>
-          <p:cNvPr id="10" name="Shape 8"/>
-          <p:cNvSpPr/>
-          <p:nvPr/>
-        </p:nvSpPr>
-        <p:spPr>
-          <a:xfrm>
-            <a:off x="5120526" y="2423160"/>
-            <a:ext cx="1950644" cy="0"/>
-          </a:xfrm>
-          <a:prstGeom prst="line">
-            <a:avLst/>
-          </a:prstGeom>
-          <a:noFill/>
-          <a:ln w="12700">
-            <a:solidFill>
-              <a:srgbClr val="8F8D87"/>
-            </a:solidFill>
-            <a:prstDash val="dash"/>
-          </a:ln>
-        </p:spPr>
-      </p:sp>
-      <p:sp>
-        <p:nvSpPr>
-          <p:cNvPr id="11" name="Shape 9"/>
-          <p:cNvSpPr/>
-          <p:nvPr/>
-        </p:nvSpPr>
-        <p:spPr>
-          <a:xfrm>
-            <a:off x="7116890" y="2103120"/>
-            <a:ext cx="640080" cy="640080"/>
-          </a:xfrm>
-          <a:prstGeom prst="ellipse">
-            <a:avLst/>
-          </a:prstGeom>
-          <a:solidFill>
-            <a:srgbClr val="1A1A1A"/>
-          </a:solidFill>
-          <a:ln w="19050">
-            <a:solidFill>
-              <a:srgbClr val="C81E1E"/>
-            </a:solidFill>
-            <a:prstDash val="solid"/>
-          </a:ln>
-        </p:spPr>
-      </p:sp>
-      <p:sp>
-        <p:nvSpPr>
-          <p:cNvPr id="12" name="Text 10"/>
-          <p:cNvSpPr/>
-          <p:nvPr/>
-        </p:nvSpPr>
-        <p:spPr>
-          <a:xfrm>
-            <a:off x="7116890" y="2103120"/>
-            <a:ext cx="640080" cy="640080"/>
-          </a:xfrm>
-          <a:prstGeom prst="rect">
-            <a:avLst/>
-          </a:prstGeom>
-          <a:noFill/>
-          <a:ln/>
-        </p:spPr>
-        <p:txBody>
-          <a:bodyPr wrap="square" rtlCol="0" anchor="ctr"/>
-          <a:lstStyle/>
-          <a:p>
-            <a:pPr algn="ctr" indent="0" marL="0">
-              <a:buNone/>
-            </a:pPr>
-            <a:r>
-              <a:rPr lang="en-US" sz="2000" dirty="0">
-                <a:solidFill>
-                  <a:srgbClr val="C81E1E"/>
-                </a:solidFill>
-                <a:latin typeface="Cambria" pitchFamily="34" charset="0"/>
-                <a:ea typeface="Cambria" pitchFamily="34" charset="-122"/>
-                <a:cs typeface="Cambria" pitchFamily="34" charset="-120"/>
-              </a:rPr>
-              <a:t>3</a:t>
-            </a:r>
-            <a:endParaRPr lang="en-US" sz="2000" dirty="0"/>
-          </a:p>
-        </p:txBody>
-      </p:sp>
-      <p:sp>
-        <p:nvSpPr>
-          <p:cNvPr id="13" name="Text 11"/>
-          <p:cNvSpPr/>
-          <p:nvPr/>
-        </p:nvSpPr>
-        <p:spPr>
-          <a:xfrm>
-            <a:off x="6233008" y="2971800"/>
-            <a:ext cx="2407844" cy="1005840"/>
-          </a:xfrm>
-          <a:prstGeom prst="rect">
-            <a:avLst/>
-          </a:prstGeom>
-          <a:noFill/>
-          <a:ln/>
-        </p:spPr>
-        <p:txBody>
-          <a:bodyPr wrap="square" rtlCol="0" anchor="t"/>
-          <a:lstStyle/>
-          <a:p>
-            <a:pPr algn="ctr" indent="0" marL="0">
-              <a:buNone/>
-            </a:pPr>
-            <a:r>
-              <a:rPr lang="en-US" sz="1350" dirty="0">
-                <a:solidFill>
-                  <a:srgbClr val="B9B7B2"/>
-                </a:solidFill>
-                <a:latin typeface="Calibri" pitchFamily="34" charset="0"/>
-                <a:ea typeface="Calibri" pitchFamily="34" charset="-122"/>
-                <a:cs typeface="Calibri" pitchFamily="34" charset="-120"/>
-              </a:rPr>
-              <a:t>Formalização da parceria institucional</a:t>
-            </a:r>
-            <a:endParaRPr lang="en-US" sz="1350" dirty="0"/>
-          </a:p>
-        </p:txBody>
-      </p:sp>
-      <p:sp>
-        <p:nvSpPr>
-          <p:cNvPr id="14" name="Shape 12"/>
-          <p:cNvSpPr/>
-          <p:nvPr/>
-        </p:nvSpPr>
-        <p:spPr>
-          <a:xfrm>
-            <a:off x="7802690" y="2423160"/>
-            <a:ext cx="1950644" cy="0"/>
-          </a:xfrm>
-          <a:prstGeom prst="line">
-            <a:avLst/>
-          </a:prstGeom>
-          <a:noFill/>
-          <a:ln w="12700">
-            <a:solidFill>
-              <a:srgbClr val="8F8D87"/>
-            </a:solidFill>
-            <a:prstDash val="dash"/>
-          </a:ln>
-        </p:spPr>
-      </p:sp>
-      <p:sp>
-        <p:nvSpPr>
-          <p:cNvPr id="15" name="Shape 13"/>
-          <p:cNvSpPr/>
-          <p:nvPr/>
-        </p:nvSpPr>
-        <p:spPr>
-          <a:xfrm>
-            <a:off x="9799053" y="2103120"/>
-            <a:ext cx="640080" cy="640080"/>
-          </a:xfrm>
-          <a:prstGeom prst="ellipse">
-            <a:avLst/>
-          </a:prstGeom>
-          <a:solidFill>
-            <a:srgbClr val="1A1A1A"/>
-          </a:solidFill>
-          <a:ln w="19050">
-            <a:solidFill>
-              <a:srgbClr val="C81E1E"/>
-            </a:solidFill>
-            <a:prstDash val="solid"/>
-          </a:ln>
-        </p:spPr>
-      </p:sp>
-      <p:sp>
-        <p:nvSpPr>
-          <p:cNvPr id="16" name="Text 14"/>
-          <p:cNvSpPr/>
-          <p:nvPr/>
-        </p:nvSpPr>
-        <p:spPr>
-          <a:xfrm>
-            <a:off x="9799053" y="2103120"/>
-            <a:ext cx="640080" cy="640080"/>
-          </a:xfrm>
-          <a:prstGeom prst="rect">
-            <a:avLst/>
-          </a:prstGeom>
-          <a:noFill/>
-          <a:ln/>
-        </p:spPr>
-        <p:txBody>
-          <a:bodyPr wrap="square" rtlCol="0" anchor="ctr"/>
-          <a:lstStyle/>
-          <a:p>
-            <a:pPr algn="ctr" indent="0" marL="0">
-              <a:buNone/>
-            </a:pPr>
-            <a:r>
-              <a:rPr lang="en-US" sz="2000" dirty="0">
-                <a:solidFill>
-                  <a:srgbClr val="C81E1E"/>
-                </a:solidFill>
-                <a:latin typeface="Cambria" pitchFamily="34" charset="0"/>
-                <a:ea typeface="Cambria" pitchFamily="34" charset="-122"/>
-                <a:cs typeface="Cambria" pitchFamily="34" charset="-120"/>
-              </a:rPr>
-              <a:t>4</a:t>
-            </a:r>
-            <a:endParaRPr lang="en-US" sz="2000" dirty="0"/>
-          </a:p>
-        </p:txBody>
-      </p:sp>
-      <p:sp>
-        <p:nvSpPr>
-          <p:cNvPr id="17" name="Text 15"/>
-          <p:cNvSpPr/>
-          <p:nvPr/>
-        </p:nvSpPr>
-        <p:spPr>
-          <a:xfrm>
-            <a:off x="8915171" y="2971800"/>
-            <a:ext cx="2407844" cy="1005840"/>
-          </a:xfrm>
-          <a:prstGeom prst="rect">
-            <a:avLst/>
-          </a:prstGeom>
-          <a:noFill/>
-          <a:ln/>
-        </p:spPr>
-        <p:txBody>
-          <a:bodyPr wrap="square" rtlCol="0" anchor="t"/>
-          <a:lstStyle/>
-          <a:p>
-            <a:pPr algn="ctr" indent="0" marL="0">
-              <a:buNone/>
-            </a:pPr>
-            <a:r>
-              <a:rPr lang="en-US" sz="1350" dirty="0">
-                <a:solidFill>
-                  <a:srgbClr val="B9B7B2"/>
-                </a:solidFill>
-                <a:latin typeface="Calibri" pitchFamily="34" charset="0"/>
-                <a:ea typeface="Calibri" pitchFamily="34" charset="-122"/>
-                <a:cs typeface="Calibri" pitchFamily="34" charset="-120"/>
-              </a:rPr>
-              <a:t>Início das obras</a:t>
-            </a:r>
-            <a:endParaRPr lang="en-US" sz="1350" dirty="0"/>
-          </a:p>
-        </p:txBody>
-      </p:sp>
-      <p:sp>
-        <p:nvSpPr>
-          <p:cNvPr id="19" name="Text 16"/>
-          <p:cNvSpPr/>
-          <p:nvPr/>
-        </p:nvSpPr>
-        <p:spPr>
-          <a:xfrm>
-            <a:off x="11185855" y="6355080"/>
-            <a:ext cx="640080" cy="320040"/>
-          </a:xfrm>
-          <a:prstGeom prst="rect">
-            <a:avLst/>
-          </a:prstGeom>
-          <a:noFill/>
-          <a:ln/>
-        </p:spPr>
-        <p:txBody>
-          <a:bodyPr wrap="square" rtlCol="0" anchor="ctr"/>
-          <a:lstStyle/>
-          <a:p>
-            <a:pPr algn="r" indent="0" marL="0">
-              <a:buNone/>
-            </a:pPr>
-            <a:r>
-              <a:rPr lang="en-US" sz="1000" dirty="0">
-                <a:solidFill>
-                  <a:srgbClr val="8F8D87"/>
-                </a:solidFill>
-                <a:latin typeface="Calibri" pitchFamily="34" charset="0"/>
-                <a:ea typeface="Calibri" pitchFamily="34" charset="-122"/>
-                <a:cs typeface="Calibri" pitchFamily="34" charset="-120"/>
-              </a:rPr>
-              <a:t>07</a:t>
-            </a:r>
-            <a:endParaRPr lang="en-US" sz="1000" dirty="0"/>
+              <a:t>acreditar antes dos outros.”</a:t>
+            </a:r>
+            <a:endParaRPr lang="en-US" sz="2400" dirty="0"/>
           </a:p>
         </p:txBody>
       </p:sp>
@@ -4084,143 +3977,6 @@
           <a:chExt cx="0" cy="0"/>
         </a:xfrm>
       </p:grpSpPr>
-      <p:pic>
-        <p:nvPicPr>
-          <p:cNvPr id="2" name="Image 0" descr="visuals/legacy-placeholder.png">    </p:cNvPr>
-          <p:cNvPicPr>
-            <a:picLocks noChangeAspect="1"/>
-          </p:cNvPicPr>
-          <p:nvPr/>
-        </p:nvPicPr>
-        <p:blipFill>
-          <a:blip r:embed="rId1"/>
-          <a:srcRect l="0" r="0" t="0" b="0"/>
-          <a:stretch/>
-        </p:blipFill>
-        <p:spPr>
-          <a:xfrm>
-            <a:off x="0" y="0"/>
-            <a:ext cx="12191695" cy="6858000"/>
-          </a:xfrm>
-          <a:prstGeom prst="rect">
-            <a:avLst/>
-          </a:prstGeom>
-        </p:spPr>
-      </p:pic>
-      <p:sp>
-        <p:nvSpPr>
-          <p:cNvPr id="3" name="Text 0"/>
-          <p:cNvSpPr/>
-          <p:nvPr/>
-        </p:nvSpPr>
-        <p:spPr>
-          <a:xfrm>
-            <a:off x="914400" y="1463040"/>
-            <a:ext cx="10362895" cy="1828800"/>
-          </a:xfrm>
-          <a:prstGeom prst="rect">
-            <a:avLst/>
-          </a:prstGeom>
-          <a:noFill/>
-          <a:ln/>
-        </p:spPr>
-        <p:txBody>
-          <a:bodyPr wrap="square" rtlCol="0" anchor="ctr"/>
-          <a:lstStyle/>
-          <a:p>
-            <a:pPr algn="l" indent="0" marL="0">
-              <a:lnSpc>
-                <a:spcPct val="125000"/>
-              </a:lnSpc>
-              <a:buNone/>
-            </a:pPr>
-            <a:r>
-              <a:rPr lang="en-US" sz="2400" i="1" dirty="0">
-                <a:solidFill>
-                  <a:srgbClr val="FFFFFF"/>
-                </a:solidFill>
-                <a:latin typeface="Cambria" pitchFamily="34" charset="0"/>
-                <a:ea typeface="Cambria" pitchFamily="34" charset="-122"/>
-                <a:cs typeface="Cambria" pitchFamily="34" charset="-120"/>
-              </a:rPr>
-              <a:t>“As grandes cidades não crescem por acaso.</a:t>
-            </a:r>
-            <a:endParaRPr lang="en-US" sz="2400" dirty="0"/>
-          </a:p>
-          <a:p>
-            <a:pPr algn="l" indent="0" marL="0">
-              <a:lnSpc>
-                <a:spcPct val="125000"/>
-              </a:lnSpc>
-              <a:buNone/>
-            </a:pPr>
-            <a:r>
-              <a:rPr lang="en-US" sz="2400" i="1" dirty="0">
-                <a:solidFill>
-                  <a:srgbClr val="FFFFFF"/>
-                </a:solidFill>
-                <a:latin typeface="Cambria" pitchFamily="34" charset="0"/>
-                <a:ea typeface="Cambria" pitchFamily="34" charset="-122"/>
-                <a:cs typeface="Cambria" pitchFamily="34" charset="-120"/>
-              </a:rPr>
-              <a:t>Elas crescem porque alguém decidiu</a:t>
-            </a:r>
-            <a:endParaRPr lang="en-US" sz="2400" dirty="0"/>
-          </a:p>
-          <a:p>
-            <a:pPr algn="l" indent="0" marL="0">
-              <a:lnSpc>
-                <a:spcPct val="125000"/>
-              </a:lnSpc>
-              <a:buNone/>
-            </a:pPr>
-            <a:r>
-              <a:rPr lang="en-US" sz="2400" i="1" dirty="0">
-                <a:solidFill>
-                  <a:srgbClr val="FFFFFF"/>
-                </a:solidFill>
-                <a:latin typeface="Cambria" pitchFamily="34" charset="0"/>
-                <a:ea typeface="Cambria" pitchFamily="34" charset="-122"/>
-                <a:cs typeface="Cambria" pitchFamily="34" charset="-120"/>
-              </a:rPr>
-              <a:t>acreditar antes dos outros.”</a:t>
-            </a:r>
-            <a:endParaRPr lang="en-US" sz="2400" dirty="0"/>
-          </a:p>
-        </p:txBody>
-      </p:sp>
-    </p:spTree>
-  </p:cSld>
-  <p:clrMapOvr>
-    <a:masterClrMapping/>
-  </p:clrMapOvr>
-</p:sld>
-</file>
-
-<file path=ppt/slides/slide15.xml><?xml version="1.0" encoding="utf-8"?>
-<p:sld xmlns:a="http://schemas.openxmlformats.org/drawingml/2006/main" xmlns:r="http://schemas.openxmlformats.org/officeDocument/2006/relationships" xmlns:p="http://schemas.openxmlformats.org/presentationml/2006/main">
-  <p:cSld name="Slide 15">
-    <p:bg>
-      <p:bgPr>
-        <a:solidFill>
-          <a:srgbClr val="0C0C0B"/>
-        </a:solidFill>
-      </p:bgPr>
-    </p:bg>
-    <p:spTree>
-      <p:nvGrpSpPr>
-        <p:cNvPr id="1" name=""/>
-        <p:cNvGrpSpPr/>
-        <p:nvPr/>
-      </p:nvGrpSpPr>
-      <p:grpSpPr>
-        <a:xfrm>
-          <a:off x="0" y="0"/>
-          <a:ext cx="0" cy="0"/>
-          <a:chOff x="0" y="0"/>
-          <a:chExt cx="0" cy="0"/>
-        </a:xfrm>
-      </p:grpSpPr>
       <p:sp>
         <p:nvSpPr>
           <p:cNvPr id="2" name="Text 0"/>
@@ -4403,7 +4159,7 @@
                 <a:ea typeface="Calibri" pitchFamily="34" charset="-122"/>
                 <a:cs typeface="Calibri" pitchFamily="34" charset="-120"/>
               </a:rPr>
-              <a:t>O CONTEXTO</a:t>
+              <a:t>A OPORTUNIDADE</a:t>
             </a:r>
             <a:endParaRPr lang="en-US" sz="1100" dirty="0"/>
           </a:p>
@@ -4442,7 +4198,7 @@
                 <a:ea typeface="Cambria" pitchFamily="34" charset="-122"/>
                 <a:cs typeface="Cambria" pitchFamily="34" charset="-120"/>
               </a:rPr>
-              <a:t>Um novo corredor econômico está se formando</a:t>
+              <a:t>A pista está pronta.</a:t>
             </a:r>
             <a:endParaRPr lang="en-US" sz="2600" dirty="0"/>
           </a:p>
@@ -4459,7 +4215,7 @@
                 <a:ea typeface="Cambria" pitchFamily="34" charset="-122"/>
                 <a:cs typeface="Cambria" pitchFamily="34" charset="-120"/>
               </a:rPr>
-              <a:t>ao redor de Brasília.</a:t>
+              <a:t>Falta estrutura para quem já roda nela.</a:t>
             </a:r>
             <a:endParaRPr lang="en-US" sz="2600" dirty="0"/>
           </a:p>
@@ -4467,7 +4223,7 @@
       </p:sp>
       <p:pic>
         <p:nvPicPr>
-          <p:cNvPr id="4" name="Image 0" descr="icons/pin-C81E1E.png">    </p:cNvPr>
+          <p:cNvPr id="4" name="Image 0" descr="icons/compass-C81E1E.png">    </p:cNvPr>
           <p:cNvPicPr>
             <a:picLocks noChangeAspect="1"/>
           </p:cNvPicPr>
@@ -4525,7 +4281,7 @@
                 <a:ea typeface="Calibri" pitchFamily="34" charset="-122"/>
                 <a:cs typeface="Calibri" pitchFamily="34" charset="-120"/>
               </a:rPr>
-              <a:t>Novo aeroporto em estudo para Águas Lindas de Goiás — local já com acesso direto à BR-070</a:t>
+              <a:t>BR-070 recém-recuperada — pista nova, boas condições de tráfego</a:t>
             </a:r>
             <a:endParaRPr lang="en-US" sz="1400" dirty="0"/>
           </a:p>
@@ -4533,7 +4289,7 @@
       </p:sp>
       <p:pic>
         <p:nvPicPr>
-          <p:cNvPr id="6" name="Image 1" descr="icons/layers-C81E1E.png">    </p:cNvPr>
+          <p:cNvPr id="6" name="Image 1" descr="icons/truck-C81E1E.png">    </p:cNvPr>
           <p:cNvPicPr>
             <a:picLocks noChangeAspect="1"/>
           </p:cNvPicPr>
@@ -4591,7 +4347,7 @@
                 <a:ea typeface="Calibri" pitchFamily="34" charset="-122"/>
                 <a:cs typeface="Calibri" pitchFamily="34" charset="-120"/>
               </a:rPr>
-              <a:t>Expansão de polos industriais no Entorno do DF</a:t>
+              <a:t>Sem posto com estrutura adequada, caminhoneiros hoje evitam esse trecho</a:t>
             </a:r>
             <a:endParaRPr lang="en-US" sz="1400" dirty="0"/>
           </a:p>
@@ -4657,7 +4413,7 @@
                 <a:ea typeface="Calibri" pitchFamily="34" charset="-122"/>
                 <a:cs typeface="Calibri" pitchFamily="34" charset="-120"/>
               </a:rPr>
-              <a:t>Investimentos internacionais mirando a logística do Centro-Oeste</a:t>
+              <a:t>A poucos minutos, o acesso à BR-153 leva esse fluxo direto até Tocantins</a:t>
             </a:r>
             <a:endParaRPr lang="en-US" sz="1400" dirty="0"/>
           </a:p>
@@ -4665,7 +4421,7 @@
       </p:sp>
       <p:pic>
         <p:nvPicPr>
-          <p:cNvPr id="10" name="Image 3" descr="icons/compass-C81E1E.png">    </p:cNvPr>
+          <p:cNvPr id="10" name="Image 3" descr="icons/pin-C81E1E.png">    </p:cNvPr>
           <p:cNvPicPr>
             <a:picLocks noChangeAspect="1"/>
           </p:cNvPicPr>
@@ -4723,7 +4479,7 @@
                 <a:ea typeface="Calibri" pitchFamily="34" charset="-122"/>
                 <a:cs typeface="Calibri" pitchFamily="34" charset="-120"/>
               </a:rPr>
-              <a:t>BR-070: eixo entre Brasília, o Centro-Oeste e o Mato Grosso</a:t>
+              <a:t>É um mercado gigantesco de caminhões que hoje passa longe de Cocalzinho</a:t>
             </a:r>
             <a:endParaRPr lang="en-US" sz="1400" dirty="0"/>
           </a:p>
@@ -4870,7 +4626,7 @@
               <a:buNone/>
             </a:pPr>
             <a:r>
-              <a:rPr lang="en-US" sz="2600" dirty="0">
+              <a:rPr lang="en-US" sz="2400" dirty="0">
                 <a:solidFill>
                   <a:srgbClr val="1A1A1A"/>
                 </a:solidFill>
@@ -4878,9 +4634,9 @@
                 <a:ea typeface="Cambria" pitchFamily="34" charset="-122"/>
                 <a:cs typeface="Cambria" pitchFamily="34" charset="-120"/>
               </a:rPr>
-              <a:t>Cocalzinho de Goiás — na rota, não à margem dela.</a:t>
-            </a:r>
-            <a:endParaRPr lang="en-US" sz="2600" dirty="0"/>
+              <a:t>Cocalzinho de Goiás, na BR-070 — a poucos minutos do acesso à BR-153.</a:t>
+            </a:r>
+            <a:endParaRPr lang="en-US" sz="2400" dirty="0"/>
           </a:p>
         </p:txBody>
       </p:sp>
@@ -4955,16 +4711,61 @@
           <a:chExt cx="0" cy="0"/>
         </a:xfrm>
       </p:grpSpPr>
-      <p:sp>
-        <p:nvSpPr>
-          <p:cNvPr id="2" name="Text 0"/>
-          <p:cNvSpPr/>
-          <p:nvPr/>
-        </p:nvSpPr>
-        <p:spPr>
-          <a:xfrm>
-            <a:off x="640080" y="457200"/>
-            <a:ext cx="7315200" cy="365760"/>
+      <p:pic>
+        <p:nvPicPr>
+          <p:cNvPr id="2" name="Image 0" descr="visuals-real/reveal.jpg">    </p:cNvPr>
+          <p:cNvPicPr>
+            <a:picLocks noChangeAspect="1"/>
+          </p:cNvPicPr>
+          <p:nvPr/>
+        </p:nvPicPr>
+        <p:blipFill>
+          <a:blip r:embed="rId1"/>
+          <a:srcRect l="0" r="0" t="0" b="0"/>
+          <a:stretch/>
+        </p:blipFill>
+        <p:spPr>
+          <a:xfrm>
+            <a:off x="0" y="0"/>
+            <a:ext cx="12191695" cy="6858000"/>
+          </a:xfrm>
+          <a:prstGeom prst="rect">
+            <a:avLst/>
+          </a:prstGeom>
+        </p:spPr>
+      </p:pic>
+      <p:sp>
+        <p:nvSpPr>
+          <p:cNvPr id="3" name="Shape 0"/>
+          <p:cNvSpPr/>
+          <p:nvPr/>
+        </p:nvSpPr>
+        <p:spPr>
+          <a:xfrm>
+            <a:off x="0" y="5029200"/>
+            <a:ext cx="12191695" cy="1828800"/>
+          </a:xfrm>
+          <a:prstGeom prst="rect">
+            <a:avLst/>
+          </a:prstGeom>
+          <a:solidFill>
+            <a:srgbClr val="0C0C0B">
+              <a:alpha val="65000"/>
+            </a:srgbClr>
+          </a:solidFill>
+          <a:ln/>
+        </p:spPr>
+      </p:sp>
+      <p:sp>
+        <p:nvSpPr>
+          <p:cNvPr id="4" name="Text 1"/>
+          <p:cNvSpPr/>
+          <p:nvPr/>
+        </p:nvSpPr>
+        <p:spPr>
+          <a:xfrm>
+            <a:off x="0" y="5440680"/>
+            <a:ext cx="12191695" cy="1005840"/>
           </a:xfrm>
           <a:prstGeom prst="rect">
             <a:avLst/>
@@ -4976,50 +4777,11 @@
           <a:bodyPr wrap="square" rtlCol="0" anchor="ctr"/>
           <a:lstStyle/>
           <a:p>
-            <a:pPr indent="0" marL="0">
-              <a:buNone/>
-            </a:pPr>
-            <a:r>
-              <a:rPr lang="en-US" sz="1100" spc="500" kern="0" dirty="0">
-                <a:solidFill>
-                  <a:srgbClr val="8F8D87"/>
-                </a:solidFill>
-                <a:latin typeface="Calibri" pitchFamily="34" charset="0"/>
-                <a:ea typeface="Calibri" pitchFamily="34" charset="-122"/>
-                <a:cs typeface="Calibri" pitchFamily="34" charset="-120"/>
-              </a:rPr>
-              <a:t>UM CONTEXTO OBSERVADO</a:t>
-            </a:r>
-            <a:endParaRPr lang="en-US" sz="1100" dirty="0"/>
-          </a:p>
-        </p:txBody>
-      </p:sp>
-      <p:sp>
-        <p:nvSpPr>
-          <p:cNvPr id="3" name="Text 1"/>
-          <p:cNvSpPr/>
-          <p:nvPr/>
-        </p:nvSpPr>
-        <p:spPr>
-          <a:xfrm>
-            <a:off x="914400" y="1737360"/>
-            <a:ext cx="10362895" cy="1188720"/>
-          </a:xfrm>
-          <a:prstGeom prst="rect">
-            <a:avLst/>
-          </a:prstGeom>
-          <a:noFill/>
-          <a:ln/>
-        </p:spPr>
-        <p:txBody>
-          <a:bodyPr wrap="square" rtlCol="0" anchor="ctr"/>
-          <a:lstStyle/>
-          <a:p>
             <a:pPr algn="ctr" indent="0" marL="0">
               <a:buNone/>
             </a:pPr>
             <a:r>
-              <a:rPr lang="en-US" sz="2800" dirty="0">
+              <a:rPr lang="en-US" sz="3400" spc="200" kern="0" dirty="0">
                 <a:solidFill>
                   <a:srgbClr val="FFFFFF"/>
                 </a:solidFill>
@@ -5027,104 +4789,9 @@
                 <a:ea typeface="Cambria" pitchFamily="34" charset="-122"/>
                 <a:cs typeface="Cambria" pitchFamily="34" charset="-120"/>
               </a:rPr>
-              <a:t>Toda rodovia estratégica precisa</a:t>
-            </a:r>
-            <a:endParaRPr lang="en-US" sz="2800" dirty="0"/>
-          </a:p>
-          <a:p>
-            <a:pPr algn="ctr" indent="0" marL="0">
-              <a:buNone/>
-            </a:pPr>
-            <a:r>
-              <a:rPr lang="en-US" sz="2800" dirty="0">
-                <a:solidFill>
-                  <a:srgbClr val="FFFFFF"/>
-                </a:solidFill>
-                <a:latin typeface="Cambria" pitchFamily="34" charset="0"/>
-                <a:ea typeface="Cambria" pitchFamily="34" charset="-122"/>
-                <a:cs typeface="Cambria" pitchFamily="34" charset="-120"/>
-              </a:rPr>
-              <a:t>de infraestrutura de apoio.</a:t>
-            </a:r>
-            <a:endParaRPr lang="en-US" sz="2800" dirty="0"/>
-          </a:p>
-        </p:txBody>
-      </p:sp>
-      <p:sp>
-        <p:nvSpPr>
-          <p:cNvPr id="4" name="Text 2"/>
-          <p:cNvSpPr/>
-          <p:nvPr/>
-        </p:nvSpPr>
-        <p:spPr>
-          <a:xfrm>
-            <a:off x="1828800" y="3200400"/>
-            <a:ext cx="8534095" cy="1005840"/>
-          </a:xfrm>
-          <a:prstGeom prst="rect">
-            <a:avLst/>
-          </a:prstGeom>
-          <a:noFill/>
-          <a:ln/>
-        </p:spPr>
-        <p:txBody>
-          <a:bodyPr wrap="square" rtlCol="0" anchor="ctr"/>
-          <a:lstStyle/>
-          <a:p>
-            <a:pPr algn="ctr" indent="0" marL="0">
-              <a:buNone/>
-            </a:pPr>
-            <a:r>
-              <a:rPr lang="en-US" sz="1500" i="1" dirty="0">
-                <a:solidFill>
-                  <a:srgbClr val="B9B7B2"/>
-                </a:solidFill>
-                <a:latin typeface="Calibri" pitchFamily="34" charset="0"/>
-                <a:ea typeface="Calibri" pitchFamily="34" charset="-122"/>
-                <a:cs typeface="Calibri" pitchFamily="34" charset="-120"/>
-              </a:rPr>
-              <a:t>Hoje, entre Ceilândia e Cocalzinho, existem poucas estruturas preparadas para o fluxo crescente de caminhões, produtores e famílias na BR-070.</a:t>
-            </a:r>
-            <a:endParaRPr lang="en-US" sz="1500" dirty="0"/>
-          </a:p>
-        </p:txBody>
-      </p:sp>
-      <p:sp>
-        <p:nvSpPr>
-          <p:cNvPr id="6" name="Text 3"/>
-          <p:cNvSpPr/>
-          <p:nvPr/>
-        </p:nvSpPr>
-        <p:spPr>
-          <a:xfrm>
-            <a:off x="11185855" y="6355080"/>
-            <a:ext cx="640080" cy="320040"/>
-          </a:xfrm>
-          <a:prstGeom prst="rect">
-            <a:avLst/>
-          </a:prstGeom>
-          <a:noFill/>
-          <a:ln/>
-        </p:spPr>
-        <p:txBody>
-          <a:bodyPr wrap="square" rtlCol="0" anchor="ctr"/>
-          <a:lstStyle/>
-          <a:p>
-            <a:pPr algn="r" indent="0" marL="0">
-              <a:buNone/>
-            </a:pPr>
-            <a:r>
-              <a:rPr lang="en-US" sz="1000" dirty="0">
-                <a:solidFill>
-                  <a:srgbClr val="8F8D87"/>
-                </a:solidFill>
-                <a:latin typeface="Calibri" pitchFamily="34" charset="0"/>
-                <a:ea typeface="Calibri" pitchFamily="34" charset="-122"/>
-                <a:cs typeface="Calibri" pitchFamily="34" charset="-120"/>
-              </a:rPr>
-              <a:t>03</a:t>
-            </a:r>
-            <a:endParaRPr lang="en-US" sz="1000" dirty="0"/>
+              <a:t>CENTRO DE SERVIÇOS GIRASSOL</a:t>
+            </a:r>
+            <a:endParaRPr lang="en-US" sz="3400" dirty="0"/>
           </a:p>
         </p:txBody>
       </p:sp>
@@ -5139,6 +4806,859 @@
 <file path=ppt/slides/slide5.xml><?xml version="1.0" encoding="utf-8"?>
 <p:sld xmlns:a="http://schemas.openxmlformats.org/drawingml/2006/main" xmlns:r="http://schemas.openxmlformats.org/officeDocument/2006/relationships" xmlns:p="http://schemas.openxmlformats.org/presentationml/2006/main">
   <p:cSld name="Slide 5">
+    <p:bg>
+      <p:bgPr>
+        <a:solidFill>
+          <a:srgbClr val="F4F1EA"/>
+        </a:solidFill>
+      </p:bgPr>
+    </p:bg>
+    <p:spTree>
+      <p:nvGrpSpPr>
+        <p:cNvPr id="1" name=""/>
+        <p:cNvGrpSpPr/>
+        <p:nvPr/>
+      </p:nvGrpSpPr>
+      <p:grpSpPr>
+        <a:xfrm>
+          <a:off x="0" y="0"/>
+          <a:ext cx="0" cy="0"/>
+          <a:chOff x="0" y="0"/>
+          <a:chExt cx="0" cy="0"/>
+        </a:xfrm>
+      </p:grpSpPr>
+      <p:sp>
+        <p:nvSpPr>
+          <p:cNvPr id="2" name="Text 0"/>
+          <p:cNvSpPr/>
+          <p:nvPr/>
+        </p:nvSpPr>
+        <p:spPr>
+          <a:xfrm>
+            <a:off x="914400" y="594360"/>
+            <a:ext cx="10362895" cy="731520"/>
+          </a:xfrm>
+          <a:prstGeom prst="rect">
+            <a:avLst/>
+          </a:prstGeom>
+          <a:noFill/>
+          <a:ln/>
+        </p:spPr>
+        <p:txBody>
+          <a:bodyPr wrap="square" rtlCol="0" anchor="ctr"/>
+          <a:lstStyle/>
+          <a:p>
+            <a:pPr algn="ctr" indent="0" marL="0">
+              <a:buNone/>
+            </a:pPr>
+            <a:r>
+              <a:rPr lang="en-US" sz="2800" dirty="0">
+                <a:solidFill>
+                  <a:srgbClr val="1A1A1A"/>
+                </a:solidFill>
+                <a:latin typeface="Cambria" pitchFamily="34" charset="0"/>
+                <a:ea typeface="Cambria" pitchFamily="34" charset="-122"/>
+                <a:cs typeface="Cambria" pitchFamily="34" charset="-120"/>
+              </a:rPr>
+              <a:t>Não é um posto de combustíveis.</a:t>
+            </a:r>
+            <a:endParaRPr lang="en-US" sz="2800" dirty="0"/>
+          </a:p>
+        </p:txBody>
+      </p:sp>
+      <p:sp>
+        <p:nvSpPr>
+          <p:cNvPr id="3" name="Text 1"/>
+          <p:cNvSpPr/>
+          <p:nvPr/>
+        </p:nvSpPr>
+        <p:spPr>
+          <a:xfrm>
+            <a:off x="1371600" y="1325880"/>
+            <a:ext cx="9448495" cy="548640"/>
+          </a:xfrm>
+          <a:prstGeom prst="rect">
+            <a:avLst/>
+          </a:prstGeom>
+          <a:noFill/>
+          <a:ln/>
+        </p:spPr>
+        <p:txBody>
+          <a:bodyPr wrap="square" rtlCol="0" anchor="ctr"/>
+          <a:lstStyle/>
+          <a:p>
+            <a:pPr algn="ctr" indent="0" marL="0">
+              <a:buNone/>
+            </a:pPr>
+            <a:r>
+              <a:rPr lang="en-US" sz="1500" i="1" dirty="0">
+                <a:solidFill>
+                  <a:srgbClr val="C81E1E"/>
+                </a:solidFill>
+                <a:latin typeface="Calibri" pitchFamily="34" charset="0"/>
+                <a:ea typeface="Calibri" pitchFamily="34" charset="-122"/>
+                <a:cs typeface="Calibri" pitchFamily="34" charset="-120"/>
+              </a:rPr>
+              <a:t>É um equipamento urbano de apoio à mobilidade regional.</a:t>
+            </a:r>
+            <a:endParaRPr lang="en-US" sz="1500" dirty="0"/>
+          </a:p>
+        </p:txBody>
+      </p:sp>
+      <p:sp>
+        <p:nvSpPr>
+          <p:cNvPr id="4" name="Shape 2"/>
+          <p:cNvSpPr/>
+          <p:nvPr/>
+        </p:nvSpPr>
+        <p:spPr>
+          <a:xfrm>
+            <a:off x="1601686" y="2331720"/>
+            <a:ext cx="804672" cy="804672"/>
+          </a:xfrm>
+          <a:prstGeom prst="ellipse">
+            <a:avLst/>
+          </a:prstGeom>
+          <a:solidFill>
+            <a:srgbClr val="FFFFFF"/>
+          </a:solidFill>
+          <a:ln w="15875">
+            <a:solidFill>
+              <a:srgbClr val="C81E1E"/>
+            </a:solidFill>
+            <a:prstDash val="solid"/>
+          </a:ln>
+        </p:spPr>
+      </p:sp>
+      <p:pic>
+        <p:nvPicPr>
+          <p:cNvPr id="5" name="Image 0" descr="icons/truck-1A1A1A.png">    </p:cNvPr>
+          <p:cNvPicPr>
+            <a:picLocks noChangeAspect="1"/>
+          </p:cNvPicPr>
+          <p:nvPr/>
+        </p:nvPicPr>
+        <p:blipFill>
+          <a:blip r:embed="rId1"/>
+          <a:stretch>
+            <a:fillRect/>
+          </a:stretch>
+        </p:blipFill>
+        <p:spPr>
+          <a:xfrm>
+            <a:off x="1802854" y="2532888"/>
+            <a:ext cx="402336" cy="402336"/>
+          </a:xfrm>
+          <a:prstGeom prst="rect">
+            <a:avLst/>
+          </a:prstGeom>
+        </p:spPr>
+      </p:pic>
+      <p:sp>
+        <p:nvSpPr>
+          <p:cNvPr id="6" name="Text 3"/>
+          <p:cNvSpPr/>
+          <p:nvPr/>
+        </p:nvSpPr>
+        <p:spPr>
+          <a:xfrm>
+            <a:off x="640080" y="3246120"/>
+            <a:ext cx="2727884" cy="365760"/>
+          </a:xfrm>
+          <a:prstGeom prst="rect">
+            <a:avLst/>
+          </a:prstGeom>
+          <a:noFill/>
+          <a:ln/>
+        </p:spPr>
+        <p:txBody>
+          <a:bodyPr wrap="square" rtlCol="0" anchor="ctr"/>
+          <a:lstStyle/>
+          <a:p>
+            <a:pPr algn="ctr" indent="0" marL="0">
+              <a:buNone/>
+            </a:pPr>
+            <a:r>
+              <a:rPr lang="en-US" sz="1250" b="1" dirty="0">
+                <a:solidFill>
+                  <a:srgbClr val="1A1A1A"/>
+                </a:solidFill>
+                <a:latin typeface="Calibri" pitchFamily="34" charset="0"/>
+                <a:ea typeface="Calibri" pitchFamily="34" charset="-122"/>
+                <a:cs typeface="Calibri" pitchFamily="34" charset="-120"/>
+              </a:rPr>
+              <a:t>Transportadores</a:t>
+            </a:r>
+            <a:endParaRPr lang="en-US" sz="1250" dirty="0"/>
+          </a:p>
+        </p:txBody>
+      </p:sp>
+      <p:sp>
+        <p:nvSpPr>
+          <p:cNvPr id="7" name="Shape 4"/>
+          <p:cNvSpPr/>
+          <p:nvPr/>
+        </p:nvSpPr>
+        <p:spPr>
+          <a:xfrm>
+            <a:off x="4329570" y="2331720"/>
+            <a:ext cx="804672" cy="804672"/>
+          </a:xfrm>
+          <a:prstGeom prst="ellipse">
+            <a:avLst/>
+          </a:prstGeom>
+          <a:solidFill>
+            <a:srgbClr val="FFFFFF"/>
+          </a:solidFill>
+          <a:ln w="15875">
+            <a:solidFill>
+              <a:srgbClr val="C81E1E"/>
+            </a:solidFill>
+            <a:prstDash val="solid"/>
+          </a:ln>
+        </p:spPr>
+      </p:sp>
+      <p:pic>
+        <p:nvPicPr>
+          <p:cNvPr id="8" name="Image 1" descr="icons/wheat-1A1A1A.png">    </p:cNvPr>
+          <p:cNvPicPr>
+            <a:picLocks noChangeAspect="1"/>
+          </p:cNvPicPr>
+          <p:nvPr/>
+        </p:nvPicPr>
+        <p:blipFill>
+          <a:blip r:embed="rId2"/>
+          <a:stretch>
+            <a:fillRect/>
+          </a:stretch>
+        </p:blipFill>
+        <p:spPr>
+          <a:xfrm>
+            <a:off x="4530738" y="2532888"/>
+            <a:ext cx="402336" cy="402336"/>
+          </a:xfrm>
+          <a:prstGeom prst="rect">
+            <a:avLst/>
+          </a:prstGeom>
+        </p:spPr>
+      </p:pic>
+      <p:sp>
+        <p:nvSpPr>
+          <p:cNvPr id="9" name="Text 5"/>
+          <p:cNvSpPr/>
+          <p:nvPr/>
+        </p:nvSpPr>
+        <p:spPr>
+          <a:xfrm>
+            <a:off x="3367964" y="3246120"/>
+            <a:ext cx="2727884" cy="365760"/>
+          </a:xfrm>
+          <a:prstGeom prst="rect">
+            <a:avLst/>
+          </a:prstGeom>
+          <a:noFill/>
+          <a:ln/>
+        </p:spPr>
+        <p:txBody>
+          <a:bodyPr wrap="square" rtlCol="0" anchor="ctr"/>
+          <a:lstStyle/>
+          <a:p>
+            <a:pPr algn="ctr" indent="0" marL="0">
+              <a:buNone/>
+            </a:pPr>
+            <a:r>
+              <a:rPr lang="en-US" sz="1250" b="1" dirty="0">
+                <a:solidFill>
+                  <a:srgbClr val="1A1A1A"/>
+                </a:solidFill>
+                <a:latin typeface="Calibri" pitchFamily="34" charset="0"/>
+                <a:ea typeface="Calibri" pitchFamily="34" charset="-122"/>
+                <a:cs typeface="Calibri" pitchFamily="34" charset="-120"/>
+              </a:rPr>
+              <a:t>Agronegócio</a:t>
+            </a:r>
+            <a:endParaRPr lang="en-US" sz="1250" dirty="0"/>
+          </a:p>
+        </p:txBody>
+      </p:sp>
+      <p:sp>
+        <p:nvSpPr>
+          <p:cNvPr id="10" name="Shape 6"/>
+          <p:cNvSpPr/>
+          <p:nvPr/>
+        </p:nvSpPr>
+        <p:spPr>
+          <a:xfrm>
+            <a:off x="7057454" y="2331720"/>
+            <a:ext cx="804672" cy="804672"/>
+          </a:xfrm>
+          <a:prstGeom prst="ellipse">
+            <a:avLst/>
+          </a:prstGeom>
+          <a:solidFill>
+            <a:srgbClr val="FFFFFF"/>
+          </a:solidFill>
+          <a:ln w="15875">
+            <a:solidFill>
+              <a:srgbClr val="C81E1E"/>
+            </a:solidFill>
+            <a:prstDash val="solid"/>
+          </a:ln>
+        </p:spPr>
+      </p:sp>
+      <p:pic>
+        <p:nvPicPr>
+          <p:cNvPr id="11" name="Image 2" descr="icons/users-1A1A1A.png">    </p:cNvPr>
+          <p:cNvPicPr>
+            <a:picLocks noChangeAspect="1"/>
+          </p:cNvPicPr>
+          <p:nvPr/>
+        </p:nvPicPr>
+        <p:blipFill>
+          <a:blip r:embed="rId3"/>
+          <a:stretch>
+            <a:fillRect/>
+          </a:stretch>
+        </p:blipFill>
+        <p:spPr>
+          <a:xfrm>
+            <a:off x="7258622" y="2532888"/>
+            <a:ext cx="402336" cy="402336"/>
+          </a:xfrm>
+          <a:prstGeom prst="rect">
+            <a:avLst/>
+          </a:prstGeom>
+        </p:spPr>
+      </p:pic>
+      <p:sp>
+        <p:nvSpPr>
+          <p:cNvPr id="12" name="Text 7"/>
+          <p:cNvSpPr/>
+          <p:nvPr/>
+        </p:nvSpPr>
+        <p:spPr>
+          <a:xfrm>
+            <a:off x="6095848" y="3246120"/>
+            <a:ext cx="2727884" cy="365760"/>
+          </a:xfrm>
+          <a:prstGeom prst="rect">
+            <a:avLst/>
+          </a:prstGeom>
+          <a:noFill/>
+          <a:ln/>
+        </p:spPr>
+        <p:txBody>
+          <a:bodyPr wrap="square" rtlCol="0" anchor="ctr"/>
+          <a:lstStyle/>
+          <a:p>
+            <a:pPr algn="ctr" indent="0" marL="0">
+              <a:buNone/>
+            </a:pPr>
+            <a:r>
+              <a:rPr lang="en-US" sz="1250" b="1" dirty="0">
+                <a:solidFill>
+                  <a:srgbClr val="1A1A1A"/>
+                </a:solidFill>
+                <a:latin typeface="Calibri" pitchFamily="34" charset="0"/>
+                <a:ea typeface="Calibri" pitchFamily="34" charset="-122"/>
+                <a:cs typeface="Calibri" pitchFamily="34" charset="-120"/>
+              </a:rPr>
+              <a:t>Famílias</a:t>
+            </a:r>
+            <a:endParaRPr lang="en-US" sz="1250" dirty="0"/>
+          </a:p>
+        </p:txBody>
+      </p:sp>
+      <p:sp>
+        <p:nvSpPr>
+          <p:cNvPr id="13" name="Shape 8"/>
+          <p:cNvSpPr/>
+          <p:nvPr/>
+        </p:nvSpPr>
+        <p:spPr>
+          <a:xfrm>
+            <a:off x="9785337" y="2331720"/>
+            <a:ext cx="804672" cy="804672"/>
+          </a:xfrm>
+          <a:prstGeom prst="ellipse">
+            <a:avLst/>
+          </a:prstGeom>
+          <a:solidFill>
+            <a:srgbClr val="FFFFFF"/>
+          </a:solidFill>
+          <a:ln w="15875">
+            <a:solidFill>
+              <a:srgbClr val="C81E1E"/>
+            </a:solidFill>
+            <a:prstDash val="solid"/>
+          </a:ln>
+        </p:spPr>
+      </p:sp>
+      <p:pic>
+        <p:nvPicPr>
+          <p:cNvPr id="14" name="Image 3" descr="icons/layers-1A1A1A.png">    </p:cNvPr>
+          <p:cNvPicPr>
+            <a:picLocks noChangeAspect="1"/>
+          </p:cNvPicPr>
+          <p:nvPr/>
+        </p:nvPicPr>
+        <p:blipFill>
+          <a:blip r:embed="rId4"/>
+          <a:stretch>
+            <a:fillRect/>
+          </a:stretch>
+        </p:blipFill>
+        <p:spPr>
+          <a:xfrm>
+            <a:off x="9986505" y="2532888"/>
+            <a:ext cx="402336" cy="402336"/>
+          </a:xfrm>
+          <a:prstGeom prst="rect">
+            <a:avLst/>
+          </a:prstGeom>
+        </p:spPr>
+      </p:pic>
+      <p:sp>
+        <p:nvSpPr>
+          <p:cNvPr id="15" name="Text 9"/>
+          <p:cNvSpPr/>
+          <p:nvPr/>
+        </p:nvSpPr>
+        <p:spPr>
+          <a:xfrm>
+            <a:off x="8823731" y="3246120"/>
+            <a:ext cx="2727884" cy="365760"/>
+          </a:xfrm>
+          <a:prstGeom prst="rect">
+            <a:avLst/>
+          </a:prstGeom>
+          <a:noFill/>
+          <a:ln/>
+        </p:spPr>
+        <p:txBody>
+          <a:bodyPr wrap="square" rtlCol="0" anchor="ctr"/>
+          <a:lstStyle/>
+          <a:p>
+            <a:pPr algn="ctr" indent="0" marL="0">
+              <a:buNone/>
+            </a:pPr>
+            <a:r>
+              <a:rPr lang="en-US" sz="1250" b="1" dirty="0">
+                <a:solidFill>
+                  <a:srgbClr val="1A1A1A"/>
+                </a:solidFill>
+                <a:latin typeface="Calibri" pitchFamily="34" charset="0"/>
+                <a:ea typeface="Calibri" pitchFamily="34" charset="-122"/>
+                <a:cs typeface="Calibri" pitchFamily="34" charset="-120"/>
+              </a:rPr>
+              <a:t>Logística</a:t>
+            </a:r>
+            <a:endParaRPr lang="en-US" sz="1250" dirty="0"/>
+          </a:p>
+        </p:txBody>
+      </p:sp>
+      <p:sp>
+        <p:nvSpPr>
+          <p:cNvPr id="16" name="Shape 10"/>
+          <p:cNvSpPr/>
+          <p:nvPr/>
+        </p:nvSpPr>
+        <p:spPr>
+          <a:xfrm>
+            <a:off x="1601686" y="4206240"/>
+            <a:ext cx="804672" cy="804672"/>
+          </a:xfrm>
+          <a:prstGeom prst="ellipse">
+            <a:avLst/>
+          </a:prstGeom>
+          <a:solidFill>
+            <a:srgbClr val="FFFFFF"/>
+          </a:solidFill>
+          <a:ln w="15875">
+            <a:solidFill>
+              <a:srgbClr val="C81E1E"/>
+            </a:solidFill>
+            <a:prstDash val="solid"/>
+          </a:ln>
+        </p:spPr>
+      </p:sp>
+      <p:pic>
+        <p:nvPicPr>
+          <p:cNvPr id="17" name="Image 4" descr="icons/home-1A1A1A.png">    </p:cNvPr>
+          <p:cNvPicPr>
+            <a:picLocks noChangeAspect="1"/>
+          </p:cNvPicPr>
+          <p:nvPr/>
+        </p:nvPicPr>
+        <p:blipFill>
+          <a:blip r:embed="rId5"/>
+          <a:stretch>
+            <a:fillRect/>
+          </a:stretch>
+        </p:blipFill>
+        <p:spPr>
+          <a:xfrm>
+            <a:off x="1802854" y="4407408"/>
+            <a:ext cx="402336" cy="402336"/>
+          </a:xfrm>
+          <a:prstGeom prst="rect">
+            <a:avLst/>
+          </a:prstGeom>
+        </p:spPr>
+      </p:pic>
+      <p:sp>
+        <p:nvSpPr>
+          <p:cNvPr id="18" name="Text 11"/>
+          <p:cNvSpPr/>
+          <p:nvPr/>
+        </p:nvSpPr>
+        <p:spPr>
+          <a:xfrm>
+            <a:off x="640080" y="5120640"/>
+            <a:ext cx="2727884" cy="365760"/>
+          </a:xfrm>
+          <a:prstGeom prst="rect">
+            <a:avLst/>
+          </a:prstGeom>
+          <a:noFill/>
+          <a:ln/>
+        </p:spPr>
+        <p:txBody>
+          <a:bodyPr wrap="square" rtlCol="0" anchor="ctr"/>
+          <a:lstStyle/>
+          <a:p>
+            <a:pPr algn="ctr" indent="0" marL="0">
+              <a:buNone/>
+            </a:pPr>
+            <a:r>
+              <a:rPr lang="en-US" sz="1250" b="1" dirty="0">
+                <a:solidFill>
+                  <a:srgbClr val="1A1A1A"/>
+                </a:solidFill>
+                <a:latin typeface="Calibri" pitchFamily="34" charset="0"/>
+                <a:ea typeface="Calibri" pitchFamily="34" charset="-122"/>
+                <a:cs typeface="Calibri" pitchFamily="34" charset="-120"/>
+              </a:rPr>
+              <a:t>Serviços</a:t>
+            </a:r>
+            <a:endParaRPr lang="en-US" sz="1250" dirty="0"/>
+          </a:p>
+        </p:txBody>
+      </p:sp>
+      <p:sp>
+        <p:nvSpPr>
+          <p:cNvPr id="19" name="Shape 12"/>
+          <p:cNvSpPr/>
+          <p:nvPr/>
+        </p:nvSpPr>
+        <p:spPr>
+          <a:xfrm>
+            <a:off x="4329570" y="4206240"/>
+            <a:ext cx="804672" cy="804672"/>
+          </a:xfrm>
+          <a:prstGeom prst="ellipse">
+            <a:avLst/>
+          </a:prstGeom>
+          <a:solidFill>
+            <a:srgbClr val="FFFFFF"/>
+          </a:solidFill>
+          <a:ln w="15875">
+            <a:solidFill>
+              <a:srgbClr val="C81E1E"/>
+            </a:solidFill>
+            <a:prstDash val="solid"/>
+          </a:ln>
+        </p:spPr>
+      </p:sp>
+      <p:pic>
+        <p:nvPicPr>
+          <p:cNvPr id="20" name="Image 5" descr="icons/shield-1A1A1A.png">    </p:cNvPr>
+          <p:cNvPicPr>
+            <a:picLocks noChangeAspect="1"/>
+          </p:cNvPicPr>
+          <p:nvPr/>
+        </p:nvPicPr>
+        <p:blipFill>
+          <a:blip r:embed="rId6"/>
+          <a:stretch>
+            <a:fillRect/>
+          </a:stretch>
+        </p:blipFill>
+        <p:spPr>
+          <a:xfrm>
+            <a:off x="4530738" y="4407408"/>
+            <a:ext cx="402336" cy="402336"/>
+          </a:xfrm>
+          <a:prstGeom prst="rect">
+            <a:avLst/>
+          </a:prstGeom>
+        </p:spPr>
+      </p:pic>
+      <p:sp>
+        <p:nvSpPr>
+          <p:cNvPr id="21" name="Text 13"/>
+          <p:cNvSpPr/>
+          <p:nvPr/>
+        </p:nvSpPr>
+        <p:spPr>
+          <a:xfrm>
+            <a:off x="3367964" y="5120640"/>
+            <a:ext cx="2727884" cy="365760"/>
+          </a:xfrm>
+          <a:prstGeom prst="rect">
+            <a:avLst/>
+          </a:prstGeom>
+          <a:noFill/>
+          <a:ln/>
+        </p:spPr>
+        <p:txBody>
+          <a:bodyPr wrap="square" rtlCol="0" anchor="ctr"/>
+          <a:lstStyle/>
+          <a:p>
+            <a:pPr algn="ctr" indent="0" marL="0">
+              <a:buNone/>
+            </a:pPr>
+            <a:r>
+              <a:rPr lang="en-US" sz="1250" b="1" dirty="0">
+                <a:solidFill>
+                  <a:srgbClr val="1A1A1A"/>
+                </a:solidFill>
+                <a:latin typeface="Calibri" pitchFamily="34" charset="0"/>
+                <a:ea typeface="Calibri" pitchFamily="34" charset="-122"/>
+                <a:cs typeface="Calibri" pitchFamily="34" charset="-120"/>
+              </a:rPr>
+              <a:t>Segurança</a:t>
+            </a:r>
+            <a:endParaRPr lang="en-US" sz="1250" dirty="0"/>
+          </a:p>
+        </p:txBody>
+      </p:sp>
+      <p:sp>
+        <p:nvSpPr>
+          <p:cNvPr id="22" name="Shape 14"/>
+          <p:cNvSpPr/>
+          <p:nvPr/>
+        </p:nvSpPr>
+        <p:spPr>
+          <a:xfrm>
+            <a:off x="7057454" y="4206240"/>
+            <a:ext cx="804672" cy="804672"/>
+          </a:xfrm>
+          <a:prstGeom prst="ellipse">
+            <a:avLst/>
+          </a:prstGeom>
+          <a:solidFill>
+            <a:srgbClr val="FFFFFF"/>
+          </a:solidFill>
+          <a:ln w="15875">
+            <a:solidFill>
+              <a:srgbClr val="C81E1E"/>
+            </a:solidFill>
+            <a:prstDash val="solid"/>
+          </a:ln>
+        </p:spPr>
+      </p:sp>
+      <p:pic>
+        <p:nvPicPr>
+          <p:cNvPr id="23" name="Image 6" descr="icons/trend-1A1A1A.png">    </p:cNvPr>
+          <p:cNvPicPr>
+            <a:picLocks noChangeAspect="1"/>
+          </p:cNvPicPr>
+          <p:nvPr/>
+        </p:nvPicPr>
+        <p:blipFill>
+          <a:blip r:embed="rId7"/>
+          <a:stretch>
+            <a:fillRect/>
+          </a:stretch>
+        </p:blipFill>
+        <p:spPr>
+          <a:xfrm>
+            <a:off x="7258622" y="4407408"/>
+            <a:ext cx="402336" cy="402336"/>
+          </a:xfrm>
+          <a:prstGeom prst="rect">
+            <a:avLst/>
+          </a:prstGeom>
+        </p:spPr>
+      </p:pic>
+      <p:sp>
+        <p:nvSpPr>
+          <p:cNvPr id="24" name="Text 15"/>
+          <p:cNvSpPr/>
+          <p:nvPr/>
+        </p:nvSpPr>
+        <p:spPr>
+          <a:xfrm>
+            <a:off x="6095848" y="5120640"/>
+            <a:ext cx="2727884" cy="365760"/>
+          </a:xfrm>
+          <a:prstGeom prst="rect">
+            <a:avLst/>
+          </a:prstGeom>
+          <a:noFill/>
+          <a:ln/>
+        </p:spPr>
+        <p:txBody>
+          <a:bodyPr wrap="square" rtlCol="0" anchor="ctr"/>
+          <a:lstStyle/>
+          <a:p>
+            <a:pPr algn="ctr" indent="0" marL="0">
+              <a:buNone/>
+            </a:pPr>
+            <a:r>
+              <a:rPr lang="en-US" sz="1250" b="1" dirty="0">
+                <a:solidFill>
+                  <a:srgbClr val="1A1A1A"/>
+                </a:solidFill>
+                <a:latin typeface="Calibri" pitchFamily="34" charset="0"/>
+                <a:ea typeface="Calibri" pitchFamily="34" charset="-122"/>
+                <a:cs typeface="Calibri" pitchFamily="34" charset="-120"/>
+              </a:rPr>
+              <a:t>Economia local</a:t>
+            </a:r>
+            <a:endParaRPr lang="en-US" sz="1250" dirty="0"/>
+          </a:p>
+        </p:txBody>
+      </p:sp>
+      <p:sp>
+        <p:nvSpPr>
+          <p:cNvPr id="25" name="Shape 16"/>
+          <p:cNvSpPr/>
+          <p:nvPr/>
+        </p:nvSpPr>
+        <p:spPr>
+          <a:xfrm>
+            <a:off x="9785337" y="4206240"/>
+            <a:ext cx="804672" cy="804672"/>
+          </a:xfrm>
+          <a:prstGeom prst="ellipse">
+            <a:avLst/>
+          </a:prstGeom>
+          <a:solidFill>
+            <a:srgbClr val="FFFFFF"/>
+          </a:solidFill>
+          <a:ln w="15875">
+            <a:solidFill>
+              <a:srgbClr val="C81E1E"/>
+            </a:solidFill>
+            <a:prstDash val="solid"/>
+          </a:ln>
+        </p:spPr>
+      </p:sp>
+      <p:pic>
+        <p:nvPicPr>
+          <p:cNvPr id="26" name="Image 7" descr="icons/compass-1A1A1A.png">    </p:cNvPr>
+          <p:cNvPicPr>
+            <a:picLocks noChangeAspect="1"/>
+          </p:cNvPicPr>
+          <p:nvPr/>
+        </p:nvPicPr>
+        <p:blipFill>
+          <a:blip r:embed="rId8"/>
+          <a:stretch>
+            <a:fillRect/>
+          </a:stretch>
+        </p:blipFill>
+        <p:spPr>
+          <a:xfrm>
+            <a:off x="9986505" y="4407408"/>
+            <a:ext cx="402336" cy="402336"/>
+          </a:xfrm>
+          <a:prstGeom prst="rect">
+            <a:avLst/>
+          </a:prstGeom>
+        </p:spPr>
+      </p:pic>
+      <p:sp>
+        <p:nvSpPr>
+          <p:cNvPr id="27" name="Text 17"/>
+          <p:cNvSpPr/>
+          <p:nvPr/>
+        </p:nvSpPr>
+        <p:spPr>
+          <a:xfrm>
+            <a:off x="8823731" y="5120640"/>
+            <a:ext cx="2727884" cy="365760"/>
+          </a:xfrm>
+          <a:prstGeom prst="rect">
+            <a:avLst/>
+          </a:prstGeom>
+          <a:noFill/>
+          <a:ln/>
+        </p:spPr>
+        <p:txBody>
+          <a:bodyPr wrap="square" rtlCol="0" anchor="ctr"/>
+          <a:lstStyle/>
+          <a:p>
+            <a:pPr algn="ctr" indent="0" marL="0">
+              <a:buNone/>
+            </a:pPr>
+            <a:r>
+              <a:rPr lang="en-US" sz="1250" b="1" dirty="0">
+                <a:solidFill>
+                  <a:srgbClr val="1A1A1A"/>
+                </a:solidFill>
+                <a:latin typeface="Calibri" pitchFamily="34" charset="0"/>
+                <a:ea typeface="Calibri" pitchFamily="34" charset="-122"/>
+                <a:cs typeface="Calibri" pitchFamily="34" charset="-120"/>
+              </a:rPr>
+              <a:t>Integração regional</a:t>
+            </a:r>
+            <a:endParaRPr lang="en-US" sz="1250" dirty="0"/>
+          </a:p>
+        </p:txBody>
+      </p:sp>
+      <p:sp>
+        <p:nvSpPr>
+          <p:cNvPr id="29" name="Text 18"/>
+          <p:cNvSpPr/>
+          <p:nvPr/>
+        </p:nvSpPr>
+        <p:spPr>
+          <a:xfrm>
+            <a:off x="11185855" y="6355080"/>
+            <a:ext cx="640080" cy="320040"/>
+          </a:xfrm>
+          <a:prstGeom prst="rect">
+            <a:avLst/>
+          </a:prstGeom>
+          <a:noFill/>
+          <a:ln/>
+        </p:spPr>
+        <p:txBody>
+          <a:bodyPr wrap="square" rtlCol="0" anchor="ctr"/>
+          <a:lstStyle/>
+          <a:p>
+            <a:pPr algn="r" indent="0" marL="0">
+              <a:buNone/>
+            </a:pPr>
+            <a:r>
+              <a:rPr lang="en-US" sz="1000" dirty="0">
+                <a:solidFill>
+                  <a:srgbClr val="8A8A82"/>
+                </a:solidFill>
+                <a:latin typeface="Calibri" pitchFamily="34" charset="0"/>
+                <a:ea typeface="Calibri" pitchFamily="34" charset="-122"/>
+                <a:cs typeface="Calibri" pitchFamily="34" charset="-120"/>
+              </a:rPr>
+              <a:t>03</a:t>
+            </a:r>
+            <a:endParaRPr lang="en-US" sz="1000" dirty="0"/>
+          </a:p>
+        </p:txBody>
+      </p:sp>
+    </p:spTree>
+  </p:cSld>
+  <p:clrMapOvr>
+    <a:masterClrMapping/>
+  </p:clrMapOvr>
+</p:sld>
+</file>
+
+<file path=ppt/slides/slide6.xml><?xml version="1.0" encoding="utf-8"?>
+<p:sld xmlns:a="http://schemas.openxmlformats.org/drawingml/2006/main" xmlns:r="http://schemas.openxmlformats.org/officeDocument/2006/relationships" xmlns:p="http://schemas.openxmlformats.org/presentationml/2006/main">
+  <p:cSld name="Slide 6">
     <p:bg>
       <p:bgPr>
         <a:solidFill>
@@ -5162,7 +5682,7 @@
       </p:grpSpPr>
       <p:pic>
         <p:nvPicPr>
-          <p:cNvPr id="2" name="Image 0" descr="visuals-real/reveal.jpg">    </p:cNvPr>
+          <p:cNvPr id="2" name="Image 0" descr="visuals-real/render-01.jpg">    </p:cNvPr>
           <p:cNvPicPr>
             <a:picLocks noChangeAspect="1"/>
           </p:cNvPicPr>
@@ -5191,15 +5711,15 @@
         </p:nvSpPr>
         <p:spPr>
           <a:xfrm>
-            <a:off x="0" y="5029200"/>
-            <a:ext cx="12191695" cy="1828800"/>
+            <a:off x="0" y="5897880"/>
+            <a:ext cx="12191695" cy="960120"/>
           </a:xfrm>
           <a:prstGeom prst="rect">
             <a:avLst/>
           </a:prstGeom>
           <a:solidFill>
             <a:srgbClr val="0C0C0B">
-              <a:alpha val="65000"/>
+              <a:alpha val="75000"/>
             </a:srgbClr>
           </a:solidFill>
           <a:ln/>
@@ -5213,8 +5733,8 @@
         </p:nvSpPr>
         <p:spPr>
           <a:xfrm>
-            <a:off x="0" y="5440680"/>
-            <a:ext cx="12191695" cy="1005840"/>
+            <a:off x="548640" y="5989320"/>
+            <a:ext cx="5486400" cy="320040"/>
           </a:xfrm>
           <a:prstGeom prst="rect">
             <a:avLst/>
@@ -5226,11 +5746,50 @@
           <a:bodyPr wrap="square" rtlCol="0" anchor="ctr"/>
           <a:lstStyle/>
           <a:p>
-            <a:pPr algn="ctr" indent="0" marL="0">
-              <a:buNone/>
-            </a:pPr>
-            <a:r>
-              <a:rPr lang="en-US" sz="3400" spc="200" kern="0" dirty="0">
+            <a:pPr indent="0" marL="0">
+              <a:buNone/>
+            </a:pPr>
+            <a:r>
+              <a:rPr lang="en-US" sz="1100" spc="400" kern="0" dirty="0">
+                <a:solidFill>
+                  <a:srgbClr val="C81E1E"/>
+                </a:solidFill>
+                <a:latin typeface="Calibri" pitchFamily="34" charset="0"/>
+                <a:ea typeface="Calibri" pitchFamily="34" charset="-122"/>
+                <a:cs typeface="Calibri" pitchFamily="34" charset="-120"/>
+              </a:rPr>
+              <a:t>RENDER 01</a:t>
+            </a:r>
+            <a:endParaRPr lang="en-US" sz="1100" dirty="0"/>
+          </a:p>
+        </p:txBody>
+      </p:sp>
+      <p:sp>
+        <p:nvSpPr>
+          <p:cNvPr id="5" name="Text 2"/>
+          <p:cNvSpPr/>
+          <p:nvPr/>
+        </p:nvSpPr>
+        <p:spPr>
+          <a:xfrm>
+            <a:off x="548640" y="6291072"/>
+            <a:ext cx="11094415" cy="411480"/>
+          </a:xfrm>
+          <a:prstGeom prst="rect">
+            <a:avLst/>
+          </a:prstGeom>
+          <a:noFill/>
+          <a:ln/>
+        </p:spPr>
+        <p:txBody>
+          <a:bodyPr wrap="square" rtlCol="0" anchor="ctr"/>
+          <a:lstStyle/>
+          <a:p>
+            <a:pPr indent="0" marL="0">
+              <a:buNone/>
+            </a:pPr>
+            <a:r>
+              <a:rPr lang="en-US" sz="1700" dirty="0">
                 <a:solidFill>
                   <a:srgbClr val="FFFFFF"/>
                 </a:solidFill>
@@ -5238,862 +5797,9 @@
                 <a:ea typeface="Cambria" pitchFamily="34" charset="-122"/>
                 <a:cs typeface="Cambria" pitchFamily="34" charset="-120"/>
               </a:rPr>
-              <a:t>CENTRO DE SERVIÇOS GIRASSOL</a:t>
-            </a:r>
-            <a:endParaRPr lang="en-US" sz="3400" dirty="0"/>
-          </a:p>
-        </p:txBody>
-      </p:sp>
-    </p:spTree>
-  </p:cSld>
-  <p:clrMapOvr>
-    <a:masterClrMapping/>
-  </p:clrMapOvr>
-</p:sld>
-</file>
-
-<file path=ppt/slides/slide6.xml><?xml version="1.0" encoding="utf-8"?>
-<p:sld xmlns:a="http://schemas.openxmlformats.org/drawingml/2006/main" xmlns:r="http://schemas.openxmlformats.org/officeDocument/2006/relationships" xmlns:p="http://schemas.openxmlformats.org/presentationml/2006/main">
-  <p:cSld name="Slide 6">
-    <p:bg>
-      <p:bgPr>
-        <a:solidFill>
-          <a:srgbClr val="F4F1EA"/>
-        </a:solidFill>
-      </p:bgPr>
-    </p:bg>
-    <p:spTree>
-      <p:nvGrpSpPr>
-        <p:cNvPr id="1" name=""/>
-        <p:cNvGrpSpPr/>
-        <p:nvPr/>
-      </p:nvGrpSpPr>
-      <p:grpSpPr>
-        <a:xfrm>
-          <a:off x="0" y="0"/>
-          <a:ext cx="0" cy="0"/>
-          <a:chOff x="0" y="0"/>
-          <a:chExt cx="0" cy="0"/>
-        </a:xfrm>
-      </p:grpSpPr>
-      <p:sp>
-        <p:nvSpPr>
-          <p:cNvPr id="2" name="Text 0"/>
-          <p:cNvSpPr/>
-          <p:nvPr/>
-        </p:nvSpPr>
-        <p:spPr>
-          <a:xfrm>
-            <a:off x="914400" y="594360"/>
-            <a:ext cx="10362895" cy="731520"/>
-          </a:xfrm>
-          <a:prstGeom prst="rect">
-            <a:avLst/>
-          </a:prstGeom>
-          <a:noFill/>
-          <a:ln/>
-        </p:spPr>
-        <p:txBody>
-          <a:bodyPr wrap="square" rtlCol="0" anchor="ctr"/>
-          <a:lstStyle/>
-          <a:p>
-            <a:pPr algn="ctr" indent="0" marL="0">
-              <a:buNone/>
-            </a:pPr>
-            <a:r>
-              <a:rPr lang="en-US" sz="2800" dirty="0">
-                <a:solidFill>
-                  <a:srgbClr val="1A1A1A"/>
-                </a:solidFill>
-                <a:latin typeface="Cambria" pitchFamily="34" charset="0"/>
-                <a:ea typeface="Cambria" pitchFamily="34" charset="-122"/>
-                <a:cs typeface="Cambria" pitchFamily="34" charset="-120"/>
-              </a:rPr>
-              <a:t>Não é um posto de combustíveis.</a:t>
-            </a:r>
-            <a:endParaRPr lang="en-US" sz="2800" dirty="0"/>
-          </a:p>
-        </p:txBody>
-      </p:sp>
-      <p:sp>
-        <p:nvSpPr>
-          <p:cNvPr id="3" name="Text 1"/>
-          <p:cNvSpPr/>
-          <p:nvPr/>
-        </p:nvSpPr>
-        <p:spPr>
-          <a:xfrm>
-            <a:off x="1371600" y="1325880"/>
-            <a:ext cx="9448495" cy="548640"/>
-          </a:xfrm>
-          <a:prstGeom prst="rect">
-            <a:avLst/>
-          </a:prstGeom>
-          <a:noFill/>
-          <a:ln/>
-        </p:spPr>
-        <p:txBody>
-          <a:bodyPr wrap="square" rtlCol="0" anchor="ctr"/>
-          <a:lstStyle/>
-          <a:p>
-            <a:pPr algn="ctr" indent="0" marL="0">
-              <a:buNone/>
-            </a:pPr>
-            <a:r>
-              <a:rPr lang="en-US" sz="1500" i="1" dirty="0">
-                <a:solidFill>
-                  <a:srgbClr val="C81E1E"/>
-                </a:solidFill>
-                <a:latin typeface="Calibri" pitchFamily="34" charset="0"/>
-                <a:ea typeface="Calibri" pitchFamily="34" charset="-122"/>
-                <a:cs typeface="Calibri" pitchFamily="34" charset="-120"/>
-              </a:rPr>
-              <a:t>É um equipamento urbano de apoio à mobilidade regional.</a:t>
-            </a:r>
-            <a:endParaRPr lang="en-US" sz="1500" dirty="0"/>
-          </a:p>
-        </p:txBody>
-      </p:sp>
-      <p:sp>
-        <p:nvSpPr>
-          <p:cNvPr id="4" name="Shape 2"/>
-          <p:cNvSpPr/>
-          <p:nvPr/>
-        </p:nvSpPr>
-        <p:spPr>
-          <a:xfrm>
-            <a:off x="1601686" y="2331720"/>
-            <a:ext cx="804672" cy="804672"/>
-          </a:xfrm>
-          <a:prstGeom prst="ellipse">
-            <a:avLst/>
-          </a:prstGeom>
-          <a:solidFill>
-            <a:srgbClr val="FFFFFF"/>
-          </a:solidFill>
-          <a:ln w="15875">
-            <a:solidFill>
-              <a:srgbClr val="C81E1E"/>
-            </a:solidFill>
-            <a:prstDash val="solid"/>
-          </a:ln>
-        </p:spPr>
-      </p:sp>
-      <p:pic>
-        <p:nvPicPr>
-          <p:cNvPr id="5" name="Image 0" descr="icons/truck-1A1A1A.png">    </p:cNvPr>
-          <p:cNvPicPr>
-            <a:picLocks noChangeAspect="1"/>
-          </p:cNvPicPr>
-          <p:nvPr/>
-        </p:nvPicPr>
-        <p:blipFill>
-          <a:blip r:embed="rId1"/>
-          <a:stretch>
-            <a:fillRect/>
-          </a:stretch>
-        </p:blipFill>
-        <p:spPr>
-          <a:xfrm>
-            <a:off x="1802854" y="2532888"/>
-            <a:ext cx="402336" cy="402336"/>
-          </a:xfrm>
-          <a:prstGeom prst="rect">
-            <a:avLst/>
-          </a:prstGeom>
-        </p:spPr>
-      </p:pic>
-      <p:sp>
-        <p:nvSpPr>
-          <p:cNvPr id="6" name="Text 3"/>
-          <p:cNvSpPr/>
-          <p:nvPr/>
-        </p:nvSpPr>
-        <p:spPr>
-          <a:xfrm>
-            <a:off x="640080" y="3246120"/>
-            <a:ext cx="2727884" cy="365760"/>
-          </a:xfrm>
-          <a:prstGeom prst="rect">
-            <a:avLst/>
-          </a:prstGeom>
-          <a:noFill/>
-          <a:ln/>
-        </p:spPr>
-        <p:txBody>
-          <a:bodyPr wrap="square" rtlCol="0" anchor="ctr"/>
-          <a:lstStyle/>
-          <a:p>
-            <a:pPr algn="ctr" indent="0" marL="0">
-              <a:buNone/>
-            </a:pPr>
-            <a:r>
-              <a:rPr lang="en-US" sz="1250" b="1" dirty="0">
-                <a:solidFill>
-                  <a:srgbClr val="1A1A1A"/>
-                </a:solidFill>
-                <a:latin typeface="Calibri" pitchFamily="34" charset="0"/>
-                <a:ea typeface="Calibri" pitchFamily="34" charset="-122"/>
-                <a:cs typeface="Calibri" pitchFamily="34" charset="-120"/>
-              </a:rPr>
-              <a:t>Transportadores</a:t>
-            </a:r>
-            <a:endParaRPr lang="en-US" sz="1250" dirty="0"/>
-          </a:p>
-        </p:txBody>
-      </p:sp>
-      <p:sp>
-        <p:nvSpPr>
-          <p:cNvPr id="7" name="Shape 4"/>
-          <p:cNvSpPr/>
-          <p:nvPr/>
-        </p:nvSpPr>
-        <p:spPr>
-          <a:xfrm>
-            <a:off x="4329570" y="2331720"/>
-            <a:ext cx="804672" cy="804672"/>
-          </a:xfrm>
-          <a:prstGeom prst="ellipse">
-            <a:avLst/>
-          </a:prstGeom>
-          <a:solidFill>
-            <a:srgbClr val="FFFFFF"/>
-          </a:solidFill>
-          <a:ln w="15875">
-            <a:solidFill>
-              <a:srgbClr val="C81E1E"/>
-            </a:solidFill>
-            <a:prstDash val="solid"/>
-          </a:ln>
-        </p:spPr>
-      </p:sp>
-      <p:pic>
-        <p:nvPicPr>
-          <p:cNvPr id="8" name="Image 1" descr="icons/wheat-1A1A1A.png">    </p:cNvPr>
-          <p:cNvPicPr>
-            <a:picLocks noChangeAspect="1"/>
-          </p:cNvPicPr>
-          <p:nvPr/>
-        </p:nvPicPr>
-        <p:blipFill>
-          <a:blip r:embed="rId2"/>
-          <a:stretch>
-            <a:fillRect/>
-          </a:stretch>
-        </p:blipFill>
-        <p:spPr>
-          <a:xfrm>
-            <a:off x="4530738" y="2532888"/>
-            <a:ext cx="402336" cy="402336"/>
-          </a:xfrm>
-          <a:prstGeom prst="rect">
-            <a:avLst/>
-          </a:prstGeom>
-        </p:spPr>
-      </p:pic>
-      <p:sp>
-        <p:nvSpPr>
-          <p:cNvPr id="9" name="Text 5"/>
-          <p:cNvSpPr/>
-          <p:nvPr/>
-        </p:nvSpPr>
-        <p:spPr>
-          <a:xfrm>
-            <a:off x="3367964" y="3246120"/>
-            <a:ext cx="2727884" cy="365760"/>
-          </a:xfrm>
-          <a:prstGeom prst="rect">
-            <a:avLst/>
-          </a:prstGeom>
-          <a:noFill/>
-          <a:ln/>
-        </p:spPr>
-        <p:txBody>
-          <a:bodyPr wrap="square" rtlCol="0" anchor="ctr"/>
-          <a:lstStyle/>
-          <a:p>
-            <a:pPr algn="ctr" indent="0" marL="0">
-              <a:buNone/>
-            </a:pPr>
-            <a:r>
-              <a:rPr lang="en-US" sz="1250" b="1" dirty="0">
-                <a:solidFill>
-                  <a:srgbClr val="1A1A1A"/>
-                </a:solidFill>
-                <a:latin typeface="Calibri" pitchFamily="34" charset="0"/>
-                <a:ea typeface="Calibri" pitchFamily="34" charset="-122"/>
-                <a:cs typeface="Calibri" pitchFamily="34" charset="-120"/>
-              </a:rPr>
-              <a:t>Agronegócio</a:t>
-            </a:r>
-            <a:endParaRPr lang="en-US" sz="1250" dirty="0"/>
-          </a:p>
-        </p:txBody>
-      </p:sp>
-      <p:sp>
-        <p:nvSpPr>
-          <p:cNvPr id="10" name="Shape 6"/>
-          <p:cNvSpPr/>
-          <p:nvPr/>
-        </p:nvSpPr>
-        <p:spPr>
-          <a:xfrm>
-            <a:off x="7057454" y="2331720"/>
-            <a:ext cx="804672" cy="804672"/>
-          </a:xfrm>
-          <a:prstGeom prst="ellipse">
-            <a:avLst/>
-          </a:prstGeom>
-          <a:solidFill>
-            <a:srgbClr val="FFFFFF"/>
-          </a:solidFill>
-          <a:ln w="15875">
-            <a:solidFill>
-              <a:srgbClr val="C81E1E"/>
-            </a:solidFill>
-            <a:prstDash val="solid"/>
-          </a:ln>
-        </p:spPr>
-      </p:sp>
-      <p:pic>
-        <p:nvPicPr>
-          <p:cNvPr id="11" name="Image 2" descr="icons/users-1A1A1A.png">    </p:cNvPr>
-          <p:cNvPicPr>
-            <a:picLocks noChangeAspect="1"/>
-          </p:cNvPicPr>
-          <p:nvPr/>
-        </p:nvPicPr>
-        <p:blipFill>
-          <a:blip r:embed="rId3"/>
-          <a:stretch>
-            <a:fillRect/>
-          </a:stretch>
-        </p:blipFill>
-        <p:spPr>
-          <a:xfrm>
-            <a:off x="7258622" y="2532888"/>
-            <a:ext cx="402336" cy="402336"/>
-          </a:xfrm>
-          <a:prstGeom prst="rect">
-            <a:avLst/>
-          </a:prstGeom>
-        </p:spPr>
-      </p:pic>
-      <p:sp>
-        <p:nvSpPr>
-          <p:cNvPr id="12" name="Text 7"/>
-          <p:cNvSpPr/>
-          <p:nvPr/>
-        </p:nvSpPr>
-        <p:spPr>
-          <a:xfrm>
-            <a:off x="6095848" y="3246120"/>
-            <a:ext cx="2727884" cy="365760"/>
-          </a:xfrm>
-          <a:prstGeom prst="rect">
-            <a:avLst/>
-          </a:prstGeom>
-          <a:noFill/>
-          <a:ln/>
-        </p:spPr>
-        <p:txBody>
-          <a:bodyPr wrap="square" rtlCol="0" anchor="ctr"/>
-          <a:lstStyle/>
-          <a:p>
-            <a:pPr algn="ctr" indent="0" marL="0">
-              <a:buNone/>
-            </a:pPr>
-            <a:r>
-              <a:rPr lang="en-US" sz="1250" b="1" dirty="0">
-                <a:solidFill>
-                  <a:srgbClr val="1A1A1A"/>
-                </a:solidFill>
-                <a:latin typeface="Calibri" pitchFamily="34" charset="0"/>
-                <a:ea typeface="Calibri" pitchFamily="34" charset="-122"/>
-                <a:cs typeface="Calibri" pitchFamily="34" charset="-120"/>
-              </a:rPr>
-              <a:t>Famílias</a:t>
-            </a:r>
-            <a:endParaRPr lang="en-US" sz="1250" dirty="0"/>
-          </a:p>
-        </p:txBody>
-      </p:sp>
-      <p:sp>
-        <p:nvSpPr>
-          <p:cNvPr id="13" name="Shape 8"/>
-          <p:cNvSpPr/>
-          <p:nvPr/>
-        </p:nvSpPr>
-        <p:spPr>
-          <a:xfrm>
-            <a:off x="9785337" y="2331720"/>
-            <a:ext cx="804672" cy="804672"/>
-          </a:xfrm>
-          <a:prstGeom prst="ellipse">
-            <a:avLst/>
-          </a:prstGeom>
-          <a:solidFill>
-            <a:srgbClr val="FFFFFF"/>
-          </a:solidFill>
-          <a:ln w="15875">
-            <a:solidFill>
-              <a:srgbClr val="C81E1E"/>
-            </a:solidFill>
-            <a:prstDash val="solid"/>
-          </a:ln>
-        </p:spPr>
-      </p:sp>
-      <p:pic>
-        <p:nvPicPr>
-          <p:cNvPr id="14" name="Image 3" descr="icons/layers-1A1A1A.png">    </p:cNvPr>
-          <p:cNvPicPr>
-            <a:picLocks noChangeAspect="1"/>
-          </p:cNvPicPr>
-          <p:nvPr/>
-        </p:nvPicPr>
-        <p:blipFill>
-          <a:blip r:embed="rId4"/>
-          <a:stretch>
-            <a:fillRect/>
-          </a:stretch>
-        </p:blipFill>
-        <p:spPr>
-          <a:xfrm>
-            <a:off x="9986505" y="2532888"/>
-            <a:ext cx="402336" cy="402336"/>
-          </a:xfrm>
-          <a:prstGeom prst="rect">
-            <a:avLst/>
-          </a:prstGeom>
-        </p:spPr>
-      </p:pic>
-      <p:sp>
-        <p:nvSpPr>
-          <p:cNvPr id="15" name="Text 9"/>
-          <p:cNvSpPr/>
-          <p:nvPr/>
-        </p:nvSpPr>
-        <p:spPr>
-          <a:xfrm>
-            <a:off x="8823731" y="3246120"/>
-            <a:ext cx="2727884" cy="365760"/>
-          </a:xfrm>
-          <a:prstGeom prst="rect">
-            <a:avLst/>
-          </a:prstGeom>
-          <a:noFill/>
-          <a:ln/>
-        </p:spPr>
-        <p:txBody>
-          <a:bodyPr wrap="square" rtlCol="0" anchor="ctr"/>
-          <a:lstStyle/>
-          <a:p>
-            <a:pPr algn="ctr" indent="0" marL="0">
-              <a:buNone/>
-            </a:pPr>
-            <a:r>
-              <a:rPr lang="en-US" sz="1250" b="1" dirty="0">
-                <a:solidFill>
-                  <a:srgbClr val="1A1A1A"/>
-                </a:solidFill>
-                <a:latin typeface="Calibri" pitchFamily="34" charset="0"/>
-                <a:ea typeface="Calibri" pitchFamily="34" charset="-122"/>
-                <a:cs typeface="Calibri" pitchFamily="34" charset="-120"/>
-              </a:rPr>
-              <a:t>Logística</a:t>
-            </a:r>
-            <a:endParaRPr lang="en-US" sz="1250" dirty="0"/>
-          </a:p>
-        </p:txBody>
-      </p:sp>
-      <p:sp>
-        <p:nvSpPr>
-          <p:cNvPr id="16" name="Shape 10"/>
-          <p:cNvSpPr/>
-          <p:nvPr/>
-        </p:nvSpPr>
-        <p:spPr>
-          <a:xfrm>
-            <a:off x="1601686" y="4206240"/>
-            <a:ext cx="804672" cy="804672"/>
-          </a:xfrm>
-          <a:prstGeom prst="ellipse">
-            <a:avLst/>
-          </a:prstGeom>
-          <a:solidFill>
-            <a:srgbClr val="FFFFFF"/>
-          </a:solidFill>
-          <a:ln w="15875">
-            <a:solidFill>
-              <a:srgbClr val="C81E1E"/>
-            </a:solidFill>
-            <a:prstDash val="solid"/>
-          </a:ln>
-        </p:spPr>
-      </p:sp>
-      <p:pic>
-        <p:nvPicPr>
-          <p:cNvPr id="17" name="Image 4" descr="icons/home-1A1A1A.png">    </p:cNvPr>
-          <p:cNvPicPr>
-            <a:picLocks noChangeAspect="1"/>
-          </p:cNvPicPr>
-          <p:nvPr/>
-        </p:nvPicPr>
-        <p:blipFill>
-          <a:blip r:embed="rId5"/>
-          <a:stretch>
-            <a:fillRect/>
-          </a:stretch>
-        </p:blipFill>
-        <p:spPr>
-          <a:xfrm>
-            <a:off x="1802854" y="4407408"/>
-            <a:ext cx="402336" cy="402336"/>
-          </a:xfrm>
-          <a:prstGeom prst="rect">
-            <a:avLst/>
-          </a:prstGeom>
-        </p:spPr>
-      </p:pic>
-      <p:sp>
-        <p:nvSpPr>
-          <p:cNvPr id="18" name="Text 11"/>
-          <p:cNvSpPr/>
-          <p:nvPr/>
-        </p:nvSpPr>
-        <p:spPr>
-          <a:xfrm>
-            <a:off x="640080" y="5120640"/>
-            <a:ext cx="2727884" cy="365760"/>
-          </a:xfrm>
-          <a:prstGeom prst="rect">
-            <a:avLst/>
-          </a:prstGeom>
-          <a:noFill/>
-          <a:ln/>
-        </p:spPr>
-        <p:txBody>
-          <a:bodyPr wrap="square" rtlCol="0" anchor="ctr"/>
-          <a:lstStyle/>
-          <a:p>
-            <a:pPr algn="ctr" indent="0" marL="0">
-              <a:buNone/>
-            </a:pPr>
-            <a:r>
-              <a:rPr lang="en-US" sz="1250" b="1" dirty="0">
-                <a:solidFill>
-                  <a:srgbClr val="1A1A1A"/>
-                </a:solidFill>
-                <a:latin typeface="Calibri" pitchFamily="34" charset="0"/>
-                <a:ea typeface="Calibri" pitchFamily="34" charset="-122"/>
-                <a:cs typeface="Calibri" pitchFamily="34" charset="-120"/>
-              </a:rPr>
-              <a:t>Serviços</a:t>
-            </a:r>
-            <a:endParaRPr lang="en-US" sz="1250" dirty="0"/>
-          </a:p>
-        </p:txBody>
-      </p:sp>
-      <p:sp>
-        <p:nvSpPr>
-          <p:cNvPr id="19" name="Shape 12"/>
-          <p:cNvSpPr/>
-          <p:nvPr/>
-        </p:nvSpPr>
-        <p:spPr>
-          <a:xfrm>
-            <a:off x="4329570" y="4206240"/>
-            <a:ext cx="804672" cy="804672"/>
-          </a:xfrm>
-          <a:prstGeom prst="ellipse">
-            <a:avLst/>
-          </a:prstGeom>
-          <a:solidFill>
-            <a:srgbClr val="FFFFFF"/>
-          </a:solidFill>
-          <a:ln w="15875">
-            <a:solidFill>
-              <a:srgbClr val="C81E1E"/>
-            </a:solidFill>
-            <a:prstDash val="solid"/>
-          </a:ln>
-        </p:spPr>
-      </p:sp>
-      <p:pic>
-        <p:nvPicPr>
-          <p:cNvPr id="20" name="Image 5" descr="icons/shield-1A1A1A.png">    </p:cNvPr>
-          <p:cNvPicPr>
-            <a:picLocks noChangeAspect="1"/>
-          </p:cNvPicPr>
-          <p:nvPr/>
-        </p:nvPicPr>
-        <p:blipFill>
-          <a:blip r:embed="rId6"/>
-          <a:stretch>
-            <a:fillRect/>
-          </a:stretch>
-        </p:blipFill>
-        <p:spPr>
-          <a:xfrm>
-            <a:off x="4530738" y="4407408"/>
-            <a:ext cx="402336" cy="402336"/>
-          </a:xfrm>
-          <a:prstGeom prst="rect">
-            <a:avLst/>
-          </a:prstGeom>
-        </p:spPr>
-      </p:pic>
-      <p:sp>
-        <p:nvSpPr>
-          <p:cNvPr id="21" name="Text 13"/>
-          <p:cNvSpPr/>
-          <p:nvPr/>
-        </p:nvSpPr>
-        <p:spPr>
-          <a:xfrm>
-            <a:off x="3367964" y="5120640"/>
-            <a:ext cx="2727884" cy="365760"/>
-          </a:xfrm>
-          <a:prstGeom prst="rect">
-            <a:avLst/>
-          </a:prstGeom>
-          <a:noFill/>
-          <a:ln/>
-        </p:spPr>
-        <p:txBody>
-          <a:bodyPr wrap="square" rtlCol="0" anchor="ctr"/>
-          <a:lstStyle/>
-          <a:p>
-            <a:pPr algn="ctr" indent="0" marL="0">
-              <a:buNone/>
-            </a:pPr>
-            <a:r>
-              <a:rPr lang="en-US" sz="1250" b="1" dirty="0">
-                <a:solidFill>
-                  <a:srgbClr val="1A1A1A"/>
-                </a:solidFill>
-                <a:latin typeface="Calibri" pitchFamily="34" charset="0"/>
-                <a:ea typeface="Calibri" pitchFamily="34" charset="-122"/>
-                <a:cs typeface="Calibri" pitchFamily="34" charset="-120"/>
-              </a:rPr>
-              <a:t>Segurança</a:t>
-            </a:r>
-            <a:endParaRPr lang="en-US" sz="1250" dirty="0"/>
-          </a:p>
-        </p:txBody>
-      </p:sp>
-      <p:sp>
-        <p:nvSpPr>
-          <p:cNvPr id="22" name="Shape 14"/>
-          <p:cNvSpPr/>
-          <p:nvPr/>
-        </p:nvSpPr>
-        <p:spPr>
-          <a:xfrm>
-            <a:off x="7057454" y="4206240"/>
-            <a:ext cx="804672" cy="804672"/>
-          </a:xfrm>
-          <a:prstGeom prst="ellipse">
-            <a:avLst/>
-          </a:prstGeom>
-          <a:solidFill>
-            <a:srgbClr val="FFFFFF"/>
-          </a:solidFill>
-          <a:ln w="15875">
-            <a:solidFill>
-              <a:srgbClr val="C81E1E"/>
-            </a:solidFill>
-            <a:prstDash val="solid"/>
-          </a:ln>
-        </p:spPr>
-      </p:sp>
-      <p:pic>
-        <p:nvPicPr>
-          <p:cNvPr id="23" name="Image 6" descr="icons/trend-1A1A1A.png">    </p:cNvPr>
-          <p:cNvPicPr>
-            <a:picLocks noChangeAspect="1"/>
-          </p:cNvPicPr>
-          <p:nvPr/>
-        </p:nvPicPr>
-        <p:blipFill>
-          <a:blip r:embed="rId7"/>
-          <a:stretch>
-            <a:fillRect/>
-          </a:stretch>
-        </p:blipFill>
-        <p:spPr>
-          <a:xfrm>
-            <a:off x="7258622" y="4407408"/>
-            <a:ext cx="402336" cy="402336"/>
-          </a:xfrm>
-          <a:prstGeom prst="rect">
-            <a:avLst/>
-          </a:prstGeom>
-        </p:spPr>
-      </p:pic>
-      <p:sp>
-        <p:nvSpPr>
-          <p:cNvPr id="24" name="Text 15"/>
-          <p:cNvSpPr/>
-          <p:nvPr/>
-        </p:nvSpPr>
-        <p:spPr>
-          <a:xfrm>
-            <a:off x="6095848" y="5120640"/>
-            <a:ext cx="2727884" cy="365760"/>
-          </a:xfrm>
-          <a:prstGeom prst="rect">
-            <a:avLst/>
-          </a:prstGeom>
-          <a:noFill/>
-          <a:ln/>
-        </p:spPr>
-        <p:txBody>
-          <a:bodyPr wrap="square" rtlCol="0" anchor="ctr"/>
-          <a:lstStyle/>
-          <a:p>
-            <a:pPr algn="ctr" indent="0" marL="0">
-              <a:buNone/>
-            </a:pPr>
-            <a:r>
-              <a:rPr lang="en-US" sz="1250" b="1" dirty="0">
-                <a:solidFill>
-                  <a:srgbClr val="1A1A1A"/>
-                </a:solidFill>
-                <a:latin typeface="Calibri" pitchFamily="34" charset="0"/>
-                <a:ea typeface="Calibri" pitchFamily="34" charset="-122"/>
-                <a:cs typeface="Calibri" pitchFamily="34" charset="-120"/>
-              </a:rPr>
-              <a:t>Economia local</a:t>
-            </a:r>
-            <a:endParaRPr lang="en-US" sz="1250" dirty="0"/>
-          </a:p>
-        </p:txBody>
-      </p:sp>
-      <p:sp>
-        <p:nvSpPr>
-          <p:cNvPr id="25" name="Shape 16"/>
-          <p:cNvSpPr/>
-          <p:nvPr/>
-        </p:nvSpPr>
-        <p:spPr>
-          <a:xfrm>
-            <a:off x="9785337" y="4206240"/>
-            <a:ext cx="804672" cy="804672"/>
-          </a:xfrm>
-          <a:prstGeom prst="ellipse">
-            <a:avLst/>
-          </a:prstGeom>
-          <a:solidFill>
-            <a:srgbClr val="FFFFFF"/>
-          </a:solidFill>
-          <a:ln w="15875">
-            <a:solidFill>
-              <a:srgbClr val="C81E1E"/>
-            </a:solidFill>
-            <a:prstDash val="solid"/>
-          </a:ln>
-        </p:spPr>
-      </p:sp>
-      <p:pic>
-        <p:nvPicPr>
-          <p:cNvPr id="26" name="Image 7" descr="icons/compass-1A1A1A.png">    </p:cNvPr>
-          <p:cNvPicPr>
-            <a:picLocks noChangeAspect="1"/>
-          </p:cNvPicPr>
-          <p:nvPr/>
-        </p:nvPicPr>
-        <p:blipFill>
-          <a:blip r:embed="rId8"/>
-          <a:stretch>
-            <a:fillRect/>
-          </a:stretch>
-        </p:blipFill>
-        <p:spPr>
-          <a:xfrm>
-            <a:off x="9986505" y="4407408"/>
-            <a:ext cx="402336" cy="402336"/>
-          </a:xfrm>
-          <a:prstGeom prst="rect">
-            <a:avLst/>
-          </a:prstGeom>
-        </p:spPr>
-      </p:pic>
-      <p:sp>
-        <p:nvSpPr>
-          <p:cNvPr id="27" name="Text 17"/>
-          <p:cNvSpPr/>
-          <p:nvPr/>
-        </p:nvSpPr>
-        <p:spPr>
-          <a:xfrm>
-            <a:off x="8823731" y="5120640"/>
-            <a:ext cx="2727884" cy="365760"/>
-          </a:xfrm>
-          <a:prstGeom prst="rect">
-            <a:avLst/>
-          </a:prstGeom>
-          <a:noFill/>
-          <a:ln/>
-        </p:spPr>
-        <p:txBody>
-          <a:bodyPr wrap="square" rtlCol="0" anchor="ctr"/>
-          <a:lstStyle/>
-          <a:p>
-            <a:pPr algn="ctr" indent="0" marL="0">
-              <a:buNone/>
-            </a:pPr>
-            <a:r>
-              <a:rPr lang="en-US" sz="1250" b="1" dirty="0">
-                <a:solidFill>
-                  <a:srgbClr val="1A1A1A"/>
-                </a:solidFill>
-                <a:latin typeface="Calibri" pitchFamily="34" charset="0"/>
-                <a:ea typeface="Calibri" pitchFamily="34" charset="-122"/>
-                <a:cs typeface="Calibri" pitchFamily="34" charset="-120"/>
-              </a:rPr>
-              <a:t>Integração regional</a:t>
-            </a:r>
-            <a:endParaRPr lang="en-US" sz="1250" dirty="0"/>
-          </a:p>
-        </p:txBody>
-      </p:sp>
-      <p:sp>
-        <p:nvSpPr>
-          <p:cNvPr id="29" name="Text 18"/>
-          <p:cNvSpPr/>
-          <p:nvPr/>
-        </p:nvSpPr>
-        <p:spPr>
-          <a:xfrm>
-            <a:off x="11185855" y="6355080"/>
-            <a:ext cx="640080" cy="320040"/>
-          </a:xfrm>
-          <a:prstGeom prst="rect">
-            <a:avLst/>
-          </a:prstGeom>
-          <a:noFill/>
-          <a:ln/>
-        </p:spPr>
-        <p:txBody>
-          <a:bodyPr wrap="square" rtlCol="0" anchor="ctr"/>
-          <a:lstStyle/>
-          <a:p>
-            <a:pPr algn="r" indent="0" marL="0">
-              <a:buNone/>
-            </a:pPr>
-            <a:r>
-              <a:rPr lang="en-US" sz="1000" dirty="0">
-                <a:solidFill>
-                  <a:srgbClr val="8A8A82"/>
-                </a:solidFill>
-                <a:latin typeface="Calibri" pitchFamily="34" charset="0"/>
-                <a:ea typeface="Calibri" pitchFamily="34" charset="-122"/>
-                <a:cs typeface="Calibri" pitchFamily="34" charset="-120"/>
-              </a:rPr>
-              <a:t>04</a:t>
-            </a:r>
-            <a:endParaRPr lang="en-US" sz="1000" dirty="0"/>
+              <a:t>Vista aérea — chegada e cobertura principal</a:t>
+            </a:r>
+            <a:endParaRPr lang="en-US" sz="1700" dirty="0"/>
           </a:p>
         </p:txBody>
       </p:sp>
@@ -6131,7 +5837,7 @@
       </p:grpSpPr>
       <p:pic>
         <p:nvPicPr>
-          <p:cNvPr id="2" name="Image 0" descr="visuals-real/render-01.jpg">    </p:cNvPr>
+          <p:cNvPr id="2" name="Image 0" descr="visuals-real/render-02.jpg">    </p:cNvPr>
           <p:cNvPicPr>
             <a:picLocks noChangeAspect="1"/>
           </p:cNvPicPr>
@@ -6207,7 +5913,7 @@
                 <a:ea typeface="Calibri" pitchFamily="34" charset="-122"/>
                 <a:cs typeface="Calibri" pitchFamily="34" charset="-120"/>
               </a:rPr>
-              <a:t>RENDER 01</a:t>
+              <a:t>RENDER 02</a:t>
             </a:r>
             <a:endParaRPr lang="en-US" sz="1100" dirty="0"/>
           </a:p>
@@ -6246,7 +5952,7 @@
                 <a:ea typeface="Cambria" pitchFamily="34" charset="-122"/>
                 <a:cs typeface="Cambria" pitchFamily="34" charset="-120"/>
               </a:rPr>
-              <a:t>Vista aérea — chegada e cobertura principal</a:t>
+              <a:t>Área de apoio a caminhões e paisagismo</a:t>
             </a:r>
             <a:endParaRPr lang="en-US" sz="1700" dirty="0"/>
           </a:p>
@@ -6286,7 +5992,7 @@
       </p:grpSpPr>
       <p:pic>
         <p:nvPicPr>
-          <p:cNvPr id="2" name="Image 0" descr="visuals-real/render-02.jpg">    </p:cNvPr>
+          <p:cNvPr id="2" name="Image 0" descr="visuals-real/render-03.jpg">    </p:cNvPr>
           <p:cNvPicPr>
             <a:picLocks noChangeAspect="1"/>
           </p:cNvPicPr>
@@ -6362,7 +6068,7 @@
                 <a:ea typeface="Calibri" pitchFamily="34" charset="-122"/>
                 <a:cs typeface="Calibri" pitchFamily="34" charset="-120"/>
               </a:rPr>
-              <a:t>RENDER 02</a:t>
+              <a:t>RENDER 03</a:t>
             </a:r>
             <a:endParaRPr lang="en-US" sz="1100" dirty="0"/>
           </a:p>
@@ -6401,7 +6107,7 @@
                 <a:ea typeface="Cambria" pitchFamily="34" charset="-122"/>
                 <a:cs typeface="Cambria" pitchFamily="34" charset="-120"/>
               </a:rPr>
-              <a:t>Área de apoio a caminhões e paisagismo</a:t>
+              <a:t>Circulação, acessos e organização do pátio</a:t>
             </a:r>
             <a:endParaRPr lang="en-US" sz="1700" dirty="0"/>
           </a:p>
@@ -6441,7 +6147,7 @@
       </p:grpSpPr>
       <p:pic>
         <p:nvPicPr>
-          <p:cNvPr id="2" name="Image 0" descr="visuals-real/render-03.jpg">    </p:cNvPr>
+          <p:cNvPr id="2" name="Image 0" descr="visuals-real/render-04.jpg">    </p:cNvPr>
           <p:cNvPicPr>
             <a:picLocks noChangeAspect="1"/>
           </p:cNvPicPr>
@@ -6517,7 +6223,7 @@
                 <a:ea typeface="Calibri" pitchFamily="34" charset="-122"/>
                 <a:cs typeface="Calibri" pitchFamily="34" charset="-120"/>
               </a:rPr>
-              <a:t>RENDER 03</a:t>
+              <a:t>RENDER 04</a:t>
             </a:r>
             <a:endParaRPr lang="en-US" sz="1100" dirty="0"/>
           </a:p>
@@ -6556,7 +6262,7 @@
                 <a:ea typeface="Cambria" pitchFamily="34" charset="-122"/>
                 <a:cs typeface="Cambria" pitchFamily="34" charset="-120"/>
               </a:rPr>
-              <a:t>Circulação, acessos e organização do pátio</a:t>
+              <a:t>Vista geral — integração com a paisagem</a:t>
             </a:r>
             <a:endParaRPr lang="en-US" sz="1700" dirty="0"/>
           </a:p>

--- a/assets/girassol/Centro-de-Servicos-Girassol-Cocalzinho.pptx
+++ b/assets/girassol/Centro-de-Servicos-Girassol-Cocalzinho.pptx
@@ -1307,7 +1307,7 @@
           <a:p>
             <a:r>
               <a:rPr lang="en-US" dirty="0"/>
-              <a:t>Oito frentes, uma mesma estrutura: transportadores com apoio real para operar com segurança, agronegócio com um ponto de escoamento mais eficiente, famílias com um lugar preparado para parar — e tudo isso movimentando a economia local e integrando a região.</a:t>
+              <a:t>Não é só abastecer o tanque. É dar suporte de verdade pra quem move a estrada todos os dias: caminhoneiro com onde parar com segurança, produtor com ponto de escoamento, família com estrutura decente pra descansar. Oito frentes, uma estrutura só — e tudo isso movimenta a economia daqui.</a:t>
             </a:r>
             <a:endParaRPr lang="en-US" dirty="0"/>
           </a:p>
@@ -4860,7 +4860,7 @@
                 <a:ea typeface="Cambria" pitchFamily="34" charset="-122"/>
                 <a:cs typeface="Cambria" pitchFamily="34" charset="-120"/>
               </a:rPr>
-              <a:t>Não é um posto de combustíveis.</a:t>
+              <a:t>Muito mais que um posto de combustíveis.</a:t>
             </a:r>
             <a:endParaRPr lang="en-US" sz="2800" dirty="0"/>
           </a:p>
@@ -4899,7 +4899,7 @@
                 <a:ea typeface="Calibri" pitchFamily="34" charset="-122"/>
                 <a:cs typeface="Calibri" pitchFamily="34" charset="-120"/>
               </a:rPr>
-              <a:t>É um equipamento urbano de apoio à mobilidade regional.</a:t>
+              <a:t>Estrutura completa para quem roda a BR-070 todos os dias.</a:t>
             </a:r>
             <a:endParaRPr lang="en-US" sz="1500" dirty="0"/>
           </a:p>
